--- a/docs/defensa-stockly.pptx
+++ b/docs/defensa-stockly.pptx
@@ -21,9 +21,11 @@
     <p:sldId id="269" r:id="rId15"/>
     <p:sldId id="270" r:id="rId16"/>
     <p:sldId id="271" r:id="rId17"/>
+    <p:sldId id="272" r:id="rId18"/>
+    <p:sldId id="273" r:id="rId19"/>
   </p:sldIdLst>
   <p:notesMasterIdLst>
-    <p:notesMasterId r:id="rId18"/>
+    <p:notesMasterId r:id="rId20"/>
   </p:notesMasterIdLst>
   <p:sldSz cx="12192000" cy="6858000"/>
   <p:notesSz cx="6858000" cy="12192000"/>
@@ -1157,6 +1159,182 @@
             <a:fld id="{F7021451-1387-4CA6-816F-3879F97B5CBC}" type="slidenum">
               <a:rPr lang="en-US"/>
               <a:t>16</a:t>
+            </a:fld>
+            <a:endParaRPr lang="en-US"/>
+          </a:p>
+        </p:txBody>
+      </p:sp>
+    </p:spTree>
+    <p:extLst>
+      <p:ext uri="{BB962C8B-B14F-4D97-AF65-F5344CB8AC3E}">
+        <p14:creationId xmlns:p14="http://schemas.microsoft.com/office/powerpoint/2010/main" val="1024086991"/>
+      </p:ext>
+    </p:extLst>
+  </p:cSld>
+  <p:clrMapOvr>
+    <a:masterClrMapping/>
+  </p:clrMapOvr>
+</p:notes>
+</file>
+
+<file path=ppt/notesSlides/notesSlide17.xml><?xml version="1.0" encoding="utf-8"?>
+<p:notes xmlns:a="http://schemas.openxmlformats.org/drawingml/2006/main" xmlns:r="http://schemas.openxmlformats.org/officeDocument/2006/relationships" xmlns:p="http://schemas.openxmlformats.org/presentationml/2006/main">
+  <p:cSld>
+    <p:spTree>
+      <p:nvGrpSpPr>
+        <p:cNvPr id="1" name=""/>
+        <p:cNvGrpSpPr/>
+        <p:nvPr/>
+      </p:nvGrpSpPr>
+      <p:grpSpPr>
+        <a:xfrm>
+          <a:off x="0" y="0"/>
+          <a:ext cx="0" cy="0"/>
+          <a:chOff x="0" y="0"/>
+          <a:chExt cx="0" cy="0"/>
+        </a:xfrm>
+      </p:grpSpPr>
+      <p:sp>
+        <p:nvSpPr>
+          <p:cNvPr id="2" name="Slide Image Placeholder 1"/>
+          <p:cNvSpPr>
+            <a:spLocks noGrp="1" noRot="1" noChangeAspect="1"/>
+          </p:cNvSpPr>
+          <p:nvPr>
+            <p:ph type="sldImg"/>
+          </p:nvPr>
+        </p:nvSpPr>
+        <p:spPr/>
+      </p:sp>
+      <p:sp>
+        <p:nvSpPr>
+          <p:cNvPr id="3" name="Notes Placeholder 2"/>
+          <p:cNvSpPr>
+            <a:spLocks noGrp="1"/>
+          </p:cNvSpPr>
+          <p:nvPr>
+            <p:ph type="body" idx="1"/>
+          </p:nvPr>
+        </p:nvSpPr>
+        <p:spPr/>
+        <p:txBody>
+          <a:bodyPr/>
+          <a:lstStyle/>
+          <a:p>
+            <a:r>
+              <a:rPr lang="en-US" dirty="0"/>
+              <a:t/>
+            </a:r>
+            <a:endParaRPr lang="en-US" dirty="0"/>
+          </a:p>
+        </p:txBody>
+      </p:sp>
+      <p:sp>
+        <p:nvSpPr>
+          <p:cNvPr id="4" name="Slide Number Placeholder 3"/>
+          <p:cNvSpPr>
+            <a:spLocks noGrp="1"/>
+          </p:cNvSpPr>
+          <p:nvPr>
+            <p:ph type="sldNum" sz="quarter" idx="10"/>
+          </p:nvPr>
+        </p:nvSpPr>
+        <p:spPr/>
+        <p:txBody>
+          <a:bodyPr/>
+          <a:lstStyle/>
+          <a:p>
+            <a:fld id="{F7021451-1387-4CA6-816F-3879F97B5CBC}" type="slidenum">
+              <a:rPr lang="en-US"/>
+              <a:t>17</a:t>
+            </a:fld>
+            <a:endParaRPr lang="en-US"/>
+          </a:p>
+        </p:txBody>
+      </p:sp>
+    </p:spTree>
+    <p:extLst>
+      <p:ext uri="{BB962C8B-B14F-4D97-AF65-F5344CB8AC3E}">
+        <p14:creationId xmlns:p14="http://schemas.microsoft.com/office/powerpoint/2010/main" val="1024086991"/>
+      </p:ext>
+    </p:extLst>
+  </p:cSld>
+  <p:clrMapOvr>
+    <a:masterClrMapping/>
+  </p:clrMapOvr>
+</p:notes>
+</file>
+
+<file path=ppt/notesSlides/notesSlide18.xml><?xml version="1.0" encoding="utf-8"?>
+<p:notes xmlns:a="http://schemas.openxmlformats.org/drawingml/2006/main" xmlns:r="http://schemas.openxmlformats.org/officeDocument/2006/relationships" xmlns:p="http://schemas.openxmlformats.org/presentationml/2006/main">
+  <p:cSld>
+    <p:spTree>
+      <p:nvGrpSpPr>
+        <p:cNvPr id="1" name=""/>
+        <p:cNvGrpSpPr/>
+        <p:nvPr/>
+      </p:nvGrpSpPr>
+      <p:grpSpPr>
+        <a:xfrm>
+          <a:off x="0" y="0"/>
+          <a:ext cx="0" cy="0"/>
+          <a:chOff x="0" y="0"/>
+          <a:chExt cx="0" cy="0"/>
+        </a:xfrm>
+      </p:grpSpPr>
+      <p:sp>
+        <p:nvSpPr>
+          <p:cNvPr id="2" name="Slide Image Placeholder 1"/>
+          <p:cNvSpPr>
+            <a:spLocks noGrp="1" noRot="1" noChangeAspect="1"/>
+          </p:cNvSpPr>
+          <p:nvPr>
+            <p:ph type="sldImg"/>
+          </p:nvPr>
+        </p:nvSpPr>
+        <p:spPr/>
+      </p:sp>
+      <p:sp>
+        <p:nvSpPr>
+          <p:cNvPr id="3" name="Notes Placeholder 2"/>
+          <p:cNvSpPr>
+            <a:spLocks noGrp="1"/>
+          </p:cNvSpPr>
+          <p:nvPr>
+            <p:ph type="body" idx="1"/>
+          </p:nvPr>
+        </p:nvSpPr>
+        <p:spPr/>
+        <p:txBody>
+          <a:bodyPr/>
+          <a:lstStyle/>
+          <a:p>
+            <a:r>
+              <a:rPr lang="en-US" dirty="0"/>
+              <a:t/>
+            </a:r>
+            <a:endParaRPr lang="en-US" dirty="0"/>
+          </a:p>
+        </p:txBody>
+      </p:sp>
+      <p:sp>
+        <p:nvSpPr>
+          <p:cNvPr id="4" name="Slide Number Placeholder 3"/>
+          <p:cNvSpPr>
+            <a:spLocks noGrp="1"/>
+          </p:cNvSpPr>
+          <p:nvPr>
+            <p:ph type="sldNum" sz="quarter" idx="10"/>
+          </p:nvPr>
+        </p:nvSpPr>
+        <p:spPr/>
+        <p:txBody>
+          <a:bodyPr/>
+          <a:lstStyle/>
+          <a:p>
+            <a:fld id="{F7021451-1387-4CA6-816F-3879F97B5CBC}" type="slidenum">
+              <a:rPr lang="en-US"/>
+              <a:t>18</a:t>
             </a:fld>
             <a:endParaRPr lang="en-US"/>
           </a:p>
@@ -3517,7 +3695,7 @@
                 <a:ea typeface="Calibri" pitchFamily="34" charset="-122"/>
                 <a:cs typeface="Calibri" pitchFamily="34" charset="-120"/>
               </a:rPr>
-              <a:t>APLICACIÓN MÓVIL</a:t>
+              <a:t>CAPTURAS · APLICACIÓN WEB</a:t>
             </a:r>
             <a:endParaRPr lang="en-US" sz="1000" dirty="0"/>
           </a:p>
@@ -3556,7 +3734,7 @@
                 <a:ea typeface="Calibri" pitchFamily="34" charset="-122"/>
                 <a:cs typeface="Calibri" pitchFamily="34" charset="-120"/>
               </a:rPr>
-              <a:t>App Android nativa para el operario</a:t>
+              <a:t>La web en uso · cliente, operario y dashboard</a:t>
             </a:r>
             <a:endParaRPr lang="en-US" sz="3200" dirty="0"/>
           </a:p>
@@ -3595,8 +3773,8 @@
         </p:nvSpPr>
         <p:spPr>
           <a:xfrm>
-            <a:off x="357988" y="1463040"/>
-            <a:ext cx="2697480" cy="2011680"/>
+            <a:off x="816102" y="1280160"/>
+            <a:ext cx="3397910" cy="2157984"/>
           </a:xfrm>
           <a:prstGeom prst="rect">
             <a:avLst/>
@@ -3612,71 +3790,56 @@
           </a:ln>
         </p:spPr>
       </p:sp>
-      <p:sp>
-        <p:nvSpPr>
-          <p:cNvPr id="6" name="Text 4"/>
-          <p:cNvSpPr/>
-          <p:nvPr/>
-        </p:nvSpPr>
-        <p:spPr>
-          <a:xfrm>
-            <a:off x="540868" y="1600200"/>
-            <a:ext cx="914400" cy="457200"/>
-          </a:xfrm>
-          <a:prstGeom prst="rect">
-            <a:avLst/>
-          </a:prstGeom>
-          <a:noFill/>
-          <a:ln/>
-        </p:spPr>
-        <p:txBody>
-          <a:bodyPr wrap="square" rtlCol="0" anchor="ctr"/>
-          <a:lstStyle/>
-          <a:p>
-            <a:pPr indent="0" marL="0">
-              <a:buNone/>
-            </a:pPr>
-            <a:r>
-              <a:rPr lang="en-US" sz="2200" b="1" dirty="0">
-                <a:solidFill>
-                  <a:srgbClr val="C68A2E"/>
-                </a:solidFill>
-                <a:latin typeface="Calibri" pitchFamily="34" charset="0"/>
-                <a:ea typeface="Calibri" pitchFamily="34" charset="-122"/>
-                <a:cs typeface="Calibri" pitchFamily="34" charset="-120"/>
-              </a:rPr>
-              <a:t>01</a:t>
-            </a:r>
-            <a:endParaRPr lang="en-US" sz="2200" dirty="0"/>
-          </a:p>
-        </p:txBody>
-      </p:sp>
-      <p:sp>
-        <p:nvSpPr>
-          <p:cNvPr id="7" name="Text 5"/>
-          <p:cNvSpPr/>
-          <p:nvPr/>
-        </p:nvSpPr>
-        <p:spPr>
-          <a:xfrm>
-            <a:off x="540868" y="2103120"/>
-            <a:ext cx="2331720" cy="457200"/>
-          </a:xfrm>
-          <a:prstGeom prst="rect">
-            <a:avLst/>
-          </a:prstGeom>
-          <a:noFill/>
-          <a:ln/>
-        </p:spPr>
-        <p:txBody>
-          <a:bodyPr wrap="square" rtlCol="0" anchor="ctr"/>
-          <a:lstStyle/>
-          <a:p>
-            <a:pPr indent="0" marL="0">
-              <a:buNone/>
-            </a:pPr>
-            <a:r>
-              <a:rPr lang="en-US" sz="1600" b="1" dirty="0">
+      <p:pic>
+        <p:nvPicPr>
+          <p:cNvPr id="6" name="Image 0" descr="C:\Users\adria\OneDrive\Escritorio\stuff\tfg\TFGDAM\docs\screenshots\app\01-login.png">    </p:cNvPr>
+          <p:cNvPicPr>
+            <a:picLocks noChangeAspect="1"/>
+          </p:cNvPicPr>
+          <p:nvPr/>
+        </p:nvPicPr>
+        <p:blipFill>
+          <a:blip r:embed="rId1"/>
+          <a:stretch>
+            <a:fillRect/>
+          </a:stretch>
+        </p:blipFill>
+        <p:spPr>
+          <a:xfrm>
+            <a:off x="861822" y="1325880"/>
+            <a:ext cx="3306470" cy="2066544"/>
+          </a:xfrm>
+          <a:prstGeom prst="rect">
+            <a:avLst/>
+          </a:prstGeom>
+        </p:spPr>
+      </p:pic>
+      <p:sp>
+        <p:nvSpPr>
+          <p:cNvPr id="7" name="Text 4"/>
+          <p:cNvSpPr/>
+          <p:nvPr/>
+        </p:nvSpPr>
+        <p:spPr>
+          <a:xfrm>
+            <a:off x="861822" y="3429000"/>
+            <a:ext cx="3306470" cy="310896"/>
+          </a:xfrm>
+          <a:prstGeom prst="rect">
+            <a:avLst/>
+          </a:prstGeom>
+          <a:noFill/>
+          <a:ln/>
+        </p:spPr>
+        <p:txBody>
+          <a:bodyPr wrap="square" rtlCol="0" anchor="ctr"/>
+          <a:lstStyle/>
+          <a:p>
+            <a:pPr algn="ctr" indent="0" marL="0">
+              <a:buNone/>
+            </a:pPr>
+            <a:r>
+              <a:rPr lang="en-US" sz="1100" b="1" dirty="0">
                 <a:solidFill>
                   <a:srgbClr val="1E2761"/>
                 </a:solidFill>
@@ -3684,61 +3847,22 @@
                 <a:ea typeface="Calibri" pitchFamily="34" charset="-122"/>
                 <a:cs typeface="Calibri" pitchFamily="34" charset="-120"/>
               </a:rPr>
-              <a:t>Login</a:t>
-            </a:r>
-            <a:endParaRPr lang="en-US" sz="1600" dirty="0"/>
-          </a:p>
-        </p:txBody>
-      </p:sp>
-      <p:sp>
-        <p:nvSpPr>
-          <p:cNvPr id="8" name="Text 6"/>
-          <p:cNvSpPr/>
-          <p:nvPr/>
-        </p:nvSpPr>
-        <p:spPr>
-          <a:xfrm>
-            <a:off x="540868" y="2514600"/>
-            <a:ext cx="2331720" cy="822960"/>
-          </a:xfrm>
-          <a:prstGeom prst="rect">
-            <a:avLst/>
-          </a:prstGeom>
-          <a:noFill/>
-          <a:ln/>
-        </p:spPr>
-        <p:txBody>
-          <a:bodyPr wrap="square" rtlCol="0" anchor="ctr"/>
-          <a:lstStyle/>
-          <a:p>
-            <a:pPr indent="0" marL="0">
-              <a:buNone/>
-            </a:pPr>
-            <a:r>
-              <a:rPr lang="en-US" sz="1200" dirty="0">
-                <a:solidFill>
-                  <a:srgbClr val="1F2937"/>
-                </a:solidFill>
-                <a:latin typeface="Calibri" pitchFamily="34" charset="0"/>
-                <a:ea typeface="Calibri" pitchFamily="34" charset="-122"/>
-                <a:cs typeface="Calibri" pitchFamily="34" charset="-120"/>
-              </a:rPr>
-              <a:t>Email + contraseña → JWT. Sesión persistente.</a:t>
-            </a:r>
-            <a:endParaRPr lang="en-US" sz="1200" dirty="0"/>
-          </a:p>
-        </p:txBody>
-      </p:sp>
-      <p:sp>
-        <p:nvSpPr>
-          <p:cNvPr id="9" name="Shape 7"/>
-          <p:cNvSpPr/>
-          <p:nvPr/>
-        </p:nvSpPr>
-        <p:spPr>
-          <a:xfrm>
-            <a:off x="3284068" y="1463040"/>
-            <a:ext cx="2697480" cy="2011680"/>
+              <a:t>Login con JWT</a:t>
+            </a:r>
+            <a:endParaRPr lang="en-US" sz="1100" dirty="0"/>
+          </a:p>
+        </p:txBody>
+      </p:sp>
+      <p:sp>
+        <p:nvSpPr>
+          <p:cNvPr id="8" name="Shape 5"/>
+          <p:cNvSpPr/>
+          <p:nvPr/>
+        </p:nvSpPr>
+        <p:spPr>
+          <a:xfrm>
+            <a:off x="4396892" y="1280160"/>
+            <a:ext cx="3397910" cy="2157984"/>
           </a:xfrm>
           <a:prstGeom prst="rect">
             <a:avLst/>
@@ -3754,71 +3878,56 @@
           </a:ln>
         </p:spPr>
       </p:sp>
-      <p:sp>
-        <p:nvSpPr>
-          <p:cNvPr id="10" name="Text 8"/>
-          <p:cNvSpPr/>
-          <p:nvPr/>
-        </p:nvSpPr>
-        <p:spPr>
-          <a:xfrm>
-            <a:off x="3466948" y="1600200"/>
-            <a:ext cx="914400" cy="457200"/>
-          </a:xfrm>
-          <a:prstGeom prst="rect">
-            <a:avLst/>
-          </a:prstGeom>
-          <a:noFill/>
-          <a:ln/>
-        </p:spPr>
-        <p:txBody>
-          <a:bodyPr wrap="square" rtlCol="0" anchor="ctr"/>
-          <a:lstStyle/>
-          <a:p>
-            <a:pPr indent="0" marL="0">
-              <a:buNone/>
-            </a:pPr>
-            <a:r>
-              <a:rPr lang="en-US" sz="2200" b="1" dirty="0">
-                <a:solidFill>
-                  <a:srgbClr val="C68A2E"/>
-                </a:solidFill>
-                <a:latin typeface="Calibri" pitchFamily="34" charset="0"/>
-                <a:ea typeface="Calibri" pitchFamily="34" charset="-122"/>
-                <a:cs typeface="Calibri" pitchFamily="34" charset="-120"/>
-              </a:rPr>
-              <a:t>02</a:t>
-            </a:r>
-            <a:endParaRPr lang="en-US" sz="2200" dirty="0"/>
-          </a:p>
-        </p:txBody>
-      </p:sp>
-      <p:sp>
-        <p:nvSpPr>
-          <p:cNvPr id="11" name="Text 9"/>
-          <p:cNvSpPr/>
-          <p:nvPr/>
-        </p:nvSpPr>
-        <p:spPr>
-          <a:xfrm>
-            <a:off x="3466948" y="2103120"/>
-            <a:ext cx="2331720" cy="457200"/>
-          </a:xfrm>
-          <a:prstGeom prst="rect">
-            <a:avLst/>
-          </a:prstGeom>
-          <a:noFill/>
-          <a:ln/>
-        </p:spPr>
-        <p:txBody>
-          <a:bodyPr wrap="square" rtlCol="0" anchor="ctr"/>
-          <a:lstStyle/>
-          <a:p>
-            <a:pPr indent="0" marL="0">
-              <a:buNone/>
-            </a:pPr>
-            <a:r>
-              <a:rPr lang="en-US" sz="1600" b="1" dirty="0">
+      <p:pic>
+        <p:nvPicPr>
+          <p:cNvPr id="9" name="Image 1" descr="C:\Users\adria\OneDrive\Escritorio\stuff\tfg\TFGDAM\docs\screenshots\app\02-catalogo.png">    </p:cNvPr>
+          <p:cNvPicPr>
+            <a:picLocks noChangeAspect="1"/>
+          </p:cNvPicPr>
+          <p:nvPr/>
+        </p:nvPicPr>
+        <p:blipFill>
+          <a:blip r:embed="rId2"/>
+          <a:stretch>
+            <a:fillRect/>
+          </a:stretch>
+        </p:blipFill>
+        <p:spPr>
+          <a:xfrm>
+            <a:off x="4442612" y="1325880"/>
+            <a:ext cx="3306470" cy="2066544"/>
+          </a:xfrm>
+          <a:prstGeom prst="rect">
+            <a:avLst/>
+          </a:prstGeom>
+        </p:spPr>
+      </p:pic>
+      <p:sp>
+        <p:nvSpPr>
+          <p:cNvPr id="10" name="Text 6"/>
+          <p:cNvSpPr/>
+          <p:nvPr/>
+        </p:nvSpPr>
+        <p:spPr>
+          <a:xfrm>
+            <a:off x="4442612" y="3429000"/>
+            <a:ext cx="3306470" cy="310896"/>
+          </a:xfrm>
+          <a:prstGeom prst="rect">
+            <a:avLst/>
+          </a:prstGeom>
+          <a:noFill/>
+          <a:ln/>
+        </p:spPr>
+        <p:txBody>
+          <a:bodyPr wrap="square" rtlCol="0" anchor="ctr"/>
+          <a:lstStyle/>
+          <a:p>
+            <a:pPr algn="ctr" indent="0" marL="0">
+              <a:buNone/>
+            </a:pPr>
+            <a:r>
+              <a:rPr lang="en-US" sz="1100" b="1" dirty="0">
                 <a:solidFill>
                   <a:srgbClr val="1E2761"/>
                 </a:solidFill>
@@ -3826,61 +3935,22 @@
                 <a:ea typeface="Calibri" pitchFamily="34" charset="-122"/>
                 <a:cs typeface="Calibri" pitchFamily="34" charset="-120"/>
               </a:rPr>
-              <a:t>Lista reservas</a:t>
-            </a:r>
-            <a:endParaRPr lang="en-US" sz="1600" dirty="0"/>
-          </a:p>
-        </p:txBody>
-      </p:sp>
-      <p:sp>
-        <p:nvSpPr>
-          <p:cNvPr id="12" name="Text 10"/>
-          <p:cNvSpPr/>
-          <p:nvPr/>
-        </p:nvSpPr>
-        <p:spPr>
-          <a:xfrm>
-            <a:off x="3466948" y="2514600"/>
-            <a:ext cx="2331720" cy="822960"/>
-          </a:xfrm>
-          <a:prstGeom prst="rect">
-            <a:avLst/>
-          </a:prstGeom>
-          <a:noFill/>
-          <a:ln/>
-        </p:spPr>
-        <p:txBody>
-          <a:bodyPr wrap="square" rtlCol="0" anchor="ctr"/>
-          <a:lstStyle/>
-          <a:p>
-            <a:pPr indent="0" marL="0">
-              <a:buNone/>
-            </a:pPr>
-            <a:r>
-              <a:rPr lang="en-US" sz="1200" dirty="0">
-                <a:solidFill>
-                  <a:srgbClr val="1F2937"/>
-                </a:solidFill>
-                <a:latin typeface="Calibri" pitchFamily="34" charset="0"/>
-                <a:ea typeface="Calibri" pitchFamily="34" charset="-122"/>
-                <a:cs typeface="Calibri" pitchFamily="34" charset="-120"/>
-              </a:rPr>
-              <a:t>Activas por defecto. Cliente, producto, fecha, estado.</a:t>
-            </a:r>
-            <a:endParaRPr lang="en-US" sz="1200" dirty="0"/>
-          </a:p>
-        </p:txBody>
-      </p:sp>
-      <p:sp>
-        <p:nvSpPr>
-          <p:cNvPr id="13" name="Shape 11"/>
-          <p:cNvSpPr/>
-          <p:nvPr/>
-        </p:nvSpPr>
-        <p:spPr>
-          <a:xfrm>
-            <a:off x="6210148" y="1463040"/>
-            <a:ext cx="2697480" cy="2011680"/>
+              <a:t>Catálogo · búsqueda y filtros</a:t>
+            </a:r>
+            <a:endParaRPr lang="en-US" sz="1100" dirty="0"/>
+          </a:p>
+        </p:txBody>
+      </p:sp>
+      <p:sp>
+        <p:nvSpPr>
+          <p:cNvPr id="11" name="Shape 7"/>
+          <p:cNvSpPr/>
+          <p:nvPr/>
+        </p:nvSpPr>
+        <p:spPr>
+          <a:xfrm>
+            <a:off x="7977683" y="1280160"/>
+            <a:ext cx="3397910" cy="2157984"/>
           </a:xfrm>
           <a:prstGeom prst="rect">
             <a:avLst/>
@@ -3896,71 +3966,56 @@
           </a:ln>
         </p:spPr>
       </p:sp>
-      <p:sp>
-        <p:nvSpPr>
-          <p:cNvPr id="14" name="Text 12"/>
-          <p:cNvSpPr/>
-          <p:nvPr/>
-        </p:nvSpPr>
-        <p:spPr>
-          <a:xfrm>
-            <a:off x="6393028" y="1600200"/>
-            <a:ext cx="914400" cy="457200"/>
-          </a:xfrm>
-          <a:prstGeom prst="rect">
-            <a:avLst/>
-          </a:prstGeom>
-          <a:noFill/>
-          <a:ln/>
-        </p:spPr>
-        <p:txBody>
-          <a:bodyPr wrap="square" rtlCol="0" anchor="ctr"/>
-          <a:lstStyle/>
-          <a:p>
-            <a:pPr indent="0" marL="0">
-              <a:buNone/>
-            </a:pPr>
-            <a:r>
-              <a:rPr lang="en-US" sz="2200" b="1" dirty="0">
-                <a:solidFill>
-                  <a:srgbClr val="C68A2E"/>
-                </a:solidFill>
-                <a:latin typeface="Calibri" pitchFamily="34" charset="0"/>
-                <a:ea typeface="Calibri" pitchFamily="34" charset="-122"/>
-                <a:cs typeface="Calibri" pitchFamily="34" charset="-120"/>
-              </a:rPr>
-              <a:t>03</a:t>
-            </a:r>
-            <a:endParaRPr lang="en-US" sz="2200" dirty="0"/>
-          </a:p>
-        </p:txBody>
-      </p:sp>
-      <p:sp>
-        <p:nvSpPr>
-          <p:cNvPr id="15" name="Text 13"/>
-          <p:cNvSpPr/>
-          <p:nvPr/>
-        </p:nvSpPr>
-        <p:spPr>
-          <a:xfrm>
-            <a:off x="6393028" y="2103120"/>
-            <a:ext cx="2331720" cy="457200"/>
-          </a:xfrm>
-          <a:prstGeom prst="rect">
-            <a:avLst/>
-          </a:prstGeom>
-          <a:noFill/>
-          <a:ln/>
-        </p:spPr>
-        <p:txBody>
-          <a:bodyPr wrap="square" rtlCol="0" anchor="ctr"/>
-          <a:lstStyle/>
-          <a:p>
-            <a:pPr indent="0" marL="0">
-              <a:buNone/>
-            </a:pPr>
-            <a:r>
-              <a:rPr lang="en-US" sz="1600" b="1" dirty="0">
+      <p:pic>
+        <p:nvPicPr>
+          <p:cNvPr id="12" name="Image 2" descr="C:\Users\adria\OneDrive\Escritorio\stuff\tfg\TFGDAM\docs\screenshots\app\03-detalle-producto.png">    </p:cNvPr>
+          <p:cNvPicPr>
+            <a:picLocks noChangeAspect="1"/>
+          </p:cNvPicPr>
+          <p:nvPr/>
+        </p:nvPicPr>
+        <p:blipFill>
+          <a:blip r:embed="rId3"/>
+          <a:stretch>
+            <a:fillRect/>
+          </a:stretch>
+        </p:blipFill>
+        <p:spPr>
+          <a:xfrm>
+            <a:off x="8023403" y="1325880"/>
+            <a:ext cx="3306470" cy="2066544"/>
+          </a:xfrm>
+          <a:prstGeom prst="rect">
+            <a:avLst/>
+          </a:prstGeom>
+        </p:spPr>
+      </p:pic>
+      <p:sp>
+        <p:nvSpPr>
+          <p:cNvPr id="13" name="Text 8"/>
+          <p:cNvSpPr/>
+          <p:nvPr/>
+        </p:nvSpPr>
+        <p:spPr>
+          <a:xfrm>
+            <a:off x="8023403" y="3429000"/>
+            <a:ext cx="3306470" cy="310896"/>
+          </a:xfrm>
+          <a:prstGeom prst="rect">
+            <a:avLst/>
+          </a:prstGeom>
+          <a:noFill/>
+          <a:ln/>
+        </p:spPr>
+        <p:txBody>
+          <a:bodyPr wrap="square" rtlCol="0" anchor="ctr"/>
+          <a:lstStyle/>
+          <a:p>
+            <a:pPr algn="ctr" indent="0" marL="0">
+              <a:buNone/>
+            </a:pPr>
+            <a:r>
+              <a:rPr lang="en-US" sz="1100" b="1" dirty="0">
                 <a:solidFill>
                   <a:srgbClr val="1E2761"/>
                 </a:solidFill>
@@ -3968,61 +4023,22 @@
                 <a:ea typeface="Calibri" pitchFamily="34" charset="-122"/>
                 <a:cs typeface="Calibri" pitchFamily="34" charset="-120"/>
               </a:rPr>
-              <a:t>Detalle</a:t>
-            </a:r>
-            <a:endParaRPr lang="en-US" sz="1600" dirty="0"/>
-          </a:p>
-        </p:txBody>
-      </p:sp>
-      <p:sp>
-        <p:nvSpPr>
-          <p:cNvPr id="16" name="Text 14"/>
-          <p:cNvSpPr/>
-          <p:nvPr/>
-        </p:nvSpPr>
-        <p:spPr>
-          <a:xfrm>
-            <a:off x="6393028" y="2514600"/>
-            <a:ext cx="2331720" cy="822960"/>
-          </a:xfrm>
-          <a:prstGeom prst="rect">
-            <a:avLst/>
-          </a:prstGeom>
-          <a:noFill/>
-          <a:ln/>
-        </p:spPr>
-        <p:txBody>
-          <a:bodyPr wrap="square" rtlCol="0" anchor="ctr"/>
-          <a:lstStyle/>
-          <a:p>
-            <a:pPr indent="0" marL="0">
-              <a:buNone/>
-            </a:pPr>
-            <a:r>
-              <a:rPr lang="en-US" sz="1200" dirty="0">
-                <a:solidFill>
-                  <a:srgbClr val="1F2937"/>
-                </a:solidFill>
-                <a:latin typeface="Calibri" pitchFamily="34" charset="0"/>
-                <a:ea typeface="Calibri" pitchFamily="34" charset="-122"/>
-                <a:cs typeface="Calibri" pitchFamily="34" charset="-120"/>
-              </a:rPr>
-              <a:t>Historial · botones Confirmar / Entregar contextuales.</a:t>
-            </a:r>
-            <a:endParaRPr lang="en-US" sz="1200" dirty="0"/>
-          </a:p>
-        </p:txBody>
-      </p:sp>
-      <p:sp>
-        <p:nvSpPr>
-          <p:cNvPr id="17" name="Shape 15"/>
-          <p:cNvSpPr/>
-          <p:nvPr/>
-        </p:nvSpPr>
-        <p:spPr>
-          <a:xfrm>
-            <a:off x="9136228" y="1463040"/>
-            <a:ext cx="2697480" cy="2011680"/>
+              <a:t>Detalle + reserva</a:t>
+            </a:r>
+            <a:endParaRPr lang="en-US" sz="1100" dirty="0"/>
+          </a:p>
+        </p:txBody>
+      </p:sp>
+      <p:sp>
+        <p:nvSpPr>
+          <p:cNvPr id="14" name="Shape 9"/>
+          <p:cNvSpPr/>
+          <p:nvPr/>
+        </p:nvSpPr>
+        <p:spPr>
+          <a:xfrm>
+            <a:off x="816102" y="3931920"/>
+            <a:ext cx="3397910" cy="2157984"/>
           </a:xfrm>
           <a:prstGeom prst="rect">
             <a:avLst/>
@@ -4038,71 +4054,56 @@
           </a:ln>
         </p:spPr>
       </p:sp>
-      <p:sp>
-        <p:nvSpPr>
-          <p:cNvPr id="18" name="Text 16"/>
-          <p:cNvSpPr/>
-          <p:nvPr/>
-        </p:nvSpPr>
-        <p:spPr>
-          <a:xfrm>
-            <a:off x="9319108" y="1600200"/>
-            <a:ext cx="914400" cy="457200"/>
-          </a:xfrm>
-          <a:prstGeom prst="rect">
-            <a:avLst/>
-          </a:prstGeom>
-          <a:noFill/>
-          <a:ln/>
-        </p:spPr>
-        <p:txBody>
-          <a:bodyPr wrap="square" rtlCol="0" anchor="ctr"/>
-          <a:lstStyle/>
-          <a:p>
-            <a:pPr indent="0" marL="0">
-              <a:buNone/>
-            </a:pPr>
-            <a:r>
-              <a:rPr lang="en-US" sz="2200" b="1" dirty="0">
-                <a:solidFill>
-                  <a:srgbClr val="C68A2E"/>
-                </a:solidFill>
-                <a:latin typeface="Calibri" pitchFamily="34" charset="0"/>
-                <a:ea typeface="Calibri" pitchFamily="34" charset="-122"/>
-                <a:cs typeface="Calibri" pitchFamily="34" charset="-120"/>
-              </a:rPr>
-              <a:t>04</a:t>
-            </a:r>
-            <a:endParaRPr lang="en-US" sz="2200" dirty="0"/>
-          </a:p>
-        </p:txBody>
-      </p:sp>
-      <p:sp>
-        <p:nvSpPr>
-          <p:cNvPr id="19" name="Text 17"/>
-          <p:cNvSpPr/>
-          <p:nvPr/>
-        </p:nvSpPr>
-        <p:spPr>
-          <a:xfrm>
-            <a:off x="9319108" y="2103120"/>
-            <a:ext cx="2331720" cy="457200"/>
-          </a:xfrm>
-          <a:prstGeom prst="rect">
-            <a:avLst/>
-          </a:prstGeom>
-          <a:noFill/>
-          <a:ln/>
-        </p:spPr>
-        <p:txBody>
-          <a:bodyPr wrap="square" rtlCol="0" anchor="ctr"/>
-          <a:lstStyle/>
-          <a:p>
-            <a:pPr indent="0" marL="0">
-              <a:buNone/>
-            </a:pPr>
-            <a:r>
-              <a:rPr lang="en-US" sz="1600" b="1" dirty="0">
+      <p:pic>
+        <p:nvPicPr>
+          <p:cNvPr id="15" name="Image 3" descr="C:\Users\adria\OneDrive\Escritorio\stuff\tfg\TFGDAM\docs\screenshots\app\04-mis-reservas.png">    </p:cNvPr>
+          <p:cNvPicPr>
+            <a:picLocks noChangeAspect="1"/>
+          </p:cNvPicPr>
+          <p:nvPr/>
+        </p:nvPicPr>
+        <p:blipFill>
+          <a:blip r:embed="rId4"/>
+          <a:stretch>
+            <a:fillRect/>
+          </a:stretch>
+        </p:blipFill>
+        <p:spPr>
+          <a:xfrm>
+            <a:off x="861822" y="3977640"/>
+            <a:ext cx="3306470" cy="2066544"/>
+          </a:xfrm>
+          <a:prstGeom prst="rect">
+            <a:avLst/>
+          </a:prstGeom>
+        </p:spPr>
+      </p:pic>
+      <p:sp>
+        <p:nvSpPr>
+          <p:cNvPr id="16" name="Text 10"/>
+          <p:cNvSpPr/>
+          <p:nvPr/>
+        </p:nvSpPr>
+        <p:spPr>
+          <a:xfrm>
+            <a:off x="861822" y="6080760"/>
+            <a:ext cx="3306470" cy="310896"/>
+          </a:xfrm>
+          <a:prstGeom prst="rect">
+            <a:avLst/>
+          </a:prstGeom>
+          <a:noFill/>
+          <a:ln/>
+        </p:spPr>
+        <p:txBody>
+          <a:bodyPr wrap="square" rtlCol="0" anchor="ctr"/>
+          <a:lstStyle/>
+          <a:p>
+            <a:pPr algn="ctr" indent="0" marL="0">
+              <a:buNone/>
+            </a:pPr>
+            <a:r>
+              <a:rPr lang="en-US" sz="1100" b="1" dirty="0">
                 <a:solidFill>
                   <a:srgbClr val="1E2761"/>
                 </a:solidFill>
@@ -4110,61 +4111,22 @@
                 <a:ea typeface="Calibri" pitchFamily="34" charset="-122"/>
                 <a:cs typeface="Calibri" pitchFamily="34" charset="-120"/>
               </a:rPr>
-              <a:t>Incidencia</a:t>
-            </a:r>
-            <a:endParaRPr lang="en-US" sz="1600" dirty="0"/>
-          </a:p>
-        </p:txBody>
-      </p:sp>
-      <p:sp>
-        <p:nvSpPr>
-          <p:cNvPr id="20" name="Text 18"/>
-          <p:cNvSpPr/>
-          <p:nvPr/>
-        </p:nvSpPr>
-        <p:spPr>
-          <a:xfrm>
-            <a:off x="9319108" y="2514600"/>
-            <a:ext cx="2331720" cy="822960"/>
-          </a:xfrm>
-          <a:prstGeom prst="rect">
-            <a:avLst/>
-          </a:prstGeom>
-          <a:noFill/>
-          <a:ln/>
-        </p:spPr>
-        <p:txBody>
-          <a:bodyPr wrap="square" rtlCol="0" anchor="ctr"/>
-          <a:lstStyle/>
-          <a:p>
-            <a:pPr indent="0" marL="0">
-              <a:buNone/>
-            </a:pPr>
-            <a:r>
-              <a:rPr lang="en-US" sz="1200" dirty="0">
-                <a:solidFill>
-                  <a:srgbClr val="1F2937"/>
-                </a:solidFill>
-                <a:latin typeface="Calibri" pitchFamily="34" charset="0"/>
-                <a:ea typeface="Calibri" pitchFamily="34" charset="-122"/>
-                <a:cs typeface="Calibri" pitchFamily="34" charset="-120"/>
-              </a:rPr>
-              <a:t>Tipo (rotura / faltante / mal estado / otro) + texto.</a:t>
-            </a:r>
-            <a:endParaRPr lang="en-US" sz="1200" dirty="0"/>
-          </a:p>
-        </p:txBody>
-      </p:sp>
-      <p:sp>
-        <p:nvSpPr>
-          <p:cNvPr id="21" name="Shape 19"/>
-          <p:cNvSpPr/>
-          <p:nvPr/>
-        </p:nvSpPr>
-        <p:spPr>
-          <a:xfrm>
-            <a:off x="548640" y="3840480"/>
-            <a:ext cx="11094415" cy="2194560"/>
+              <a:t>Mis reservas (cliente)</a:t>
+            </a:r>
+            <a:endParaRPr lang="en-US" sz="1100" dirty="0"/>
+          </a:p>
+        </p:txBody>
+      </p:sp>
+      <p:sp>
+        <p:nvSpPr>
+          <p:cNvPr id="17" name="Shape 11"/>
+          <p:cNvSpPr/>
+          <p:nvPr/>
+        </p:nvSpPr>
+        <p:spPr>
+          <a:xfrm>
+            <a:off x="4396892" y="3931920"/>
+            <a:ext cx="3397910" cy="2157984"/>
           </a:xfrm>
           <a:prstGeom prst="rect">
             <a:avLst/>
@@ -4180,160 +4142,154 @@
           </a:ln>
         </p:spPr>
       </p:sp>
-      <p:sp>
-        <p:nvSpPr>
-          <p:cNvPr id="22" name="Shape 20"/>
-          <p:cNvSpPr/>
-          <p:nvPr/>
-        </p:nvSpPr>
-        <p:spPr>
-          <a:xfrm>
-            <a:off x="548640" y="3840480"/>
-            <a:ext cx="11094415" cy="411480"/>
+      <p:pic>
+        <p:nvPicPr>
+          <p:cNvPr id="18" name="Image 4" descr="C:\Users\adria\OneDrive\Escritorio\stuff\tfg\TFGDAM\docs\screenshots\app\05-cola-reservas.png">    </p:cNvPr>
+          <p:cNvPicPr>
+            <a:picLocks noChangeAspect="1"/>
+          </p:cNvPicPr>
+          <p:nvPr/>
+        </p:nvPicPr>
+        <p:blipFill>
+          <a:blip r:embed="rId5"/>
+          <a:stretch>
+            <a:fillRect/>
+          </a:stretch>
+        </p:blipFill>
+        <p:spPr>
+          <a:xfrm>
+            <a:off x="4442612" y="3977640"/>
+            <a:ext cx="3306470" cy="2066544"/>
+          </a:xfrm>
+          <a:prstGeom prst="rect">
+            <a:avLst/>
+          </a:prstGeom>
+        </p:spPr>
+      </p:pic>
+      <p:sp>
+        <p:nvSpPr>
+          <p:cNvPr id="19" name="Text 12"/>
+          <p:cNvSpPr/>
+          <p:nvPr/>
+        </p:nvSpPr>
+        <p:spPr>
+          <a:xfrm>
+            <a:off x="4442612" y="6080760"/>
+            <a:ext cx="3306470" cy="310896"/>
+          </a:xfrm>
+          <a:prstGeom prst="rect">
+            <a:avLst/>
+          </a:prstGeom>
+          <a:noFill/>
+          <a:ln/>
+        </p:spPr>
+        <p:txBody>
+          <a:bodyPr wrap="square" rtlCol="0" anchor="ctr"/>
+          <a:lstStyle/>
+          <a:p>
+            <a:pPr algn="ctr" indent="0" marL="0">
+              <a:buNone/>
+            </a:pPr>
+            <a:r>
+              <a:rPr lang="en-US" sz="1100" b="1" dirty="0">
+                <a:solidFill>
+                  <a:srgbClr val="1E2761"/>
+                </a:solidFill>
+                <a:latin typeface="Calibri" pitchFamily="34" charset="0"/>
+                <a:ea typeface="Calibri" pitchFamily="34" charset="-122"/>
+                <a:cs typeface="Calibri" pitchFamily="34" charset="-120"/>
+              </a:rPr>
+              <a:t>Cola de reservas (operario)</a:t>
+            </a:r>
+            <a:endParaRPr lang="en-US" sz="1100" dirty="0"/>
+          </a:p>
+        </p:txBody>
+      </p:sp>
+      <p:sp>
+        <p:nvSpPr>
+          <p:cNvPr id="20" name="Shape 13"/>
+          <p:cNvSpPr/>
+          <p:nvPr/>
+        </p:nvSpPr>
+        <p:spPr>
+          <a:xfrm>
+            <a:off x="7977683" y="3931920"/>
+            <a:ext cx="3397910" cy="2157984"/>
           </a:xfrm>
           <a:prstGeom prst="rect">
             <a:avLst/>
           </a:prstGeom>
           <a:solidFill>
-            <a:srgbClr val="1E2761"/>
+            <a:srgbClr val="F8FAFC"/>
           </a:solidFill>
           <a:ln w="12700">
             <a:solidFill>
-              <a:srgbClr val="1E2761"/>
+              <a:srgbClr val="E5E7EB"/>
             </a:solidFill>
             <a:prstDash val="solid"/>
           </a:ln>
         </p:spPr>
       </p:sp>
-      <p:sp>
-        <p:nvSpPr>
-          <p:cNvPr id="23" name="Text 21"/>
-          <p:cNvSpPr/>
-          <p:nvPr/>
-        </p:nvSpPr>
-        <p:spPr>
-          <a:xfrm>
-            <a:off x="731520" y="3886200"/>
-            <a:ext cx="5486400" cy="320040"/>
-          </a:xfrm>
-          <a:prstGeom prst="rect">
-            <a:avLst/>
-          </a:prstGeom>
-          <a:noFill/>
-          <a:ln/>
-        </p:spPr>
-        <p:txBody>
-          <a:bodyPr wrap="square" rtlCol="0" anchor="ctr"/>
-          <a:lstStyle/>
-          <a:p>
-            <a:pPr indent="0" marL="0">
-              <a:buNone/>
-            </a:pPr>
-            <a:r>
-              <a:rPr lang="en-US" sz="1400" b="1" dirty="0">
-                <a:solidFill>
-                  <a:srgbClr val="FFFFFF"/>
-                </a:solidFill>
-              </a:rPr>
-              <a:t>Detalles técnicos</a:t>
-            </a:r>
-            <a:endParaRPr lang="en-US" sz="1400" dirty="0"/>
-          </a:p>
-        </p:txBody>
-      </p:sp>
-      <p:sp>
-        <p:nvSpPr>
-          <p:cNvPr id="24" name="Text 22"/>
-          <p:cNvSpPr/>
-          <p:nvPr/>
-        </p:nvSpPr>
-        <p:spPr>
-          <a:xfrm>
-            <a:off x="731520" y="4389120"/>
-            <a:ext cx="10728655" cy="1508760"/>
-          </a:xfrm>
-          <a:prstGeom prst="rect">
-            <a:avLst/>
-          </a:prstGeom>
-          <a:noFill/>
-          <a:ln/>
-        </p:spPr>
-        <p:txBody>
-          <a:bodyPr wrap="square" rtlCol="0" anchor="ctr"/>
-          <a:lstStyle/>
-          <a:p>
-            <a:pPr indent="0" marL="0">
-              <a:spcAft>
-                <a:spcPts val="200"/>
-              </a:spcAft>
-              <a:buNone/>
-            </a:pPr>
-            <a:r>
-              <a:rPr lang="en-US" sz="1300" dirty="0">
-                <a:solidFill>
-                  <a:srgbClr val="1F2937"/>
-                </a:solidFill>
-                <a:latin typeface="Calibri" pitchFamily="34" charset="0"/>
-                <a:ea typeface="Calibri" pitchFamily="34" charset="-122"/>
-                <a:cs typeface="Calibri" pitchFamily="34" charset="-120"/>
-              </a:rPr>
-              <a:t>• Kotlin + Jetpack Compose · Navigation Compose · single-activity.
-</a:t>
-            </a:r>
-            <a:pPr indent="0" marL="0">
-              <a:spcAft>
-                <a:spcPts val="200"/>
-              </a:spcAft>
-              <a:buNone/>
-            </a:pPr>
-            <a:r>
-              <a:rPr lang="en-US" sz="1300" dirty="0">
-                <a:solidFill>
-                  <a:srgbClr val="1F2937"/>
-                </a:solidFill>
-                <a:latin typeface="Calibri" pitchFamily="34" charset="0"/>
-                <a:ea typeface="Calibri" pitchFamily="34" charset="-122"/>
-                <a:cs typeface="Calibri" pitchFamily="34" charset="-120"/>
-              </a:rPr>
-              <a:t>• Retrofit + OkHttp + AuthInterceptor (inyecta JWT en cada petición).
-</a:t>
-            </a:r>
-            <a:pPr indent="0" marL="0">
-              <a:spcAft>
-                <a:spcPts val="200"/>
-              </a:spcAft>
-              <a:buNone/>
-            </a:pPr>
-            <a:r>
-              <a:rPr lang="en-US" sz="1300" dirty="0">
-                <a:solidFill>
-                  <a:srgbClr val="1F2937"/>
-                </a:solidFill>
-                <a:latin typeface="Calibri" pitchFamily="34" charset="0"/>
-                <a:ea typeface="Calibri" pitchFamily="34" charset="-122"/>
-                <a:cs typeface="Calibri" pitchFamily="34" charset="-120"/>
-              </a:rPr>
-              <a:t>• JWT cifrado con EncryptedSharedPreferences + Android Keystore.
-</a:t>
-            </a:r>
-            <a:pPr indent="0" marL="0">
-              <a:spcAft>
-                <a:spcPts val="200"/>
-              </a:spcAft>
-              <a:buNone/>
-            </a:pPr>
-            <a:r>
-              <a:rPr lang="en-US" sz="1300" dirty="0">
-                <a:solidFill>
-                  <a:srgbClr val="1F2937"/>
-                </a:solidFill>
-                <a:latin typeface="Calibri" pitchFamily="34" charset="0"/>
-                <a:ea typeface="Calibri" pitchFamily="34" charset="-122"/>
-                <a:cs typeface="Calibri" pitchFamily="34" charset="-120"/>
-              </a:rPr>
-              <a:t>• BASE_URL por build variant: 10.0.2.2 (debug) / Railway (release).</a:t>
-            </a:r>
-            <a:endParaRPr lang="en-US" sz="1300" dirty="0"/>
+      <p:pic>
+        <p:nvPicPr>
+          <p:cNvPr id="21" name="Image 5" descr="C:\Users\adria\OneDrive\Escritorio\stuff\tfg\TFGDAM\docs\screenshots\app\06-dashboard.png">    </p:cNvPr>
+          <p:cNvPicPr>
+            <a:picLocks noChangeAspect="1"/>
+          </p:cNvPicPr>
+          <p:nvPr/>
+        </p:nvPicPr>
+        <p:blipFill>
+          <a:blip r:embed="rId6"/>
+          <a:stretch>
+            <a:fillRect/>
+          </a:stretch>
+        </p:blipFill>
+        <p:spPr>
+          <a:xfrm>
+            <a:off x="8023403" y="3977640"/>
+            <a:ext cx="3306470" cy="2066544"/>
+          </a:xfrm>
+          <a:prstGeom prst="rect">
+            <a:avLst/>
+          </a:prstGeom>
+        </p:spPr>
+      </p:pic>
+      <p:sp>
+        <p:nvSpPr>
+          <p:cNvPr id="22" name="Text 14"/>
+          <p:cNvSpPr/>
+          <p:nvPr/>
+        </p:nvSpPr>
+        <p:spPr>
+          <a:xfrm>
+            <a:off x="8023403" y="6080760"/>
+            <a:ext cx="3306470" cy="310896"/>
+          </a:xfrm>
+          <a:prstGeom prst="rect">
+            <a:avLst/>
+          </a:prstGeom>
+          <a:noFill/>
+          <a:ln/>
+        </p:spPr>
+        <p:txBody>
+          <a:bodyPr wrap="square" rtlCol="0" anchor="ctr"/>
+          <a:lstStyle/>
+          <a:p>
+            <a:pPr algn="ctr" indent="0" marL="0">
+              <a:buNone/>
+            </a:pPr>
+            <a:r>
+              <a:rPr lang="en-US" sz="1100" b="1" dirty="0">
+                <a:solidFill>
+                  <a:srgbClr val="1E2761"/>
+                </a:solidFill>
+                <a:latin typeface="Calibri" pitchFamily="34" charset="0"/>
+                <a:ea typeface="Calibri" pitchFamily="34" charset="-122"/>
+                <a:cs typeface="Calibri" pitchFamily="34" charset="-120"/>
+              </a:rPr>
+              <a:t>Dashboard de KPIs (admin)</a:t>
+            </a:r>
+            <a:endParaRPr lang="en-US" sz="1100" dirty="0"/>
           </a:p>
         </p:txBody>
       </p:sp>
@@ -4395,7 +4351,7 @@
                 <a:ea typeface="Calibri" pitchFamily="34" charset="-122"/>
                 <a:cs typeface="Calibri" pitchFamily="34" charset="-120"/>
               </a:rPr>
-              <a:t>INFRAESTRUCTURA</a:t>
+              <a:t>CAPTURAS · APLICACIÓN WEB</a:t>
             </a:r>
             <a:endParaRPr lang="en-US" sz="1000" dirty="0"/>
           </a:p>
@@ -4434,7 +4390,7 @@
                 <a:ea typeface="Calibri" pitchFamily="34" charset="-122"/>
                 <a:cs typeface="Calibri" pitchFamily="34" charset="-120"/>
               </a:rPr>
-              <a:t>Despliegue en Railway · deploy continuo</a:t>
+              <a:t>Administración, modo oscuro e instalación</a:t>
             </a:r>
             <a:endParaRPr lang="en-US" sz="3200" dirty="0"/>
           </a:p>
@@ -4473,8 +4429,8 @@
         </p:nvSpPr>
         <p:spPr>
           <a:xfrm>
-            <a:off x="609448" y="1645920"/>
-            <a:ext cx="2011680" cy="1005840"/>
+            <a:off x="2606497" y="1280160"/>
+            <a:ext cx="3397910" cy="2157984"/>
           </a:xfrm>
           <a:prstGeom prst="rect">
             <a:avLst/>
@@ -4490,16 +4446,40 @@
           </a:ln>
         </p:spPr>
       </p:sp>
-      <p:sp>
-        <p:nvSpPr>
-          <p:cNvPr id="6" name="Text 4"/>
-          <p:cNvSpPr/>
-          <p:nvPr/>
-        </p:nvSpPr>
-        <p:spPr>
-          <a:xfrm>
-            <a:off x="609448" y="1737360"/>
-            <a:ext cx="2011680" cy="365760"/>
+      <p:pic>
+        <p:nvPicPr>
+          <p:cNvPr id="6" name="Image 0" descr="C:\Users\adria\OneDrive\Escritorio\stuff\tfg\TFGDAM\docs\screenshots\app\07-inventario.png">    </p:cNvPr>
+          <p:cNvPicPr>
+            <a:picLocks noChangeAspect="1"/>
+          </p:cNvPicPr>
+          <p:nvPr/>
+        </p:nvPicPr>
+        <p:blipFill>
+          <a:blip r:embed="rId1"/>
+          <a:stretch>
+            <a:fillRect/>
+          </a:stretch>
+        </p:blipFill>
+        <p:spPr>
+          <a:xfrm>
+            <a:off x="2652217" y="1325880"/>
+            <a:ext cx="3306470" cy="2066544"/>
+          </a:xfrm>
+          <a:prstGeom prst="rect">
+            <a:avLst/>
+          </a:prstGeom>
+        </p:spPr>
+      </p:pic>
+      <p:sp>
+        <p:nvSpPr>
+          <p:cNvPr id="7" name="Text 4"/>
+          <p:cNvSpPr/>
+          <p:nvPr/>
+        </p:nvSpPr>
+        <p:spPr>
+          <a:xfrm>
+            <a:off x="2652217" y="3429000"/>
+            <a:ext cx="3306470" cy="310896"/>
           </a:xfrm>
           <a:prstGeom prst="rect">
             <a:avLst/>
@@ -4515,7 +4495,7 @@
               <a:buNone/>
             </a:pPr>
             <a:r>
-              <a:rPr lang="en-US" sz="1600" b="1" dirty="0">
+              <a:rPr lang="en-US" sz="1100" b="1" dirty="0">
                 <a:solidFill>
                   <a:srgbClr val="1E2761"/>
                 </a:solidFill>
@@ -4523,46 +4503,7 @@
                 <a:ea typeface="Calibri" pitchFamily="34" charset="-122"/>
                 <a:cs typeface="Calibri" pitchFamily="34" charset="-120"/>
               </a:rPr>
-              <a:t>git push</a:t>
-            </a:r>
-            <a:endParaRPr lang="en-US" sz="1600" dirty="0"/>
-          </a:p>
-        </p:txBody>
-      </p:sp>
-      <p:sp>
-        <p:nvSpPr>
-          <p:cNvPr id="7" name="Text 5"/>
-          <p:cNvSpPr/>
-          <p:nvPr/>
-        </p:nvSpPr>
-        <p:spPr>
-          <a:xfrm>
-            <a:off x="609448" y="2148840"/>
-            <a:ext cx="2011680" cy="365760"/>
-          </a:xfrm>
-          <a:prstGeom prst="rect">
-            <a:avLst/>
-          </a:prstGeom>
-          <a:noFill/>
-          <a:ln/>
-        </p:spPr>
-        <p:txBody>
-          <a:bodyPr wrap="square" rtlCol="0" anchor="ctr"/>
-          <a:lstStyle/>
-          <a:p>
-            <a:pPr algn="ctr" indent="0" marL="0">
-              <a:buNone/>
-            </a:pPr>
-            <a:r>
-              <a:rPr lang="en-US" sz="1100" dirty="0">
-                <a:solidFill>
-                  <a:srgbClr val="6B7280"/>
-                </a:solidFill>
-                <a:latin typeface="Consolas" pitchFamily="34" charset="0"/>
-                <a:ea typeface="Consolas" pitchFamily="34" charset="-122"/>
-                <a:cs typeface="Consolas" pitchFamily="34" charset="-120"/>
-              </a:rPr>
-              <a:t>main</a:t>
+              <a:t>Inventario · alerta de stock bajo</a:t>
             </a:r>
             <a:endParaRPr lang="en-US" sz="1100" dirty="0"/>
           </a:p>
@@ -4570,50 +4511,14 @@
       </p:sp>
       <p:sp>
         <p:nvSpPr>
-          <p:cNvPr id="8" name="Text 6"/>
-          <p:cNvSpPr/>
-          <p:nvPr/>
-        </p:nvSpPr>
-        <p:spPr>
-          <a:xfrm>
-            <a:off x="2621128" y="1874520"/>
-            <a:ext cx="228600" cy="457200"/>
-          </a:xfrm>
-          <a:prstGeom prst="rect">
-            <a:avLst/>
-          </a:prstGeom>
-          <a:noFill/>
-          <a:ln/>
-        </p:spPr>
-        <p:txBody>
-          <a:bodyPr wrap="square" rtlCol="0" anchor="ctr"/>
-          <a:lstStyle/>
-          <a:p>
-            <a:pPr algn="ctr" indent="0" marL="0">
-              <a:buNone/>
-            </a:pPr>
-            <a:r>
-              <a:rPr lang="en-US" sz="1400" dirty="0">
-                <a:solidFill>
-                  <a:srgbClr val="C68A2E"/>
-                </a:solidFill>
-              </a:rPr>
-              <a:t>▶</a:t>
-            </a:r>
-            <a:endParaRPr lang="en-US" sz="1400" dirty="0"/>
-          </a:p>
-        </p:txBody>
-      </p:sp>
-      <p:sp>
-        <p:nvSpPr>
-          <p:cNvPr id="9" name="Shape 7"/>
-          <p:cNvSpPr/>
-          <p:nvPr/>
-        </p:nvSpPr>
-        <p:spPr>
-          <a:xfrm>
-            <a:off x="2849728" y="1645920"/>
-            <a:ext cx="2011680" cy="1005840"/>
+          <p:cNvPr id="8" name="Shape 5"/>
+          <p:cNvSpPr/>
+          <p:nvPr/>
+        </p:nvSpPr>
+        <p:spPr>
+          <a:xfrm>
+            <a:off x="6187288" y="1280160"/>
+            <a:ext cx="3397910" cy="2157984"/>
           </a:xfrm>
           <a:prstGeom prst="rect">
             <a:avLst/>
@@ -4629,16 +4534,40 @@
           </a:ln>
         </p:spPr>
       </p:sp>
-      <p:sp>
-        <p:nvSpPr>
-          <p:cNvPr id="10" name="Text 8"/>
-          <p:cNvSpPr/>
-          <p:nvPr/>
-        </p:nvSpPr>
-        <p:spPr>
-          <a:xfrm>
-            <a:off x="2849728" y="1737360"/>
-            <a:ext cx="2011680" cy="365760"/>
+      <p:pic>
+        <p:nvPicPr>
+          <p:cNvPr id="9" name="Image 1" descr="C:\Users\adria\OneDrive\Escritorio\stuff\tfg\TFGDAM\docs\screenshots\app\08-usuarios.png">    </p:cNvPr>
+          <p:cNvPicPr>
+            <a:picLocks noChangeAspect="1"/>
+          </p:cNvPicPr>
+          <p:nvPr/>
+        </p:nvPicPr>
+        <p:blipFill>
+          <a:blip r:embed="rId2"/>
+          <a:stretch>
+            <a:fillRect/>
+          </a:stretch>
+        </p:blipFill>
+        <p:spPr>
+          <a:xfrm>
+            <a:off x="6233008" y="1325880"/>
+            <a:ext cx="3306470" cy="2066544"/>
+          </a:xfrm>
+          <a:prstGeom prst="rect">
+            <a:avLst/>
+          </a:prstGeom>
+        </p:spPr>
+      </p:pic>
+      <p:sp>
+        <p:nvSpPr>
+          <p:cNvPr id="10" name="Text 6"/>
+          <p:cNvSpPr/>
+          <p:nvPr/>
+        </p:nvSpPr>
+        <p:spPr>
+          <a:xfrm>
+            <a:off x="6233008" y="3429000"/>
+            <a:ext cx="3306470" cy="310896"/>
           </a:xfrm>
           <a:prstGeom prst="rect">
             <a:avLst/>
@@ -4654,7 +4583,7 @@
               <a:buNone/>
             </a:pPr>
             <a:r>
-              <a:rPr lang="en-US" sz="1600" b="1" dirty="0">
+              <a:rPr lang="en-US" sz="1100" b="1" dirty="0">
                 <a:solidFill>
                   <a:srgbClr val="1E2761"/>
                 </a:solidFill>
@@ -4662,46 +4591,7 @@
                 <a:ea typeface="Calibri" pitchFamily="34" charset="-122"/>
                 <a:cs typeface="Calibri" pitchFamily="34" charset="-120"/>
               </a:rPr>
-              <a:t>Webhook</a:t>
-            </a:r>
-            <a:endParaRPr lang="en-US" sz="1600" dirty="0"/>
-          </a:p>
-        </p:txBody>
-      </p:sp>
-      <p:sp>
-        <p:nvSpPr>
-          <p:cNvPr id="11" name="Text 9"/>
-          <p:cNvSpPr/>
-          <p:nvPr/>
-        </p:nvSpPr>
-        <p:spPr>
-          <a:xfrm>
-            <a:off x="2849728" y="2148840"/>
-            <a:ext cx="2011680" cy="365760"/>
-          </a:xfrm>
-          <a:prstGeom prst="rect">
-            <a:avLst/>
-          </a:prstGeom>
-          <a:noFill/>
-          <a:ln/>
-        </p:spPr>
-        <p:txBody>
-          <a:bodyPr wrap="square" rtlCol="0" anchor="ctr"/>
-          <a:lstStyle/>
-          <a:p>
-            <a:pPr algn="ctr" indent="0" marL="0">
-              <a:buNone/>
-            </a:pPr>
-            <a:r>
-              <a:rPr lang="en-US" sz="1100" dirty="0">
-                <a:solidFill>
-                  <a:srgbClr val="6B7280"/>
-                </a:solidFill>
-                <a:latin typeface="Consolas" pitchFamily="34" charset="0"/>
-                <a:ea typeface="Consolas" pitchFamily="34" charset="-122"/>
-                <a:cs typeface="Consolas" pitchFamily="34" charset="-120"/>
-              </a:rPr>
-              <a:t>GitHub → Railway</a:t>
+              <a:t>Gestión de usuarios (admin)</a:t>
             </a:r>
             <a:endParaRPr lang="en-US" sz="1100" dirty="0"/>
           </a:p>
@@ -4709,50 +4599,14 @@
       </p:sp>
       <p:sp>
         <p:nvSpPr>
-          <p:cNvPr id="12" name="Text 10"/>
-          <p:cNvSpPr/>
-          <p:nvPr/>
-        </p:nvSpPr>
-        <p:spPr>
-          <a:xfrm>
-            <a:off x="4861408" y="1874520"/>
-            <a:ext cx="228600" cy="457200"/>
-          </a:xfrm>
-          <a:prstGeom prst="rect">
-            <a:avLst/>
-          </a:prstGeom>
-          <a:noFill/>
-          <a:ln/>
-        </p:spPr>
-        <p:txBody>
-          <a:bodyPr wrap="square" rtlCol="0" anchor="ctr"/>
-          <a:lstStyle/>
-          <a:p>
-            <a:pPr algn="ctr" indent="0" marL="0">
-              <a:buNone/>
-            </a:pPr>
-            <a:r>
-              <a:rPr lang="en-US" sz="1400" dirty="0">
-                <a:solidFill>
-                  <a:srgbClr val="C68A2E"/>
-                </a:solidFill>
-              </a:rPr>
-              <a:t>▶</a:t>
-            </a:r>
-            <a:endParaRPr lang="en-US" sz="1400" dirty="0"/>
-          </a:p>
-        </p:txBody>
-      </p:sp>
-      <p:sp>
-        <p:nvSpPr>
-          <p:cNvPr id="13" name="Shape 11"/>
-          <p:cNvSpPr/>
-          <p:nvPr/>
-        </p:nvSpPr>
-        <p:spPr>
-          <a:xfrm>
-            <a:off x="5090008" y="1645920"/>
-            <a:ext cx="2011680" cy="1005840"/>
+          <p:cNvPr id="11" name="Shape 7"/>
+          <p:cNvSpPr/>
+          <p:nvPr/>
+        </p:nvSpPr>
+        <p:spPr>
+          <a:xfrm>
+            <a:off x="2606497" y="3931920"/>
+            <a:ext cx="3397910" cy="2157984"/>
           </a:xfrm>
           <a:prstGeom prst="rect">
             <a:avLst/>
@@ -4768,16 +4622,40 @@
           </a:ln>
         </p:spPr>
       </p:sp>
-      <p:sp>
-        <p:nvSpPr>
-          <p:cNvPr id="14" name="Text 12"/>
-          <p:cNvSpPr/>
-          <p:nvPr/>
-        </p:nvSpPr>
-        <p:spPr>
-          <a:xfrm>
-            <a:off x="5090008" y="1737360"/>
-            <a:ext cx="2011680" cy="365760"/>
+      <p:pic>
+        <p:nvPicPr>
+          <p:cNvPr id="12" name="Image 2" descr="C:\Users\adria\OneDrive\Escritorio\stuff\tfg\TFGDAM\docs\screenshots\app\09-modo-oscuro.png">    </p:cNvPr>
+          <p:cNvPicPr>
+            <a:picLocks noChangeAspect="1"/>
+          </p:cNvPicPr>
+          <p:nvPr/>
+        </p:nvPicPr>
+        <p:blipFill>
+          <a:blip r:embed="rId3"/>
+          <a:stretch>
+            <a:fillRect/>
+          </a:stretch>
+        </p:blipFill>
+        <p:spPr>
+          <a:xfrm>
+            <a:off x="2652217" y="3977640"/>
+            <a:ext cx="3306470" cy="2066544"/>
+          </a:xfrm>
+          <a:prstGeom prst="rect">
+            <a:avLst/>
+          </a:prstGeom>
+        </p:spPr>
+      </p:pic>
+      <p:sp>
+        <p:nvSpPr>
+          <p:cNvPr id="13" name="Text 8"/>
+          <p:cNvSpPr/>
+          <p:nvPr/>
+        </p:nvSpPr>
+        <p:spPr>
+          <a:xfrm>
+            <a:off x="2652217" y="6080760"/>
+            <a:ext cx="3306470" cy="310896"/>
           </a:xfrm>
           <a:prstGeom prst="rect">
             <a:avLst/>
@@ -4793,7 +4671,7 @@
               <a:buNone/>
             </a:pPr>
             <a:r>
-              <a:rPr lang="en-US" sz="1600" b="1" dirty="0">
+              <a:rPr lang="en-US" sz="1100" b="1" dirty="0">
                 <a:solidFill>
                   <a:srgbClr val="1E2761"/>
                 </a:solidFill>
@@ -4801,46 +4679,7 @@
                 <a:ea typeface="Calibri" pitchFamily="34" charset="-122"/>
                 <a:cs typeface="Calibri" pitchFamily="34" charset="-120"/>
               </a:rPr>
-              <a:t>Nixpacks</a:t>
-            </a:r>
-            <a:endParaRPr lang="en-US" sz="1600" dirty="0"/>
-          </a:p>
-        </p:txBody>
-      </p:sp>
-      <p:sp>
-        <p:nvSpPr>
-          <p:cNvPr id="15" name="Text 13"/>
-          <p:cNvSpPr/>
-          <p:nvPr/>
-        </p:nvSpPr>
-        <p:spPr>
-          <a:xfrm>
-            <a:off x="5090008" y="2148840"/>
-            <a:ext cx="2011680" cy="365760"/>
-          </a:xfrm>
-          <a:prstGeom prst="rect">
-            <a:avLst/>
-          </a:prstGeom>
-          <a:noFill/>
-          <a:ln/>
-        </p:spPr>
-        <p:txBody>
-          <a:bodyPr wrap="square" rtlCol="0" anchor="ctr"/>
-          <a:lstStyle/>
-          <a:p>
-            <a:pPr algn="ctr" indent="0" marL="0">
-              <a:buNone/>
-            </a:pPr>
-            <a:r>
-              <a:rPr lang="en-US" sz="1100" dirty="0">
-                <a:solidFill>
-                  <a:srgbClr val="6B7280"/>
-                </a:solidFill>
-                <a:latin typeface="Consolas" pitchFamily="34" charset="0"/>
-                <a:ea typeface="Consolas" pitchFamily="34" charset="-122"/>
-                <a:cs typeface="Consolas" pitchFamily="34" charset="-120"/>
-              </a:rPr>
-              <a:t>npm ci --omit=dev</a:t>
+              <a:t>Modo oscuro</a:t>
             </a:r>
             <a:endParaRPr lang="en-US" sz="1100" dirty="0"/>
           </a:p>
@@ -4848,50 +4687,14 @@
       </p:sp>
       <p:sp>
         <p:nvSpPr>
-          <p:cNvPr id="16" name="Text 14"/>
-          <p:cNvSpPr/>
-          <p:nvPr/>
-        </p:nvSpPr>
-        <p:spPr>
-          <a:xfrm>
-            <a:off x="7101688" y="1874520"/>
-            <a:ext cx="228600" cy="457200"/>
-          </a:xfrm>
-          <a:prstGeom prst="rect">
-            <a:avLst/>
-          </a:prstGeom>
-          <a:noFill/>
-          <a:ln/>
-        </p:spPr>
-        <p:txBody>
-          <a:bodyPr wrap="square" rtlCol="0" anchor="ctr"/>
-          <a:lstStyle/>
-          <a:p>
-            <a:pPr algn="ctr" indent="0" marL="0">
-              <a:buNone/>
-            </a:pPr>
-            <a:r>
-              <a:rPr lang="en-US" sz="1400" dirty="0">
-                <a:solidFill>
-                  <a:srgbClr val="C68A2E"/>
-                </a:solidFill>
-              </a:rPr>
-              <a:t>▶</a:t>
-            </a:r>
-            <a:endParaRPr lang="en-US" sz="1400" dirty="0"/>
-          </a:p>
-        </p:txBody>
-      </p:sp>
-      <p:sp>
-        <p:nvSpPr>
-          <p:cNvPr id="17" name="Shape 15"/>
-          <p:cNvSpPr/>
-          <p:nvPr/>
-        </p:nvSpPr>
-        <p:spPr>
-          <a:xfrm>
-            <a:off x="7330288" y="1645920"/>
-            <a:ext cx="2011680" cy="1005840"/>
+          <p:cNvPr id="14" name="Shape 9"/>
+          <p:cNvSpPr/>
+          <p:nvPr/>
+        </p:nvSpPr>
+        <p:spPr>
+          <a:xfrm>
+            <a:off x="6187288" y="3931920"/>
+            <a:ext cx="3397910" cy="2157984"/>
           </a:xfrm>
           <a:prstGeom prst="rect">
             <a:avLst/>
@@ -4907,16 +4710,40 @@
           </a:ln>
         </p:spPr>
       </p:sp>
-      <p:sp>
-        <p:nvSpPr>
-          <p:cNvPr id="18" name="Text 16"/>
-          <p:cNvSpPr/>
-          <p:nvPr/>
-        </p:nvSpPr>
-        <p:spPr>
-          <a:xfrm>
-            <a:off x="7330288" y="1737360"/>
-            <a:ext cx="2011680" cy="365760"/>
+      <p:pic>
+        <p:nvPicPr>
+          <p:cNvPr id="15" name="Image 3" descr="C:\Users\adria\OneDrive\Escritorio\stuff\tfg\TFGDAM\docs\screenshots\app\10-boton-apk.png">    </p:cNvPr>
+          <p:cNvPicPr>
+            <a:picLocks noChangeAspect="1"/>
+          </p:cNvPicPr>
+          <p:nvPr/>
+        </p:nvPicPr>
+        <p:blipFill>
+          <a:blip r:embed="rId4"/>
+          <a:stretch>
+            <a:fillRect/>
+          </a:stretch>
+        </p:blipFill>
+        <p:spPr>
+          <a:xfrm>
+            <a:off x="6233008" y="3977640"/>
+            <a:ext cx="3306470" cy="2066544"/>
+          </a:xfrm>
+          <a:prstGeom prst="rect">
+            <a:avLst/>
+          </a:prstGeom>
+        </p:spPr>
+      </p:pic>
+      <p:sp>
+        <p:nvSpPr>
+          <p:cNvPr id="16" name="Text 10"/>
+          <p:cNvSpPr/>
+          <p:nvPr/>
+        </p:nvSpPr>
+        <p:spPr>
+          <a:xfrm>
+            <a:off x="6233008" y="6080760"/>
+            <a:ext cx="3306470" cy="310896"/>
           </a:xfrm>
           <a:prstGeom prst="rect">
             <a:avLst/>
@@ -4932,7 +4759,7 @@
               <a:buNone/>
             </a:pPr>
             <a:r>
-              <a:rPr lang="en-US" sz="1600" b="1" dirty="0">
+              <a:rPr lang="en-US" sz="1100" b="1" dirty="0">
                 <a:solidFill>
                   <a:srgbClr val="1E2761"/>
                 </a:solidFill>
@@ -4940,974 +4767,9 @@
                 <a:ea typeface="Calibri" pitchFamily="34" charset="-122"/>
                 <a:cs typeface="Calibri" pitchFamily="34" charset="-120"/>
               </a:rPr>
-              <a:t>Run</a:t>
-            </a:r>
-            <a:endParaRPr lang="en-US" sz="1600" dirty="0"/>
-          </a:p>
-        </p:txBody>
-      </p:sp>
-      <p:sp>
-        <p:nvSpPr>
-          <p:cNvPr id="19" name="Text 17"/>
-          <p:cNvSpPr/>
-          <p:nvPr/>
-        </p:nvSpPr>
-        <p:spPr>
-          <a:xfrm>
-            <a:off x="7330288" y="2148840"/>
-            <a:ext cx="2011680" cy="365760"/>
-          </a:xfrm>
-          <a:prstGeom prst="rect">
-            <a:avLst/>
-          </a:prstGeom>
-          <a:noFill/>
-          <a:ln/>
-        </p:spPr>
-        <p:txBody>
-          <a:bodyPr wrap="square" rtlCol="0" anchor="ctr"/>
-          <a:lstStyle/>
-          <a:p>
-            <a:pPr algn="ctr" indent="0" marL="0">
-              <a:buNone/>
-            </a:pPr>
-            <a:r>
-              <a:rPr lang="en-US" sz="1100" dirty="0">
-                <a:solidFill>
-                  <a:srgbClr val="6B7280"/>
-                </a:solidFill>
-                <a:latin typeface="Consolas" pitchFamily="34" charset="0"/>
-                <a:ea typeface="Consolas" pitchFamily="34" charset="-122"/>
-                <a:cs typeface="Consolas" pitchFamily="34" charset="-120"/>
-              </a:rPr>
-              <a:t>node server.js</a:t>
+              <a:t>Descarga del APK Android</a:t>
             </a:r>
             <a:endParaRPr lang="en-US" sz="1100" dirty="0"/>
-          </a:p>
-        </p:txBody>
-      </p:sp>
-      <p:sp>
-        <p:nvSpPr>
-          <p:cNvPr id="20" name="Text 18"/>
-          <p:cNvSpPr/>
-          <p:nvPr/>
-        </p:nvSpPr>
-        <p:spPr>
-          <a:xfrm>
-            <a:off x="9341968" y="1874520"/>
-            <a:ext cx="228600" cy="457200"/>
-          </a:xfrm>
-          <a:prstGeom prst="rect">
-            <a:avLst/>
-          </a:prstGeom>
-          <a:noFill/>
-          <a:ln/>
-        </p:spPr>
-        <p:txBody>
-          <a:bodyPr wrap="square" rtlCol="0" anchor="ctr"/>
-          <a:lstStyle/>
-          <a:p>
-            <a:pPr algn="ctr" indent="0" marL="0">
-              <a:buNone/>
-            </a:pPr>
-            <a:r>
-              <a:rPr lang="en-US" sz="1400" dirty="0">
-                <a:solidFill>
-                  <a:srgbClr val="C68A2E"/>
-                </a:solidFill>
-              </a:rPr>
-              <a:t>▶</a:t>
-            </a:r>
-            <a:endParaRPr lang="en-US" sz="1400" dirty="0"/>
-          </a:p>
-        </p:txBody>
-      </p:sp>
-      <p:sp>
-        <p:nvSpPr>
-          <p:cNvPr id="21" name="Shape 19"/>
-          <p:cNvSpPr/>
-          <p:nvPr/>
-        </p:nvSpPr>
-        <p:spPr>
-          <a:xfrm>
-            <a:off x="9570568" y="1645920"/>
-            <a:ext cx="2011680" cy="1005840"/>
-          </a:xfrm>
-          <a:prstGeom prst="rect">
-            <a:avLst/>
-          </a:prstGeom>
-          <a:solidFill>
-            <a:srgbClr val="F8FAFC"/>
-          </a:solidFill>
-          <a:ln w="12700">
-            <a:solidFill>
-              <a:srgbClr val="E5E7EB"/>
-            </a:solidFill>
-            <a:prstDash val="solid"/>
-          </a:ln>
-        </p:spPr>
-      </p:sp>
-      <p:sp>
-        <p:nvSpPr>
-          <p:cNvPr id="22" name="Text 20"/>
-          <p:cNvSpPr/>
-          <p:nvPr/>
-        </p:nvSpPr>
-        <p:spPr>
-          <a:xfrm>
-            <a:off x="9570568" y="1737360"/>
-            <a:ext cx="2011680" cy="365760"/>
-          </a:xfrm>
-          <a:prstGeom prst="rect">
-            <a:avLst/>
-          </a:prstGeom>
-          <a:noFill/>
-          <a:ln/>
-        </p:spPr>
-        <p:txBody>
-          <a:bodyPr wrap="square" rtlCol="0" anchor="ctr"/>
-          <a:lstStyle/>
-          <a:p>
-            <a:pPr algn="ctr" indent="0" marL="0">
-              <a:buNone/>
-            </a:pPr>
-            <a:r>
-              <a:rPr lang="en-US" sz="1600" b="1" dirty="0">
-                <a:solidFill>
-                  <a:srgbClr val="1E2761"/>
-                </a:solidFill>
-                <a:latin typeface="Calibri" pitchFamily="34" charset="0"/>
-                <a:ea typeface="Calibri" pitchFamily="34" charset="-122"/>
-                <a:cs typeface="Calibri" pitchFamily="34" charset="-120"/>
-              </a:rPr>
-              <a:t>HTTPS</a:t>
-            </a:r>
-            <a:endParaRPr lang="en-US" sz="1600" dirty="0"/>
-          </a:p>
-        </p:txBody>
-      </p:sp>
-      <p:sp>
-        <p:nvSpPr>
-          <p:cNvPr id="23" name="Text 21"/>
-          <p:cNvSpPr/>
-          <p:nvPr/>
-        </p:nvSpPr>
-        <p:spPr>
-          <a:xfrm>
-            <a:off x="9570568" y="2148840"/>
-            <a:ext cx="2011680" cy="365760"/>
-          </a:xfrm>
-          <a:prstGeom prst="rect">
-            <a:avLst/>
-          </a:prstGeom>
-          <a:noFill/>
-          <a:ln/>
-        </p:spPr>
-        <p:txBody>
-          <a:bodyPr wrap="square" rtlCol="0" anchor="ctr"/>
-          <a:lstStyle/>
-          <a:p>
-            <a:pPr algn="ctr" indent="0" marL="0">
-              <a:buNone/>
-            </a:pPr>
-            <a:r>
-              <a:rPr lang="en-US" sz="1100" dirty="0">
-                <a:solidFill>
-                  <a:srgbClr val="6B7280"/>
-                </a:solidFill>
-                <a:latin typeface="Consolas" pitchFamily="34" charset="0"/>
-                <a:ea typeface="Consolas" pitchFamily="34" charset="-122"/>
-                <a:cs typeface="Consolas" pitchFamily="34" charset="-120"/>
-              </a:rPr>
-              <a:t>subdominio público</a:t>
-            </a:r>
-            <a:endParaRPr lang="en-US" sz="1100" dirty="0"/>
-          </a:p>
-        </p:txBody>
-      </p:sp>
-      <p:sp>
-        <p:nvSpPr>
-          <p:cNvPr id="24" name="Shape 22"/>
-          <p:cNvSpPr/>
-          <p:nvPr/>
-        </p:nvSpPr>
-        <p:spPr>
-          <a:xfrm>
-            <a:off x="548640" y="3108960"/>
-            <a:ext cx="5486400" cy="3017520"/>
-          </a:xfrm>
-          <a:prstGeom prst="rect">
-            <a:avLst/>
-          </a:prstGeom>
-          <a:solidFill>
-            <a:srgbClr val="F8FAFC"/>
-          </a:solidFill>
-          <a:ln w="12700">
-            <a:solidFill>
-              <a:srgbClr val="E5E7EB"/>
-            </a:solidFill>
-            <a:prstDash val="solid"/>
-          </a:ln>
-        </p:spPr>
-      </p:sp>
-      <p:sp>
-        <p:nvSpPr>
-          <p:cNvPr id="25" name="Shape 23"/>
-          <p:cNvSpPr/>
-          <p:nvPr/>
-        </p:nvSpPr>
-        <p:spPr>
-          <a:xfrm>
-            <a:off x="548640" y="3108960"/>
-            <a:ext cx="5486400" cy="411480"/>
-          </a:xfrm>
-          <a:prstGeom prst="rect">
-            <a:avLst/>
-          </a:prstGeom>
-          <a:solidFill>
-            <a:srgbClr val="1E2761"/>
-          </a:solidFill>
-          <a:ln w="12700">
-            <a:solidFill>
-              <a:srgbClr val="1E2761"/>
-            </a:solidFill>
-            <a:prstDash val="solid"/>
-          </a:ln>
-        </p:spPr>
-      </p:sp>
-      <p:sp>
-        <p:nvSpPr>
-          <p:cNvPr id="26" name="Text 24"/>
-          <p:cNvSpPr/>
-          <p:nvPr/>
-        </p:nvSpPr>
-        <p:spPr>
-          <a:xfrm>
-            <a:off x="731520" y="3154680"/>
-            <a:ext cx="4572000" cy="320040"/>
-          </a:xfrm>
-          <a:prstGeom prst="rect">
-            <a:avLst/>
-          </a:prstGeom>
-          <a:noFill/>
-          <a:ln/>
-        </p:spPr>
-        <p:txBody>
-          <a:bodyPr wrap="square" rtlCol="0" anchor="ctr"/>
-          <a:lstStyle/>
-          <a:p>
-            <a:pPr indent="0" marL="0">
-              <a:buNone/>
-            </a:pPr>
-            <a:r>
-              <a:rPr lang="en-US" sz="1300" b="1" dirty="0">
-                <a:solidFill>
-                  <a:srgbClr val="FFFFFF"/>
-                </a:solidFill>
-              </a:rPr>
-              <a:t>Variables de entorno</a:t>
-            </a:r>
-            <a:endParaRPr lang="en-US" sz="1300" dirty="0"/>
-          </a:p>
-        </p:txBody>
-      </p:sp>
-      <p:sp>
-        <p:nvSpPr>
-          <p:cNvPr id="27" name="Text 25"/>
-          <p:cNvSpPr/>
-          <p:nvPr/>
-        </p:nvSpPr>
-        <p:spPr>
-          <a:xfrm>
-            <a:off x="731520" y="3657600"/>
-            <a:ext cx="2103120" cy="365760"/>
-          </a:xfrm>
-          <a:prstGeom prst="rect">
-            <a:avLst/>
-          </a:prstGeom>
-          <a:noFill/>
-          <a:ln/>
-        </p:spPr>
-        <p:txBody>
-          <a:bodyPr wrap="square" rtlCol="0" anchor="ctr"/>
-          <a:lstStyle/>
-          <a:p>
-            <a:pPr indent="0" marL="0">
-              <a:buNone/>
-            </a:pPr>
-            <a:r>
-              <a:rPr lang="en-US" sz="1200" b="1" dirty="0">
-                <a:solidFill>
-                  <a:srgbClr val="C68A2E"/>
-                </a:solidFill>
-                <a:latin typeface="Consolas" pitchFamily="34" charset="0"/>
-                <a:ea typeface="Consolas" pitchFamily="34" charset="-122"/>
-                <a:cs typeface="Consolas" pitchFamily="34" charset="-120"/>
-              </a:rPr>
-              <a:t>MYSQL_URL</a:t>
-            </a:r>
-            <a:endParaRPr lang="en-US" sz="1200" dirty="0"/>
-          </a:p>
-        </p:txBody>
-      </p:sp>
-      <p:sp>
-        <p:nvSpPr>
-          <p:cNvPr id="28" name="Text 26"/>
-          <p:cNvSpPr/>
-          <p:nvPr/>
-        </p:nvSpPr>
-        <p:spPr>
-          <a:xfrm>
-            <a:off x="2834640" y="3657600"/>
-            <a:ext cx="3108960" cy="365760"/>
-          </a:xfrm>
-          <a:prstGeom prst="rect">
-            <a:avLst/>
-          </a:prstGeom>
-          <a:noFill/>
-          <a:ln/>
-        </p:spPr>
-        <p:txBody>
-          <a:bodyPr wrap="square" rtlCol="0" anchor="ctr"/>
-          <a:lstStyle/>
-          <a:p>
-            <a:pPr indent="0" marL="0">
-              <a:buNone/>
-            </a:pPr>
-            <a:r>
-              <a:rPr lang="en-US" sz="1200" dirty="0">
-                <a:solidFill>
-                  <a:srgbClr val="1F2937"/>
-                </a:solidFill>
-                <a:latin typeface="Calibri" pitchFamily="34" charset="0"/>
-                <a:ea typeface="Calibri" pitchFamily="34" charset="-122"/>
-                <a:cs typeface="Calibri" pitchFamily="34" charset="-120"/>
-              </a:rPr>
-              <a:t>plugin MySQL de Railway</a:t>
-            </a:r>
-            <a:endParaRPr lang="en-US" sz="1200" dirty="0"/>
-          </a:p>
-        </p:txBody>
-      </p:sp>
-      <p:sp>
-        <p:nvSpPr>
-          <p:cNvPr id="29" name="Text 27"/>
-          <p:cNvSpPr/>
-          <p:nvPr/>
-        </p:nvSpPr>
-        <p:spPr>
-          <a:xfrm>
-            <a:off x="731520" y="4114800"/>
-            <a:ext cx="2103120" cy="365760"/>
-          </a:xfrm>
-          <a:prstGeom prst="rect">
-            <a:avLst/>
-          </a:prstGeom>
-          <a:noFill/>
-          <a:ln/>
-        </p:spPr>
-        <p:txBody>
-          <a:bodyPr wrap="square" rtlCol="0" anchor="ctr"/>
-          <a:lstStyle/>
-          <a:p>
-            <a:pPr indent="0" marL="0">
-              <a:buNone/>
-            </a:pPr>
-            <a:r>
-              <a:rPr lang="en-US" sz="1200" b="1" dirty="0">
-                <a:solidFill>
-                  <a:srgbClr val="C68A2E"/>
-                </a:solidFill>
-                <a:latin typeface="Consolas" pitchFamily="34" charset="0"/>
-                <a:ea typeface="Consolas" pitchFamily="34" charset="-122"/>
-                <a:cs typeface="Consolas" pitchFamily="34" charset="-120"/>
-              </a:rPr>
-              <a:t>JWT_SECRET</a:t>
-            </a:r>
-            <a:endParaRPr lang="en-US" sz="1200" dirty="0"/>
-          </a:p>
-        </p:txBody>
-      </p:sp>
-      <p:sp>
-        <p:nvSpPr>
-          <p:cNvPr id="30" name="Text 28"/>
-          <p:cNvSpPr/>
-          <p:nvPr/>
-        </p:nvSpPr>
-        <p:spPr>
-          <a:xfrm>
-            <a:off x="2834640" y="4114800"/>
-            <a:ext cx="3108960" cy="365760"/>
-          </a:xfrm>
-          <a:prstGeom prst="rect">
-            <a:avLst/>
-          </a:prstGeom>
-          <a:noFill/>
-          <a:ln/>
-        </p:spPr>
-        <p:txBody>
-          <a:bodyPr wrap="square" rtlCol="0" anchor="ctr"/>
-          <a:lstStyle/>
-          <a:p>
-            <a:pPr indent="0" marL="0">
-              <a:buNone/>
-            </a:pPr>
-            <a:r>
-              <a:rPr lang="en-US" sz="1200" dirty="0">
-                <a:solidFill>
-                  <a:srgbClr val="1F2937"/>
-                </a:solidFill>
-                <a:latin typeface="Calibri" pitchFamily="34" charset="0"/>
-                <a:ea typeface="Calibri" pitchFamily="34" charset="-122"/>
-                <a:cs typeface="Calibri" pitchFamily="34" charset="-120"/>
-              </a:rPr>
-              <a:t>≥ 256 bits (crypto.randomBytes)</a:t>
-            </a:r>
-            <a:endParaRPr lang="en-US" sz="1200" dirty="0"/>
-          </a:p>
-        </p:txBody>
-      </p:sp>
-      <p:sp>
-        <p:nvSpPr>
-          <p:cNvPr id="31" name="Text 29"/>
-          <p:cNvSpPr/>
-          <p:nvPr/>
-        </p:nvSpPr>
-        <p:spPr>
-          <a:xfrm>
-            <a:off x="731520" y="4572000"/>
-            <a:ext cx="2103120" cy="365760"/>
-          </a:xfrm>
-          <a:prstGeom prst="rect">
-            <a:avLst/>
-          </a:prstGeom>
-          <a:noFill/>
-          <a:ln/>
-        </p:spPr>
-        <p:txBody>
-          <a:bodyPr wrap="square" rtlCol="0" anchor="ctr"/>
-          <a:lstStyle/>
-          <a:p>
-            <a:pPr indent="0" marL="0">
-              <a:buNone/>
-            </a:pPr>
-            <a:r>
-              <a:rPr lang="en-US" sz="1200" b="1" dirty="0">
-                <a:solidFill>
-                  <a:srgbClr val="C68A2E"/>
-                </a:solidFill>
-                <a:latin typeface="Consolas" pitchFamily="34" charset="0"/>
-                <a:ea typeface="Consolas" pitchFamily="34" charset="-122"/>
-                <a:cs typeface="Consolas" pitchFamily="34" charset="-120"/>
-              </a:rPr>
-              <a:t>JWT_EXPIRES_IN</a:t>
-            </a:r>
-            <a:endParaRPr lang="en-US" sz="1200" dirty="0"/>
-          </a:p>
-        </p:txBody>
-      </p:sp>
-      <p:sp>
-        <p:nvSpPr>
-          <p:cNvPr id="32" name="Text 30"/>
-          <p:cNvSpPr/>
-          <p:nvPr/>
-        </p:nvSpPr>
-        <p:spPr>
-          <a:xfrm>
-            <a:off x="2834640" y="4572000"/>
-            <a:ext cx="3108960" cy="365760"/>
-          </a:xfrm>
-          <a:prstGeom prst="rect">
-            <a:avLst/>
-          </a:prstGeom>
-          <a:noFill/>
-          <a:ln/>
-        </p:spPr>
-        <p:txBody>
-          <a:bodyPr wrap="square" rtlCol="0" anchor="ctr"/>
-          <a:lstStyle/>
-          <a:p>
-            <a:pPr indent="0" marL="0">
-              <a:buNone/>
-            </a:pPr>
-            <a:r>
-              <a:rPr lang="en-US" sz="1200" dirty="0">
-                <a:solidFill>
-                  <a:srgbClr val="1F2937"/>
-                </a:solidFill>
-                <a:latin typeface="Calibri" pitchFamily="34" charset="0"/>
-                <a:ea typeface="Calibri" pitchFamily="34" charset="-122"/>
-                <a:cs typeface="Calibri" pitchFamily="34" charset="-120"/>
-              </a:rPr>
-              <a:t>8h</a:t>
-            </a:r>
-            <a:endParaRPr lang="en-US" sz="1200" dirty="0"/>
-          </a:p>
-        </p:txBody>
-      </p:sp>
-      <p:sp>
-        <p:nvSpPr>
-          <p:cNvPr id="33" name="Text 31"/>
-          <p:cNvSpPr/>
-          <p:nvPr/>
-        </p:nvSpPr>
-        <p:spPr>
-          <a:xfrm>
-            <a:off x="731520" y="5029200"/>
-            <a:ext cx="2103120" cy="365760"/>
-          </a:xfrm>
-          <a:prstGeom prst="rect">
-            <a:avLst/>
-          </a:prstGeom>
-          <a:noFill/>
-          <a:ln/>
-        </p:spPr>
-        <p:txBody>
-          <a:bodyPr wrap="square" rtlCol="0" anchor="ctr"/>
-          <a:lstStyle/>
-          <a:p>
-            <a:pPr indent="0" marL="0">
-              <a:buNone/>
-            </a:pPr>
-            <a:r>
-              <a:rPr lang="en-US" sz="1200" b="1" dirty="0">
-                <a:solidFill>
-                  <a:srgbClr val="C68A2E"/>
-                </a:solidFill>
-                <a:latin typeface="Consolas" pitchFamily="34" charset="0"/>
-                <a:ea typeface="Consolas" pitchFamily="34" charset="-122"/>
-                <a:cs typeface="Consolas" pitchFamily="34" charset="-120"/>
-              </a:rPr>
-              <a:t>CORS_ORIGIN</a:t>
-            </a:r>
-            <a:endParaRPr lang="en-US" sz="1200" dirty="0"/>
-          </a:p>
-        </p:txBody>
-      </p:sp>
-      <p:sp>
-        <p:nvSpPr>
-          <p:cNvPr id="34" name="Text 32"/>
-          <p:cNvSpPr/>
-          <p:nvPr/>
-        </p:nvSpPr>
-        <p:spPr>
-          <a:xfrm>
-            <a:off x="2834640" y="5029200"/>
-            <a:ext cx="3108960" cy="365760"/>
-          </a:xfrm>
-          <a:prstGeom prst="rect">
-            <a:avLst/>
-          </a:prstGeom>
-          <a:noFill/>
-          <a:ln/>
-        </p:spPr>
-        <p:txBody>
-          <a:bodyPr wrap="square" rtlCol="0" anchor="ctr"/>
-          <a:lstStyle/>
-          <a:p>
-            <a:pPr indent="0" marL="0">
-              <a:buNone/>
-            </a:pPr>
-            <a:r>
-              <a:rPr lang="en-US" sz="1200" dirty="0">
-                <a:solidFill>
-                  <a:srgbClr val="1F2937"/>
-                </a:solidFill>
-                <a:latin typeface="Calibri" pitchFamily="34" charset="0"/>
-                <a:ea typeface="Calibri" pitchFamily="34" charset="-122"/>
-                <a:cs typeface="Calibri" pitchFamily="34" charset="-120"/>
-              </a:rPr>
-              <a:t>mismo origen</a:t>
-            </a:r>
-            <a:endParaRPr lang="en-US" sz="1200" dirty="0"/>
-          </a:p>
-        </p:txBody>
-      </p:sp>
-      <p:sp>
-        <p:nvSpPr>
-          <p:cNvPr id="35" name="Text 33"/>
-          <p:cNvSpPr/>
-          <p:nvPr/>
-        </p:nvSpPr>
-        <p:spPr>
-          <a:xfrm>
-            <a:off x="731520" y="5486400"/>
-            <a:ext cx="2103120" cy="365760"/>
-          </a:xfrm>
-          <a:prstGeom prst="rect">
-            <a:avLst/>
-          </a:prstGeom>
-          <a:noFill/>
-          <a:ln/>
-        </p:spPr>
-        <p:txBody>
-          <a:bodyPr wrap="square" rtlCol="0" anchor="ctr"/>
-          <a:lstStyle/>
-          <a:p>
-            <a:pPr indent="0" marL="0">
-              <a:buNone/>
-            </a:pPr>
-            <a:r>
-              <a:rPr lang="en-US" sz="1200" b="1" dirty="0">
-                <a:solidFill>
-                  <a:srgbClr val="C68A2E"/>
-                </a:solidFill>
-                <a:latin typeface="Consolas" pitchFamily="34" charset="0"/>
-                <a:ea typeface="Consolas" pitchFamily="34" charset="-122"/>
-                <a:cs typeface="Consolas" pitchFamily="34" charset="-120"/>
-              </a:rPr>
-              <a:t>NODE_ENV</a:t>
-            </a:r>
-            <a:endParaRPr lang="en-US" sz="1200" dirty="0"/>
-          </a:p>
-        </p:txBody>
-      </p:sp>
-      <p:sp>
-        <p:nvSpPr>
-          <p:cNvPr id="36" name="Text 34"/>
-          <p:cNvSpPr/>
-          <p:nvPr/>
-        </p:nvSpPr>
-        <p:spPr>
-          <a:xfrm>
-            <a:off x="2834640" y="5486400"/>
-            <a:ext cx="3108960" cy="365760"/>
-          </a:xfrm>
-          <a:prstGeom prst="rect">
-            <a:avLst/>
-          </a:prstGeom>
-          <a:noFill/>
-          <a:ln/>
-        </p:spPr>
-        <p:txBody>
-          <a:bodyPr wrap="square" rtlCol="0" anchor="ctr"/>
-          <a:lstStyle/>
-          <a:p>
-            <a:pPr indent="0" marL="0">
-              <a:buNone/>
-            </a:pPr>
-            <a:r>
-              <a:rPr lang="en-US" sz="1200" dirty="0">
-                <a:solidFill>
-                  <a:srgbClr val="1F2937"/>
-                </a:solidFill>
-                <a:latin typeface="Calibri" pitchFamily="34" charset="0"/>
-                <a:ea typeface="Calibri" pitchFamily="34" charset="-122"/>
-                <a:cs typeface="Calibri" pitchFamily="34" charset="-120"/>
-              </a:rPr>
-              <a:t>production</a:t>
-            </a:r>
-            <a:endParaRPr lang="en-US" sz="1200" dirty="0"/>
-          </a:p>
-        </p:txBody>
-      </p:sp>
-      <p:sp>
-        <p:nvSpPr>
-          <p:cNvPr id="37" name="Shape 35"/>
-          <p:cNvSpPr/>
-          <p:nvPr/>
-        </p:nvSpPr>
-        <p:spPr>
-          <a:xfrm>
-            <a:off x="6309360" y="3108960"/>
-            <a:ext cx="5333695" cy="3017520"/>
-          </a:xfrm>
-          <a:prstGeom prst="rect">
-            <a:avLst/>
-          </a:prstGeom>
-          <a:solidFill>
-            <a:srgbClr val="F8FAFC"/>
-          </a:solidFill>
-          <a:ln w="12700">
-            <a:solidFill>
-              <a:srgbClr val="E5E7EB"/>
-            </a:solidFill>
-            <a:prstDash val="solid"/>
-          </a:ln>
-        </p:spPr>
-      </p:sp>
-      <p:sp>
-        <p:nvSpPr>
-          <p:cNvPr id="38" name="Shape 36"/>
-          <p:cNvSpPr/>
-          <p:nvPr/>
-        </p:nvSpPr>
-        <p:spPr>
-          <a:xfrm>
-            <a:off x="6309360" y="3108960"/>
-            <a:ext cx="5333695" cy="411480"/>
-          </a:xfrm>
-          <a:prstGeom prst="rect">
-            <a:avLst/>
-          </a:prstGeom>
-          <a:solidFill>
-            <a:srgbClr val="1E2761"/>
-          </a:solidFill>
-          <a:ln w="12700">
-            <a:solidFill>
-              <a:srgbClr val="1E2761"/>
-            </a:solidFill>
-            <a:prstDash val="solid"/>
-          </a:ln>
-        </p:spPr>
-      </p:sp>
-      <p:sp>
-        <p:nvSpPr>
-          <p:cNvPr id="39" name="Text 37"/>
-          <p:cNvSpPr/>
-          <p:nvPr/>
-        </p:nvSpPr>
-        <p:spPr>
-          <a:xfrm>
-            <a:off x="6492240" y="3154680"/>
-            <a:ext cx="4572000" cy="320040"/>
-          </a:xfrm>
-          <a:prstGeom prst="rect">
-            <a:avLst/>
-          </a:prstGeom>
-          <a:noFill/>
-          <a:ln/>
-        </p:spPr>
-        <p:txBody>
-          <a:bodyPr wrap="square" rtlCol="0" anchor="ctr"/>
-          <a:lstStyle/>
-          <a:p>
-            <a:pPr indent="0" marL="0">
-              <a:buNone/>
-            </a:pPr>
-            <a:r>
-              <a:rPr lang="en-US" sz="1300" b="1" dirty="0">
-                <a:solidFill>
-                  <a:srgbClr val="FFFFFF"/>
-                </a:solidFill>
-              </a:rPr>
-              <a:t>Acceso público</a:t>
-            </a:r>
-            <a:endParaRPr lang="en-US" sz="1300" dirty="0"/>
-          </a:p>
-        </p:txBody>
-      </p:sp>
-      <p:sp>
-        <p:nvSpPr>
-          <p:cNvPr id="40" name="Text 38"/>
-          <p:cNvSpPr/>
-          <p:nvPr/>
-        </p:nvSpPr>
-        <p:spPr>
-          <a:xfrm>
-            <a:off x="6492240" y="3657600"/>
-            <a:ext cx="2103120" cy="320040"/>
-          </a:xfrm>
-          <a:prstGeom prst="rect">
-            <a:avLst/>
-          </a:prstGeom>
-          <a:noFill/>
-          <a:ln/>
-        </p:spPr>
-        <p:txBody>
-          <a:bodyPr wrap="square" rtlCol="0" anchor="ctr"/>
-          <a:lstStyle/>
-          <a:p>
-            <a:pPr indent="0" marL="0">
-              <a:buNone/>
-            </a:pPr>
-            <a:r>
-              <a:rPr lang="en-US" sz="1200" b="1" dirty="0">
-                <a:solidFill>
-                  <a:srgbClr val="1E2761"/>
-                </a:solidFill>
-              </a:rPr>
-              <a:t>Web (PWA)</a:t>
-            </a:r>
-            <a:endParaRPr lang="en-US" sz="1200" dirty="0"/>
-          </a:p>
-        </p:txBody>
-      </p:sp>
-      <p:sp>
-        <p:nvSpPr>
-          <p:cNvPr id="41" name="Text 39"/>
-          <p:cNvSpPr/>
-          <p:nvPr/>
-        </p:nvSpPr>
-        <p:spPr>
-          <a:xfrm>
-            <a:off x="6492240" y="3950208"/>
-            <a:ext cx="5150815" cy="411480"/>
-          </a:xfrm>
-          <a:prstGeom prst="rect">
-            <a:avLst/>
-          </a:prstGeom>
-          <a:noFill/>
-          <a:ln/>
-        </p:spPr>
-        <p:txBody>
-          <a:bodyPr wrap="square" rtlCol="0" anchor="ctr"/>
-          <a:lstStyle/>
-          <a:p>
-            <a:pPr indent="0" marL="0">
-              <a:buNone/>
-            </a:pPr>
-            <a:r>
-              <a:rPr lang="en-US" sz="1200" dirty="0">
-                <a:solidFill>
-                  <a:srgbClr val="C68A2E"/>
-                </a:solidFill>
-                <a:latin typeface="Consolas" pitchFamily="34" charset="0"/>
-                <a:ea typeface="Consolas" pitchFamily="34" charset="-122"/>
-                <a:cs typeface="Consolas" pitchFamily="34" charset="-120"/>
-              </a:rPr>
-              <a:t>tfgdam-production.up.railway.app/</a:t>
-            </a:r>
-            <a:endParaRPr lang="en-US" sz="1200" dirty="0"/>
-          </a:p>
-        </p:txBody>
-      </p:sp>
-      <p:sp>
-        <p:nvSpPr>
-          <p:cNvPr id="42" name="Text 40"/>
-          <p:cNvSpPr/>
-          <p:nvPr/>
-        </p:nvSpPr>
-        <p:spPr>
-          <a:xfrm>
-            <a:off x="6492240" y="4434840"/>
-            <a:ext cx="2103120" cy="320040"/>
-          </a:xfrm>
-          <a:prstGeom prst="rect">
-            <a:avLst/>
-          </a:prstGeom>
-          <a:noFill/>
-          <a:ln/>
-        </p:spPr>
-        <p:txBody>
-          <a:bodyPr wrap="square" rtlCol="0" anchor="ctr"/>
-          <a:lstStyle/>
-          <a:p>
-            <a:pPr indent="0" marL="0">
-              <a:buNone/>
-            </a:pPr>
-            <a:r>
-              <a:rPr lang="en-US" sz="1200" b="1" dirty="0">
-                <a:solidFill>
-                  <a:srgbClr val="1E2761"/>
-                </a:solidFill>
-              </a:rPr>
-              <a:t>API REST</a:t>
-            </a:r>
-            <a:endParaRPr lang="en-US" sz="1200" dirty="0"/>
-          </a:p>
-        </p:txBody>
-      </p:sp>
-      <p:sp>
-        <p:nvSpPr>
-          <p:cNvPr id="43" name="Text 41"/>
-          <p:cNvSpPr/>
-          <p:nvPr/>
-        </p:nvSpPr>
-        <p:spPr>
-          <a:xfrm>
-            <a:off x="6492240" y="4727448"/>
-            <a:ext cx="5150815" cy="411480"/>
-          </a:xfrm>
-          <a:prstGeom prst="rect">
-            <a:avLst/>
-          </a:prstGeom>
-          <a:noFill/>
-          <a:ln/>
-        </p:spPr>
-        <p:txBody>
-          <a:bodyPr wrap="square" rtlCol="0" anchor="ctr"/>
-          <a:lstStyle/>
-          <a:p>
-            <a:pPr indent="0" marL="0">
-              <a:buNone/>
-            </a:pPr>
-            <a:r>
-              <a:rPr lang="en-US" sz="1200" dirty="0">
-                <a:solidFill>
-                  <a:srgbClr val="C68A2E"/>
-                </a:solidFill>
-                <a:latin typeface="Consolas" pitchFamily="34" charset="0"/>
-                <a:ea typeface="Consolas" pitchFamily="34" charset="-122"/>
-                <a:cs typeface="Consolas" pitchFamily="34" charset="-120"/>
-              </a:rPr>
-              <a:t>tfgdam-production.up.railway.app/api/</a:t>
-            </a:r>
-            <a:endParaRPr lang="en-US" sz="1200" dirty="0"/>
-          </a:p>
-        </p:txBody>
-      </p:sp>
-      <p:sp>
-        <p:nvSpPr>
-          <p:cNvPr id="44" name="Text 42"/>
-          <p:cNvSpPr/>
-          <p:nvPr/>
-        </p:nvSpPr>
-        <p:spPr>
-          <a:xfrm>
-            <a:off x="6492240" y="5212080"/>
-            <a:ext cx="2103120" cy="320040"/>
-          </a:xfrm>
-          <a:prstGeom prst="rect">
-            <a:avLst/>
-          </a:prstGeom>
-          <a:noFill/>
-          <a:ln/>
-        </p:spPr>
-        <p:txBody>
-          <a:bodyPr wrap="square" rtlCol="0" anchor="ctr"/>
-          <a:lstStyle/>
-          <a:p>
-            <a:pPr indent="0" marL="0">
-              <a:buNone/>
-            </a:pPr>
-            <a:r>
-              <a:rPr lang="en-US" sz="1200" b="1" dirty="0">
-                <a:solidFill>
-                  <a:srgbClr val="1E2761"/>
-                </a:solidFill>
-              </a:rPr>
-              <a:t>Health</a:t>
-            </a:r>
-            <a:endParaRPr lang="en-US" sz="1200" dirty="0"/>
-          </a:p>
-        </p:txBody>
-      </p:sp>
-      <p:sp>
-        <p:nvSpPr>
-          <p:cNvPr id="45" name="Text 43"/>
-          <p:cNvSpPr/>
-          <p:nvPr/>
-        </p:nvSpPr>
-        <p:spPr>
-          <a:xfrm>
-            <a:off x="6492240" y="5504688"/>
-            <a:ext cx="5150815" cy="411480"/>
-          </a:xfrm>
-          <a:prstGeom prst="rect">
-            <a:avLst/>
-          </a:prstGeom>
-          <a:noFill/>
-          <a:ln/>
-        </p:spPr>
-        <p:txBody>
-          <a:bodyPr wrap="square" rtlCol="0" anchor="ctr"/>
-          <a:lstStyle/>
-          <a:p>
-            <a:pPr indent="0" marL="0">
-              <a:buNone/>
-            </a:pPr>
-            <a:r>
-              <a:rPr lang="en-US" sz="1200" dirty="0">
-                <a:solidFill>
-                  <a:srgbClr val="C68A2E"/>
-                </a:solidFill>
-                <a:latin typeface="Consolas" pitchFamily="34" charset="0"/>
-                <a:ea typeface="Consolas" pitchFamily="34" charset="-122"/>
-                <a:cs typeface="Consolas" pitchFamily="34" charset="-120"/>
-              </a:rPr>
-              <a:t>tfgdam-production.up.railway.app/api/health</a:t>
-            </a:r>
-            <a:endParaRPr lang="en-US" sz="1200" dirty="0"/>
           </a:p>
         </p:txBody>
       </p:sp>
@@ -5969,7 +4831,7 @@
                 <a:ea typeface="Calibri" pitchFamily="34" charset="-122"/>
                 <a:cs typeface="Calibri" pitchFamily="34" charset="-120"/>
               </a:rPr>
-              <a:t>CALIDAD &amp; RESULTADOS</a:t>
+              <a:t>APLICACIÓN MÓVIL</a:t>
             </a:r>
             <a:endParaRPr lang="en-US" sz="1000" dirty="0"/>
           </a:p>
@@ -6008,7 +4870,7 @@
                 <a:ea typeface="Calibri" pitchFamily="34" charset="-122"/>
                 <a:cs typeface="Calibri" pitchFamily="34" charset="-120"/>
               </a:rPr>
-              <a:t>Pruebas, métricas y entregables</a:t>
+              <a:t>App Android nativa para el operario</a:t>
             </a:r>
             <a:endParaRPr lang="en-US" sz="3200" dirty="0"/>
           </a:p>
@@ -6048,7 +4910,7 @@
         <p:spPr>
           <a:xfrm>
             <a:off x="357988" y="1463040"/>
-            <a:ext cx="2697480" cy="1554480"/>
+            <a:ext cx="2697480" cy="2011680"/>
           </a:xfrm>
           <a:prstGeom prst="rect">
             <a:avLst/>
@@ -6066,28 +4928,42 @@
       </p:sp>
       <p:sp>
         <p:nvSpPr>
-          <p:cNvPr id="6" name="Shape 4"/>
-          <p:cNvSpPr/>
-          <p:nvPr/>
-        </p:nvSpPr>
-        <p:spPr>
-          <a:xfrm>
-            <a:off x="357988" y="2944368"/>
-            <a:ext cx="2697480" cy="73152"/>
-          </a:xfrm>
-          <a:prstGeom prst="rect">
-            <a:avLst/>
-          </a:prstGeom>
-          <a:solidFill>
-            <a:srgbClr val="C68A2E"/>
-          </a:solidFill>
-          <a:ln w="12700">
-            <a:solidFill>
-              <a:srgbClr val="C68A2E"/>
-            </a:solidFill>
-            <a:prstDash val="solid"/>
-          </a:ln>
-        </p:spPr>
+          <p:cNvPr id="6" name="Text 4"/>
+          <p:cNvSpPr/>
+          <p:nvPr/>
+        </p:nvSpPr>
+        <p:spPr>
+          <a:xfrm>
+            <a:off x="540868" y="1600200"/>
+            <a:ext cx="914400" cy="457200"/>
+          </a:xfrm>
+          <a:prstGeom prst="rect">
+            <a:avLst/>
+          </a:prstGeom>
+          <a:noFill/>
+          <a:ln/>
+        </p:spPr>
+        <p:txBody>
+          <a:bodyPr wrap="square" rtlCol="0" anchor="ctr"/>
+          <a:lstStyle/>
+          <a:p>
+            <a:pPr indent="0" marL="0">
+              <a:buNone/>
+            </a:pPr>
+            <a:r>
+              <a:rPr lang="en-US" sz="2200" b="1" dirty="0">
+                <a:solidFill>
+                  <a:srgbClr val="C68A2E"/>
+                </a:solidFill>
+                <a:latin typeface="Calibri" pitchFamily="34" charset="0"/>
+                <a:ea typeface="Calibri" pitchFamily="34" charset="-122"/>
+                <a:cs typeface="Calibri" pitchFamily="34" charset="-120"/>
+              </a:rPr>
+              <a:t>01</a:t>
+            </a:r>
+            <a:endParaRPr lang="en-US" sz="2200" dirty="0"/>
+          </a:p>
+        </p:txBody>
       </p:sp>
       <p:sp>
         <p:nvSpPr>
@@ -6097,24 +4973,24 @@
         </p:nvSpPr>
         <p:spPr>
           <a:xfrm>
-            <a:off x="357988" y="1600200"/>
-            <a:ext cx="2697480" cy="868680"/>
-          </a:xfrm>
-          <a:prstGeom prst="rect">
-            <a:avLst/>
-          </a:prstGeom>
-          <a:noFill/>
-          <a:ln/>
-        </p:spPr>
-        <p:txBody>
-          <a:bodyPr wrap="square" rtlCol="0" anchor="ctr"/>
-          <a:lstStyle/>
-          <a:p>
-            <a:pPr algn="ctr" indent="0" marL="0">
-              <a:buNone/>
-            </a:pPr>
-            <a:r>
-              <a:rPr lang="en-US" sz="4400" b="1" dirty="0">
+            <a:off x="540868" y="2103120"/>
+            <a:ext cx="2331720" cy="457200"/>
+          </a:xfrm>
+          <a:prstGeom prst="rect">
+            <a:avLst/>
+          </a:prstGeom>
+          <a:noFill/>
+          <a:ln/>
+        </p:spPr>
+        <p:txBody>
+          <a:bodyPr wrap="square" rtlCol="0" anchor="ctr"/>
+          <a:lstStyle/>
+          <a:p>
+            <a:pPr indent="0" marL="0">
+              <a:buNone/>
+            </a:pPr>
+            <a:r>
+              <a:rPr lang="en-US" sz="1600" b="1" dirty="0">
                 <a:solidFill>
                   <a:srgbClr val="1E2761"/>
                 </a:solidFill>
@@ -6122,9 +4998,9 @@
                 <a:ea typeface="Calibri" pitchFamily="34" charset="-122"/>
                 <a:cs typeface="Calibri" pitchFamily="34" charset="-120"/>
               </a:rPr>
-              <a:t>500</a:t>
-            </a:r>
-            <a:endParaRPr lang="en-US" sz="4400" dirty="0"/>
+              <a:t>Login</a:t>
+            </a:r>
+            <a:endParaRPr lang="en-US" sz="1600" dirty="0"/>
           </a:p>
         </p:txBody>
       </p:sp>
@@ -6136,32 +5012,32 @@
         </p:nvSpPr>
         <p:spPr>
           <a:xfrm>
-            <a:off x="495148" y="2468880"/>
-            <a:ext cx="2423160" cy="457200"/>
-          </a:xfrm>
-          <a:prstGeom prst="rect">
-            <a:avLst/>
-          </a:prstGeom>
-          <a:noFill/>
-          <a:ln/>
-        </p:spPr>
-        <p:txBody>
-          <a:bodyPr wrap="square" rtlCol="0" anchor="ctr"/>
-          <a:lstStyle/>
-          <a:p>
-            <a:pPr algn="ctr" indent="0" marL="0">
+            <a:off x="540868" y="2514600"/>
+            <a:ext cx="2331720" cy="822960"/>
+          </a:xfrm>
+          <a:prstGeom prst="rect">
+            <a:avLst/>
+          </a:prstGeom>
+          <a:noFill/>
+          <a:ln/>
+        </p:spPr>
+        <p:txBody>
+          <a:bodyPr wrap="square" rtlCol="0" anchor="ctr"/>
+          <a:lstStyle/>
+          <a:p>
+            <a:pPr indent="0" marL="0">
               <a:buNone/>
             </a:pPr>
             <a:r>
               <a:rPr lang="en-US" sz="1200" dirty="0">
                 <a:solidFill>
-                  <a:srgbClr val="6B7280"/>
-                </a:solidFill>
-                <a:latin typeface="Calibri" pitchFamily="34" charset="0"/>
-                <a:ea typeface="Calibri" pitchFamily="34" charset="-122"/>
-                <a:cs typeface="Calibri" pitchFamily="34" charset="-120"/>
-              </a:rPr>
-              <a:t>productos · catálogo seed</a:t>
+                  <a:srgbClr val="1F2937"/>
+                </a:solidFill>
+                <a:latin typeface="Calibri" pitchFamily="34" charset="0"/>
+                <a:ea typeface="Calibri" pitchFamily="34" charset="-122"/>
+                <a:cs typeface="Calibri" pitchFamily="34" charset="-120"/>
+              </a:rPr>
+              <a:t>Email + contraseña → JWT. Sesión persistente.</a:t>
             </a:r>
             <a:endParaRPr lang="en-US" sz="1200" dirty="0"/>
           </a:p>
@@ -6176,7 +5052,7 @@
         <p:spPr>
           <a:xfrm>
             <a:off x="3284068" y="1463040"/>
-            <a:ext cx="2697480" cy="1554480"/>
+            <a:ext cx="2697480" cy="2011680"/>
           </a:xfrm>
           <a:prstGeom prst="rect">
             <a:avLst/>
@@ -6194,28 +5070,42 @@
       </p:sp>
       <p:sp>
         <p:nvSpPr>
-          <p:cNvPr id="10" name="Shape 8"/>
-          <p:cNvSpPr/>
-          <p:nvPr/>
-        </p:nvSpPr>
-        <p:spPr>
-          <a:xfrm>
-            <a:off x="3284068" y="2944368"/>
-            <a:ext cx="2697480" cy="73152"/>
-          </a:xfrm>
-          <a:prstGeom prst="rect">
-            <a:avLst/>
-          </a:prstGeom>
-          <a:solidFill>
-            <a:srgbClr val="C68A2E"/>
-          </a:solidFill>
-          <a:ln w="12700">
-            <a:solidFill>
-              <a:srgbClr val="C68A2E"/>
-            </a:solidFill>
-            <a:prstDash val="solid"/>
-          </a:ln>
-        </p:spPr>
+          <p:cNvPr id="10" name="Text 8"/>
+          <p:cNvSpPr/>
+          <p:nvPr/>
+        </p:nvSpPr>
+        <p:spPr>
+          <a:xfrm>
+            <a:off x="3466948" y="1600200"/>
+            <a:ext cx="914400" cy="457200"/>
+          </a:xfrm>
+          <a:prstGeom prst="rect">
+            <a:avLst/>
+          </a:prstGeom>
+          <a:noFill/>
+          <a:ln/>
+        </p:spPr>
+        <p:txBody>
+          <a:bodyPr wrap="square" rtlCol="0" anchor="ctr"/>
+          <a:lstStyle/>
+          <a:p>
+            <a:pPr indent="0" marL="0">
+              <a:buNone/>
+            </a:pPr>
+            <a:r>
+              <a:rPr lang="en-US" sz="2200" b="1" dirty="0">
+                <a:solidFill>
+                  <a:srgbClr val="C68A2E"/>
+                </a:solidFill>
+                <a:latin typeface="Calibri" pitchFamily="34" charset="0"/>
+                <a:ea typeface="Calibri" pitchFamily="34" charset="-122"/>
+                <a:cs typeface="Calibri" pitchFamily="34" charset="-120"/>
+              </a:rPr>
+              <a:t>02</a:t>
+            </a:r>
+            <a:endParaRPr lang="en-US" sz="2200" dirty="0"/>
+          </a:p>
+        </p:txBody>
       </p:sp>
       <p:sp>
         <p:nvSpPr>
@@ -6225,24 +5115,24 @@
         </p:nvSpPr>
         <p:spPr>
           <a:xfrm>
-            <a:off x="3284068" y="1600200"/>
-            <a:ext cx="2697480" cy="868680"/>
-          </a:xfrm>
-          <a:prstGeom prst="rect">
-            <a:avLst/>
-          </a:prstGeom>
-          <a:noFill/>
-          <a:ln/>
-        </p:spPr>
-        <p:txBody>
-          <a:bodyPr wrap="square" rtlCol="0" anchor="ctr"/>
-          <a:lstStyle/>
-          <a:p>
-            <a:pPr algn="ctr" indent="0" marL="0">
-              <a:buNone/>
-            </a:pPr>
-            <a:r>
-              <a:rPr lang="en-US" sz="4400" b="1" dirty="0">
+            <a:off x="3466948" y="2103120"/>
+            <a:ext cx="2331720" cy="457200"/>
+          </a:xfrm>
+          <a:prstGeom prst="rect">
+            <a:avLst/>
+          </a:prstGeom>
+          <a:noFill/>
+          <a:ln/>
+        </p:spPr>
+        <p:txBody>
+          <a:bodyPr wrap="square" rtlCol="0" anchor="ctr"/>
+          <a:lstStyle/>
+          <a:p>
+            <a:pPr indent="0" marL="0">
+              <a:buNone/>
+            </a:pPr>
+            <a:r>
+              <a:rPr lang="en-US" sz="1600" b="1" dirty="0">
                 <a:solidFill>
                   <a:srgbClr val="1E2761"/>
                 </a:solidFill>
@@ -6250,9 +5140,9 @@
                 <a:ea typeface="Calibri" pitchFamily="34" charset="-122"/>
                 <a:cs typeface="Calibri" pitchFamily="34" charset="-120"/>
               </a:rPr>
-              <a:t>&lt; 200 ms</a:t>
-            </a:r>
-            <a:endParaRPr lang="en-US" sz="4400" dirty="0"/>
+              <a:t>Lista reservas</a:t>
+            </a:r>
+            <a:endParaRPr lang="en-US" sz="1600" dirty="0"/>
           </a:p>
         </p:txBody>
       </p:sp>
@@ -6264,32 +5154,32 @@
         </p:nvSpPr>
         <p:spPr>
           <a:xfrm>
-            <a:off x="3421228" y="2468880"/>
-            <a:ext cx="2423160" cy="457200"/>
-          </a:xfrm>
-          <a:prstGeom prst="rect">
-            <a:avLst/>
-          </a:prstGeom>
-          <a:noFill/>
-          <a:ln/>
-        </p:spPr>
-        <p:txBody>
-          <a:bodyPr wrap="square" rtlCol="0" anchor="ctr"/>
-          <a:lstStyle/>
-          <a:p>
-            <a:pPr algn="ctr" indent="0" marL="0">
+            <a:off x="3466948" y="2514600"/>
+            <a:ext cx="2331720" cy="822960"/>
+          </a:xfrm>
+          <a:prstGeom prst="rect">
+            <a:avLst/>
+          </a:prstGeom>
+          <a:noFill/>
+          <a:ln/>
+        </p:spPr>
+        <p:txBody>
+          <a:bodyPr wrap="square" rtlCol="0" anchor="ctr"/>
+          <a:lstStyle/>
+          <a:p>
+            <a:pPr indent="0" marL="0">
               <a:buNone/>
             </a:pPr>
             <a:r>
               <a:rPr lang="en-US" sz="1200" dirty="0">
                 <a:solidFill>
-                  <a:srgbClr val="6B7280"/>
-                </a:solidFill>
-                <a:latin typeface="Calibri" pitchFamily="34" charset="0"/>
-                <a:ea typeface="Calibri" pitchFamily="34" charset="-122"/>
-                <a:cs typeface="Calibri" pitchFamily="34" charset="-120"/>
-              </a:rPr>
-              <a:t>listado catálogo</a:t>
+                  <a:srgbClr val="1F2937"/>
+                </a:solidFill>
+                <a:latin typeface="Calibri" pitchFamily="34" charset="0"/>
+                <a:ea typeface="Calibri" pitchFamily="34" charset="-122"/>
+                <a:cs typeface="Calibri" pitchFamily="34" charset="-120"/>
+              </a:rPr>
+              <a:t>Activas por defecto. Cliente, producto, fecha, estado.</a:t>
             </a:r>
             <a:endParaRPr lang="en-US" sz="1200" dirty="0"/>
           </a:p>
@@ -6304,7 +5194,7 @@
         <p:spPr>
           <a:xfrm>
             <a:off x="6210148" y="1463040"/>
-            <a:ext cx="2697480" cy="1554480"/>
+            <a:ext cx="2697480" cy="2011680"/>
           </a:xfrm>
           <a:prstGeom prst="rect">
             <a:avLst/>
@@ -6322,28 +5212,42 @@
       </p:sp>
       <p:sp>
         <p:nvSpPr>
-          <p:cNvPr id="14" name="Shape 12"/>
-          <p:cNvSpPr/>
-          <p:nvPr/>
-        </p:nvSpPr>
-        <p:spPr>
-          <a:xfrm>
-            <a:off x="6210148" y="2944368"/>
-            <a:ext cx="2697480" cy="73152"/>
-          </a:xfrm>
-          <a:prstGeom prst="rect">
-            <a:avLst/>
-          </a:prstGeom>
-          <a:solidFill>
-            <a:srgbClr val="C68A2E"/>
-          </a:solidFill>
-          <a:ln w="12700">
-            <a:solidFill>
-              <a:srgbClr val="C68A2E"/>
-            </a:solidFill>
-            <a:prstDash val="solid"/>
-          </a:ln>
-        </p:spPr>
+          <p:cNvPr id="14" name="Text 12"/>
+          <p:cNvSpPr/>
+          <p:nvPr/>
+        </p:nvSpPr>
+        <p:spPr>
+          <a:xfrm>
+            <a:off x="6393028" y="1600200"/>
+            <a:ext cx="914400" cy="457200"/>
+          </a:xfrm>
+          <a:prstGeom prst="rect">
+            <a:avLst/>
+          </a:prstGeom>
+          <a:noFill/>
+          <a:ln/>
+        </p:spPr>
+        <p:txBody>
+          <a:bodyPr wrap="square" rtlCol="0" anchor="ctr"/>
+          <a:lstStyle/>
+          <a:p>
+            <a:pPr indent="0" marL="0">
+              <a:buNone/>
+            </a:pPr>
+            <a:r>
+              <a:rPr lang="en-US" sz="2200" b="1" dirty="0">
+                <a:solidFill>
+                  <a:srgbClr val="C68A2E"/>
+                </a:solidFill>
+                <a:latin typeface="Calibri" pitchFamily="34" charset="0"/>
+                <a:ea typeface="Calibri" pitchFamily="34" charset="-122"/>
+                <a:cs typeface="Calibri" pitchFamily="34" charset="-120"/>
+              </a:rPr>
+              <a:t>03</a:t>
+            </a:r>
+            <a:endParaRPr lang="en-US" sz="2200" dirty="0"/>
+          </a:p>
+        </p:txBody>
       </p:sp>
       <p:sp>
         <p:nvSpPr>
@@ -6353,24 +5257,24 @@
         </p:nvSpPr>
         <p:spPr>
           <a:xfrm>
-            <a:off x="6210148" y="1600200"/>
-            <a:ext cx="2697480" cy="868680"/>
-          </a:xfrm>
-          <a:prstGeom prst="rect">
-            <a:avLst/>
-          </a:prstGeom>
-          <a:noFill/>
-          <a:ln/>
-        </p:spPr>
-        <p:txBody>
-          <a:bodyPr wrap="square" rtlCol="0" anchor="ctr"/>
-          <a:lstStyle/>
-          <a:p>
-            <a:pPr algn="ctr" indent="0" marL="0">
-              <a:buNone/>
-            </a:pPr>
-            <a:r>
-              <a:rPr lang="en-US" sz="4400" b="1" dirty="0">
+            <a:off x="6393028" y="2103120"/>
+            <a:ext cx="2331720" cy="457200"/>
+          </a:xfrm>
+          <a:prstGeom prst="rect">
+            <a:avLst/>
+          </a:prstGeom>
+          <a:noFill/>
+          <a:ln/>
+        </p:spPr>
+        <p:txBody>
+          <a:bodyPr wrap="square" rtlCol="0" anchor="ctr"/>
+          <a:lstStyle/>
+          <a:p>
+            <a:pPr indent="0" marL="0">
+              <a:buNone/>
+            </a:pPr>
+            <a:r>
+              <a:rPr lang="en-US" sz="1600" b="1" dirty="0">
                 <a:solidFill>
                   <a:srgbClr val="1E2761"/>
                 </a:solidFill>
@@ -6378,9 +5282,9 @@
                 <a:ea typeface="Calibri" pitchFamily="34" charset="-122"/>
                 <a:cs typeface="Calibri" pitchFamily="34" charset="-120"/>
               </a:rPr>
-              <a:t>3</a:t>
-            </a:r>
-            <a:endParaRPr lang="en-US" sz="4400" dirty="0"/>
+              <a:t>Detalle</a:t>
+            </a:r>
+            <a:endParaRPr lang="en-US" sz="1600" dirty="0"/>
           </a:p>
         </p:txBody>
       </p:sp>
@@ -6392,32 +5296,32 @@
         </p:nvSpPr>
         <p:spPr>
           <a:xfrm>
-            <a:off x="6347308" y="2468880"/>
-            <a:ext cx="2423160" cy="457200"/>
-          </a:xfrm>
-          <a:prstGeom prst="rect">
-            <a:avLst/>
-          </a:prstGeom>
-          <a:noFill/>
-          <a:ln/>
-        </p:spPr>
-        <p:txBody>
-          <a:bodyPr wrap="square" rtlCol="0" anchor="ctr"/>
-          <a:lstStyle/>
-          <a:p>
-            <a:pPr algn="ctr" indent="0" marL="0">
+            <a:off x="6393028" y="2514600"/>
+            <a:ext cx="2331720" cy="822960"/>
+          </a:xfrm>
+          <a:prstGeom prst="rect">
+            <a:avLst/>
+          </a:prstGeom>
+          <a:noFill/>
+          <a:ln/>
+        </p:spPr>
+        <p:txBody>
+          <a:bodyPr wrap="square" rtlCol="0" anchor="ctr"/>
+          <a:lstStyle/>
+          <a:p>
+            <a:pPr indent="0" marL="0">
               <a:buNone/>
             </a:pPr>
             <a:r>
               <a:rPr lang="en-US" sz="1200" dirty="0">
                 <a:solidFill>
-                  <a:srgbClr val="6B7280"/>
-                </a:solidFill>
-                <a:latin typeface="Calibri" pitchFamily="34" charset="0"/>
-                <a:ea typeface="Calibri" pitchFamily="34" charset="-122"/>
-                <a:cs typeface="Calibri" pitchFamily="34" charset="-120"/>
-              </a:rPr>
-              <a:t>roles · auth por capas</a:t>
+                  <a:srgbClr val="1F2937"/>
+                </a:solidFill>
+                <a:latin typeface="Calibri" pitchFamily="34" charset="0"/>
+                <a:ea typeface="Calibri" pitchFamily="34" charset="-122"/>
+                <a:cs typeface="Calibri" pitchFamily="34" charset="-120"/>
+              </a:rPr>
+              <a:t>Historial · botones Confirmar / Entregar contextuales.</a:t>
             </a:r>
             <a:endParaRPr lang="en-US" sz="1200" dirty="0"/>
           </a:p>
@@ -6432,7 +5336,7 @@
         <p:spPr>
           <a:xfrm>
             <a:off x="9136228" y="1463040"/>
-            <a:ext cx="2697480" cy="1554480"/>
+            <a:ext cx="2697480" cy="2011680"/>
           </a:xfrm>
           <a:prstGeom prst="rect">
             <a:avLst/>
@@ -6450,28 +5354,42 @@
       </p:sp>
       <p:sp>
         <p:nvSpPr>
-          <p:cNvPr id="18" name="Shape 16"/>
-          <p:cNvSpPr/>
-          <p:nvPr/>
-        </p:nvSpPr>
-        <p:spPr>
-          <a:xfrm>
-            <a:off x="9136228" y="2944368"/>
-            <a:ext cx="2697480" cy="73152"/>
-          </a:xfrm>
-          <a:prstGeom prst="rect">
-            <a:avLst/>
-          </a:prstGeom>
-          <a:solidFill>
-            <a:srgbClr val="C68A2E"/>
-          </a:solidFill>
-          <a:ln w="12700">
-            <a:solidFill>
-              <a:srgbClr val="C68A2E"/>
-            </a:solidFill>
-            <a:prstDash val="solid"/>
-          </a:ln>
-        </p:spPr>
+          <p:cNvPr id="18" name="Text 16"/>
+          <p:cNvSpPr/>
+          <p:nvPr/>
+        </p:nvSpPr>
+        <p:spPr>
+          <a:xfrm>
+            <a:off x="9319108" y="1600200"/>
+            <a:ext cx="914400" cy="457200"/>
+          </a:xfrm>
+          <a:prstGeom prst="rect">
+            <a:avLst/>
+          </a:prstGeom>
+          <a:noFill/>
+          <a:ln/>
+        </p:spPr>
+        <p:txBody>
+          <a:bodyPr wrap="square" rtlCol="0" anchor="ctr"/>
+          <a:lstStyle/>
+          <a:p>
+            <a:pPr indent="0" marL="0">
+              <a:buNone/>
+            </a:pPr>
+            <a:r>
+              <a:rPr lang="en-US" sz="2200" b="1" dirty="0">
+                <a:solidFill>
+                  <a:srgbClr val="C68A2E"/>
+                </a:solidFill>
+                <a:latin typeface="Calibri" pitchFamily="34" charset="0"/>
+                <a:ea typeface="Calibri" pitchFamily="34" charset="-122"/>
+                <a:cs typeface="Calibri" pitchFamily="34" charset="-120"/>
+              </a:rPr>
+              <a:t>04</a:t>
+            </a:r>
+            <a:endParaRPr lang="en-US" sz="2200" dirty="0"/>
+          </a:p>
+        </p:txBody>
       </p:sp>
       <p:sp>
         <p:nvSpPr>
@@ -6481,24 +5399,24 @@
         </p:nvSpPr>
         <p:spPr>
           <a:xfrm>
-            <a:off x="9136228" y="1600200"/>
-            <a:ext cx="2697480" cy="868680"/>
-          </a:xfrm>
-          <a:prstGeom prst="rect">
-            <a:avLst/>
-          </a:prstGeom>
-          <a:noFill/>
-          <a:ln/>
-        </p:spPr>
-        <p:txBody>
-          <a:bodyPr wrap="square" rtlCol="0" anchor="ctr"/>
-          <a:lstStyle/>
-          <a:p>
-            <a:pPr algn="ctr" indent="0" marL="0">
-              <a:buNone/>
-            </a:pPr>
-            <a:r>
-              <a:rPr lang="en-US" sz="4400" b="1" dirty="0">
+            <a:off x="9319108" y="2103120"/>
+            <a:ext cx="2331720" cy="457200"/>
+          </a:xfrm>
+          <a:prstGeom prst="rect">
+            <a:avLst/>
+          </a:prstGeom>
+          <a:noFill/>
+          <a:ln/>
+        </p:spPr>
+        <p:txBody>
+          <a:bodyPr wrap="square" rtlCol="0" anchor="ctr"/>
+          <a:lstStyle/>
+          <a:p>
+            <a:pPr indent="0" marL="0">
+              <a:buNone/>
+            </a:pPr>
+            <a:r>
+              <a:rPr lang="en-US" sz="1600" b="1" dirty="0">
                 <a:solidFill>
                   <a:srgbClr val="1E2761"/>
                 </a:solidFill>
@@ -6506,9 +5424,9 @@
                 <a:ea typeface="Calibri" pitchFamily="34" charset="-122"/>
                 <a:cs typeface="Calibri" pitchFamily="34" charset="-120"/>
               </a:rPr>
-              <a:t>3</a:t>
-            </a:r>
-            <a:endParaRPr lang="en-US" sz="4400" dirty="0"/>
+              <a:t>Incidencia</a:t>
+            </a:r>
+            <a:endParaRPr lang="en-US" sz="1600" dirty="0"/>
           </a:p>
         </p:txBody>
       </p:sp>
@@ -6520,32 +5438,32 @@
         </p:nvSpPr>
         <p:spPr>
           <a:xfrm>
-            <a:off x="9273388" y="2468880"/>
-            <a:ext cx="2423160" cy="457200"/>
-          </a:xfrm>
-          <a:prstGeom prst="rect">
-            <a:avLst/>
-          </a:prstGeom>
-          <a:noFill/>
-          <a:ln/>
-        </p:spPr>
-        <p:txBody>
-          <a:bodyPr wrap="square" rtlCol="0" anchor="ctr"/>
-          <a:lstStyle/>
-          <a:p>
-            <a:pPr algn="ctr" indent="0" marL="0">
+            <a:off x="9319108" y="2514600"/>
+            <a:ext cx="2331720" cy="822960"/>
+          </a:xfrm>
+          <a:prstGeom prst="rect">
+            <a:avLst/>
+          </a:prstGeom>
+          <a:noFill/>
+          <a:ln/>
+        </p:spPr>
+        <p:txBody>
+          <a:bodyPr wrap="square" rtlCol="0" anchor="ctr"/>
+          <a:lstStyle/>
+          <a:p>
+            <a:pPr indent="0" marL="0">
               <a:buNone/>
             </a:pPr>
             <a:r>
               <a:rPr lang="en-US" sz="1200" dirty="0">
                 <a:solidFill>
-                  <a:srgbClr val="6B7280"/>
-                </a:solidFill>
-                <a:latin typeface="Calibri" pitchFamily="34" charset="0"/>
-                <a:ea typeface="Calibri" pitchFamily="34" charset="-122"/>
-                <a:cs typeface="Calibri" pitchFamily="34" charset="-120"/>
-              </a:rPr>
-              <a:t>suites Vitest sobre flujos críticos</a:t>
+                  <a:srgbClr val="1F2937"/>
+                </a:solidFill>
+                <a:latin typeface="Calibri" pitchFamily="34" charset="0"/>
+                <a:ea typeface="Calibri" pitchFamily="34" charset="-122"/>
+                <a:cs typeface="Calibri" pitchFamily="34" charset="-120"/>
+              </a:rPr>
+              <a:t>Tipo (rotura / faltante / mal estado / otro) + texto.</a:t>
             </a:r>
             <a:endParaRPr lang="en-US" sz="1200" dirty="0"/>
           </a:p>
@@ -6559,8 +5477,8 @@
         </p:nvSpPr>
         <p:spPr>
           <a:xfrm>
-            <a:off x="548640" y="3291840"/>
-            <a:ext cx="5577840" cy="2834640"/>
+            <a:off x="548640" y="3840480"/>
+            <a:ext cx="11094415" cy="2194560"/>
           </a:xfrm>
           <a:prstGeom prst="rect">
             <a:avLst/>
@@ -6584,8 +5502,8 @@
         </p:nvSpPr>
         <p:spPr>
           <a:xfrm>
-            <a:off x="548640" y="3291840"/>
-            <a:ext cx="5577840" cy="411480"/>
+            <a:off x="548640" y="3840480"/>
+            <a:ext cx="11094415" cy="411480"/>
           </a:xfrm>
           <a:prstGeom prst="rect">
             <a:avLst/>
@@ -6609,8 +5527,8 @@
         </p:nvSpPr>
         <p:spPr>
           <a:xfrm>
-            <a:off x="731520" y="3337560"/>
-            <a:ext cx="4572000" cy="320040"/>
+            <a:off x="731520" y="3886200"/>
+            <a:ext cx="5486400" cy="320040"/>
           </a:xfrm>
           <a:prstGeom prst="rect">
             <a:avLst/>
@@ -6631,7 +5549,7 @@
                   <a:srgbClr val="FFFFFF"/>
                 </a:solidFill>
               </a:rPr>
-              <a:t>Tests automatizados</a:t>
+              <a:t>Detalles técnicos</a:t>
             </a:r>
             <a:endParaRPr lang="en-US" sz="1400" dirty="0"/>
           </a:p>
@@ -6645,267 +5563,89 @@
         </p:nvSpPr>
         <p:spPr>
           <a:xfrm>
-            <a:off x="731520" y="3794760"/>
-            <a:ext cx="5212080" cy="2194560"/>
-          </a:xfrm>
-          <a:prstGeom prst="rect">
-            <a:avLst/>
-          </a:prstGeom>
-          <a:noFill/>
-          <a:ln/>
-        </p:spPr>
-        <p:txBody>
-          <a:bodyPr wrap="square" rtlCol="0" anchor="ctr"/>
-          <a:lstStyle/>
-          <a:p>
-            <a:pPr marL="342900" indent="-342900">
+            <a:off x="731520" y="4389120"/>
+            <a:ext cx="10728655" cy="1508760"/>
+          </a:xfrm>
+          <a:prstGeom prst="rect">
+            <a:avLst/>
+          </a:prstGeom>
+          <a:noFill/>
+          <a:ln/>
+        </p:spPr>
+        <p:txBody>
+          <a:bodyPr wrap="square" rtlCol="0" anchor="ctr"/>
+          <a:lstStyle/>
+          <a:p>
+            <a:pPr indent="0" marL="0">
               <a:spcAft>
-                <a:spcPts val="600"/>
+                <a:spcPts val="200"/>
               </a:spcAft>
-              <a:buSzPct val="100000"/>
-              <a:buChar char="■"/>
+              <a:buNone/>
             </a:pPr>
             <a:r>
               <a:rPr lang="en-US" sz="1300" dirty="0">
                 <a:solidFill>
                   <a:srgbClr val="1F2937"/>
                 </a:solidFill>
-              </a:rPr>
-              <a:t>auth.test.js — registro, login, JWT, rate limit.</a:t>
-            </a:r>
-            <a:endParaRPr lang="en-US" sz="1300" dirty="0"/>
-          </a:p>
-          <a:p>
-            <a:pPr marL="342900" indent="-342900">
+                <a:latin typeface="Calibri" pitchFamily="34" charset="0"/>
+                <a:ea typeface="Calibri" pitchFamily="34" charset="-122"/>
+                <a:cs typeface="Calibri" pitchFamily="34" charset="-120"/>
+              </a:rPr>
+              <a:t>• Kotlin + Jetpack Compose · Navigation Compose · single-activity.
+</a:t>
+            </a:r>
+            <a:pPr indent="0" marL="0">
               <a:spcAft>
-                <a:spcPts val="600"/>
+                <a:spcPts val="200"/>
               </a:spcAft>
-              <a:buSzPct val="100000"/>
-              <a:buChar char="■"/>
+              <a:buNone/>
             </a:pPr>
             <a:r>
               <a:rPr lang="en-US" sz="1300" dirty="0">
                 <a:solidFill>
                   <a:srgbClr val="1F2937"/>
                 </a:solidFill>
-              </a:rPr>
-              <a:t>productos.test.js — CRUD, filtros, paginación, roles.</a:t>
-            </a:r>
-            <a:endParaRPr lang="en-US" sz="1300" dirty="0"/>
-          </a:p>
-          <a:p>
-            <a:pPr marL="342900" indent="-342900">
+                <a:latin typeface="Calibri" pitchFamily="34" charset="0"/>
+                <a:ea typeface="Calibri" pitchFamily="34" charset="-122"/>
+                <a:cs typeface="Calibri" pitchFamily="34" charset="-120"/>
+              </a:rPr>
+              <a:t>• Retrofit + OkHttp + AuthInterceptor (inyecta JWT en cada petición).
+</a:t>
+            </a:r>
+            <a:pPr indent="0" marL="0">
               <a:spcAft>
-                <a:spcPts val="600"/>
+                <a:spcPts val="200"/>
               </a:spcAft>
-              <a:buSzPct val="100000"/>
-              <a:buChar char="■"/>
+              <a:buNone/>
             </a:pPr>
             <a:r>
               <a:rPr lang="en-US" sz="1300" dirty="0">
                 <a:solidFill>
                   <a:srgbClr val="1F2937"/>
                 </a:solidFill>
-              </a:rPr>
-              <a:t>reservas.test.js — stock + CONCURRENCIA SIMULADA.</a:t>
-            </a:r>
-            <a:endParaRPr lang="en-US" sz="1300" dirty="0"/>
-          </a:p>
-          <a:p>
-            <a:pPr marL="342900" indent="-342900">
+                <a:latin typeface="Calibri" pitchFamily="34" charset="0"/>
+                <a:ea typeface="Calibri" pitchFamily="34" charset="-122"/>
+                <a:cs typeface="Calibri" pitchFamily="34" charset="-120"/>
+              </a:rPr>
+              <a:t>• JWT cifrado con EncryptedSharedPreferences + Android Keystore.
+</a:t>
+            </a:r>
+            <a:pPr indent="0" marL="0">
               <a:spcAft>
-                <a:spcPts val="600"/>
+                <a:spcPts val="200"/>
               </a:spcAft>
-              <a:buSzPct val="100000"/>
-              <a:buChar char="■"/>
+              <a:buNone/>
             </a:pPr>
             <a:r>
               <a:rPr lang="en-US" sz="1300" dirty="0">
                 <a:solidFill>
                   <a:srgbClr val="1F2937"/>
                 </a:solidFill>
-              </a:rPr>
-              <a:t>Stack: Vitest + Supertest contra BD real.</a:t>
-            </a:r>
-            <a:endParaRPr lang="en-US" sz="1300" dirty="0"/>
-          </a:p>
-        </p:txBody>
-      </p:sp>
-      <p:sp>
-        <p:nvSpPr>
-          <p:cNvPr id="25" name="Shape 23"/>
-          <p:cNvSpPr/>
-          <p:nvPr/>
-        </p:nvSpPr>
-        <p:spPr>
-          <a:xfrm>
-            <a:off x="6263640" y="3291840"/>
-            <a:ext cx="5379415" cy="2834640"/>
-          </a:xfrm>
-          <a:prstGeom prst="rect">
-            <a:avLst/>
-          </a:prstGeom>
-          <a:solidFill>
-            <a:srgbClr val="F8FAFC"/>
-          </a:solidFill>
-          <a:ln w="12700">
-            <a:solidFill>
-              <a:srgbClr val="E5E7EB"/>
-            </a:solidFill>
-            <a:prstDash val="solid"/>
-          </a:ln>
-        </p:spPr>
-      </p:sp>
-      <p:sp>
-        <p:nvSpPr>
-          <p:cNvPr id="26" name="Shape 24"/>
-          <p:cNvSpPr/>
-          <p:nvPr/>
-        </p:nvSpPr>
-        <p:spPr>
-          <a:xfrm>
-            <a:off x="6263640" y="3291840"/>
-            <a:ext cx="5379415" cy="411480"/>
-          </a:xfrm>
-          <a:prstGeom prst="rect">
-            <a:avLst/>
-          </a:prstGeom>
-          <a:solidFill>
-            <a:srgbClr val="1E2761"/>
-          </a:solidFill>
-          <a:ln w="12700">
-            <a:solidFill>
-              <a:srgbClr val="1E2761"/>
-            </a:solidFill>
-            <a:prstDash val="solid"/>
-          </a:ln>
-        </p:spPr>
-      </p:sp>
-      <p:sp>
-        <p:nvSpPr>
-          <p:cNvPr id="27" name="Text 25"/>
-          <p:cNvSpPr/>
-          <p:nvPr/>
-        </p:nvSpPr>
-        <p:spPr>
-          <a:xfrm>
-            <a:off x="6446520" y="3337560"/>
-            <a:ext cx="4572000" cy="320040"/>
-          </a:xfrm>
-          <a:prstGeom prst="rect">
-            <a:avLst/>
-          </a:prstGeom>
-          <a:noFill/>
-          <a:ln/>
-        </p:spPr>
-        <p:txBody>
-          <a:bodyPr wrap="square" rtlCol="0" anchor="ctr"/>
-          <a:lstStyle/>
-          <a:p>
-            <a:pPr indent="0" marL="0">
-              <a:buNone/>
-            </a:pPr>
-            <a:r>
-              <a:rPr lang="en-US" sz="1400" b="1" dirty="0">
-                <a:solidFill>
-                  <a:srgbClr val="FFFFFF"/>
-                </a:solidFill>
-              </a:rPr>
-              <a:t>Funcionalidades entregadas</a:t>
-            </a:r>
-            <a:endParaRPr lang="en-US" sz="1400" dirty="0"/>
-          </a:p>
-        </p:txBody>
-      </p:sp>
-      <p:sp>
-        <p:nvSpPr>
-          <p:cNvPr id="28" name="Text 26"/>
-          <p:cNvSpPr/>
-          <p:nvPr/>
-        </p:nvSpPr>
-        <p:spPr>
-          <a:xfrm>
-            <a:off x="6446520" y="3794760"/>
-            <a:ext cx="5013655" cy="2194560"/>
-          </a:xfrm>
-          <a:prstGeom prst="rect">
-            <a:avLst/>
-          </a:prstGeom>
-          <a:noFill/>
-          <a:ln/>
-        </p:spPr>
-        <p:txBody>
-          <a:bodyPr wrap="square" rtlCol="0" anchor="ctr"/>
-          <a:lstStyle/>
-          <a:p>
-            <a:pPr marL="342900" indent="-342900">
-              <a:spcAft>
-                <a:spcPts val="600"/>
-              </a:spcAft>
-              <a:buSzPct val="100000"/>
-              <a:buChar char="■"/>
-            </a:pPr>
-            <a:r>
-              <a:rPr lang="en-US" sz="1300" dirty="0">
-                <a:solidFill>
-                  <a:srgbClr val="1F2937"/>
-                </a:solidFill>
-              </a:rPr>
-              <a:t>Dashboard de KPIs agregados.</a:t>
-            </a:r>
-            <a:endParaRPr lang="en-US" sz="1300" dirty="0"/>
-          </a:p>
-          <a:p>
-            <a:pPr marL="342900" indent="-342900">
-              <a:spcAft>
-                <a:spcPts val="600"/>
-              </a:spcAft>
-              <a:buSzPct val="100000"/>
-              <a:buChar char="■"/>
-            </a:pPr>
-            <a:r>
-              <a:rPr lang="en-US" sz="1300" dirty="0">
-                <a:solidFill>
-                  <a:srgbClr val="1F2937"/>
-                </a:solidFill>
-              </a:rPr>
-              <a:t>Importación y exportación CSV.</a:t>
-            </a:r>
-            <a:endParaRPr lang="en-US" sz="1300" dirty="0"/>
-          </a:p>
-          <a:p>
-            <a:pPr marL="342900" indent="-342900">
-              <a:spcAft>
-                <a:spcPts val="600"/>
-              </a:spcAft>
-              <a:buSzPct val="100000"/>
-              <a:buChar char="■"/>
-            </a:pPr>
-            <a:r>
-              <a:rPr lang="en-US" sz="1300" dirty="0">
-                <a:solidFill>
-                  <a:srgbClr val="1F2937"/>
-                </a:solidFill>
-              </a:rPr>
-              <a:t>Albarán A4 imprimible al entregar.</a:t>
-            </a:r>
-            <a:endParaRPr lang="en-US" sz="1300" dirty="0"/>
-          </a:p>
-          <a:p>
-            <a:pPr marL="342900" indent="-342900">
-              <a:spcAft>
-                <a:spcPts val="600"/>
-              </a:spcAft>
-              <a:buSzPct val="100000"/>
-              <a:buChar char="■"/>
-            </a:pPr>
-            <a:r>
-              <a:rPr lang="en-US" sz="1300" dirty="0">
-                <a:solidFill>
-                  <a:srgbClr val="1F2937"/>
-                </a:solidFill>
-              </a:rPr>
-              <a:t>Modo oscuro · instalador Windows · APK Android.</a:t>
+                <a:latin typeface="Calibri" pitchFamily="34" charset="0"/>
+                <a:ea typeface="Calibri" pitchFamily="34" charset="-122"/>
+                <a:cs typeface="Calibri" pitchFamily="34" charset="-120"/>
+              </a:rPr>
+              <a:t>• BASE_URL por build variant: 10.0.2.2 (debug) / Railway (release).</a:t>
             </a:r>
             <a:endParaRPr lang="en-US" sz="1300" dirty="0"/>
           </a:p>
@@ -6922,13 +5662,6 @@
 <file path=ppt/slides/slide14.xml><?xml version="1.0" encoding="utf-8"?>
 <p:sld xmlns:a="http://schemas.openxmlformats.org/drawingml/2006/main" xmlns:r="http://schemas.openxmlformats.org/officeDocument/2006/relationships" xmlns:p="http://schemas.openxmlformats.org/presentationml/2006/main">
   <p:cSld name="Slide 14">
-    <p:bg>
-      <p:bgPr>
-        <a:solidFill>
-          <a:srgbClr val="141A47"/>
-        </a:solidFill>
-      </p:bgPr>
-    </p:bg>
     <p:spTree>
       <p:nvGrpSpPr>
         <p:cNvPr id="1" name=""/>
@@ -6945,14 +5678,92 @@
       </p:grpSpPr>
       <p:sp>
         <p:nvSpPr>
-          <p:cNvPr id="2" name="Shape 0"/>
-          <p:cNvSpPr/>
-          <p:nvPr/>
-        </p:nvSpPr>
-        <p:spPr>
-          <a:xfrm>
-            <a:off x="0" y="0"/>
-            <a:ext cx="12191695" cy="73152"/>
+          <p:cNvPr id="2" name="Text 0"/>
+          <p:cNvSpPr/>
+          <p:nvPr/>
+        </p:nvSpPr>
+        <p:spPr>
+          <a:xfrm>
+            <a:off x="457200" y="164592"/>
+            <a:ext cx="11277295" cy="228600"/>
+          </a:xfrm>
+          <a:prstGeom prst="rect">
+            <a:avLst/>
+          </a:prstGeom>
+          <a:noFill/>
+          <a:ln/>
+        </p:spPr>
+        <p:txBody>
+          <a:bodyPr wrap="square" rtlCol="0" anchor="ctr"/>
+          <a:lstStyle/>
+          <a:p>
+            <a:pPr indent="0" marL="0">
+              <a:buNone/>
+            </a:pPr>
+            <a:r>
+              <a:rPr lang="en-US" sz="1000" b="1" spc="400" kern="0" dirty="0">
+                <a:solidFill>
+                  <a:srgbClr val="C68A2E"/>
+                </a:solidFill>
+                <a:latin typeface="Calibri" pitchFamily="34" charset="0"/>
+                <a:ea typeface="Calibri" pitchFamily="34" charset="-122"/>
+                <a:cs typeface="Calibri" pitchFamily="34" charset="-120"/>
+              </a:rPr>
+              <a:t>INFRAESTRUCTURA</a:t>
+            </a:r>
+            <a:endParaRPr lang="en-US" sz="1000" dirty="0"/>
+          </a:p>
+        </p:txBody>
+      </p:sp>
+      <p:sp>
+        <p:nvSpPr>
+          <p:cNvPr id="3" name="Text 1"/>
+          <p:cNvSpPr/>
+          <p:nvPr/>
+        </p:nvSpPr>
+        <p:spPr>
+          <a:xfrm>
+            <a:off x="457200" y="365760"/>
+            <a:ext cx="11277295" cy="640080"/>
+          </a:xfrm>
+          <a:prstGeom prst="rect">
+            <a:avLst/>
+          </a:prstGeom>
+          <a:noFill/>
+          <a:ln/>
+        </p:spPr>
+        <p:txBody>
+          <a:bodyPr wrap="square" rtlCol="0" anchor="ctr"/>
+          <a:lstStyle/>
+          <a:p>
+            <a:pPr indent="0" marL="0">
+              <a:buNone/>
+            </a:pPr>
+            <a:r>
+              <a:rPr lang="en-US" sz="3200" b="1" dirty="0">
+                <a:solidFill>
+                  <a:srgbClr val="1E2761"/>
+                </a:solidFill>
+                <a:latin typeface="Calibri" pitchFamily="34" charset="0"/>
+                <a:ea typeface="Calibri" pitchFamily="34" charset="-122"/>
+                <a:cs typeface="Calibri" pitchFamily="34" charset="-120"/>
+              </a:rPr>
+              <a:t>Despliegue en Railway · deploy continuo</a:t>
+            </a:r>
+            <a:endParaRPr lang="en-US" sz="3200" dirty="0"/>
+          </a:p>
+        </p:txBody>
+      </p:sp>
+      <p:sp>
+        <p:nvSpPr>
+          <p:cNvPr id="4" name="Shape 2"/>
+          <p:cNvSpPr/>
+          <p:nvPr/>
+        </p:nvSpPr>
+        <p:spPr>
+          <a:xfrm>
+            <a:off x="457200" y="1024128"/>
+            <a:ext cx="411480" cy="64008"/>
           </a:xfrm>
           <a:prstGeom prst="rect">
             <a:avLst/>
@@ -6970,14 +5781,39 @@
       </p:sp>
       <p:sp>
         <p:nvSpPr>
-          <p:cNvPr id="3" name="Text 1"/>
-          <p:cNvSpPr/>
-          <p:nvPr/>
-        </p:nvSpPr>
-        <p:spPr>
-          <a:xfrm>
-            <a:off x="457200" y="1828800"/>
-            <a:ext cx="11277295" cy="457200"/>
+          <p:cNvPr id="5" name="Shape 3"/>
+          <p:cNvSpPr/>
+          <p:nvPr/>
+        </p:nvSpPr>
+        <p:spPr>
+          <a:xfrm>
+            <a:off x="609448" y="1645920"/>
+            <a:ext cx="2011680" cy="1005840"/>
+          </a:xfrm>
+          <a:prstGeom prst="rect">
+            <a:avLst/>
+          </a:prstGeom>
+          <a:solidFill>
+            <a:srgbClr val="F8FAFC"/>
+          </a:solidFill>
+          <a:ln w="12700">
+            <a:solidFill>
+              <a:srgbClr val="E5E7EB"/>
+            </a:solidFill>
+            <a:prstDash val="solid"/>
+          </a:ln>
+        </p:spPr>
+      </p:sp>
+      <p:sp>
+        <p:nvSpPr>
+          <p:cNvPr id="6" name="Text 4"/>
+          <p:cNvSpPr/>
+          <p:nvPr/>
+        </p:nvSpPr>
+        <p:spPr>
+          <a:xfrm>
+            <a:off x="609448" y="1737360"/>
+            <a:ext cx="2011680" cy="365760"/>
           </a:xfrm>
           <a:prstGeom prst="rect">
             <a:avLst/>
@@ -6993,15 +5829,90 @@
               <a:buNone/>
             </a:pPr>
             <a:r>
-              <a:rPr lang="en-US" sz="1400" b="1" spc="600" kern="0" dirty="0">
+              <a:rPr lang="en-US" sz="1600" b="1" dirty="0">
+                <a:solidFill>
+                  <a:srgbClr val="1E2761"/>
+                </a:solidFill>
+                <a:latin typeface="Calibri" pitchFamily="34" charset="0"/>
+                <a:ea typeface="Calibri" pitchFamily="34" charset="-122"/>
+                <a:cs typeface="Calibri" pitchFamily="34" charset="-120"/>
+              </a:rPr>
+              <a:t>git push</a:t>
+            </a:r>
+            <a:endParaRPr lang="en-US" sz="1600" dirty="0"/>
+          </a:p>
+        </p:txBody>
+      </p:sp>
+      <p:sp>
+        <p:nvSpPr>
+          <p:cNvPr id="7" name="Text 5"/>
+          <p:cNvSpPr/>
+          <p:nvPr/>
+        </p:nvSpPr>
+        <p:spPr>
+          <a:xfrm>
+            <a:off x="609448" y="2148840"/>
+            <a:ext cx="2011680" cy="365760"/>
+          </a:xfrm>
+          <a:prstGeom prst="rect">
+            <a:avLst/>
+          </a:prstGeom>
+          <a:noFill/>
+          <a:ln/>
+        </p:spPr>
+        <p:txBody>
+          <a:bodyPr wrap="square" rtlCol="0" anchor="ctr"/>
+          <a:lstStyle/>
+          <a:p>
+            <a:pPr algn="ctr" indent="0" marL="0">
+              <a:buNone/>
+            </a:pPr>
+            <a:r>
+              <a:rPr lang="en-US" sz="1100" dirty="0">
+                <a:solidFill>
+                  <a:srgbClr val="6B7280"/>
+                </a:solidFill>
+                <a:latin typeface="Consolas" pitchFamily="34" charset="0"/>
+                <a:ea typeface="Consolas" pitchFamily="34" charset="-122"/>
+                <a:cs typeface="Consolas" pitchFamily="34" charset="-120"/>
+              </a:rPr>
+              <a:t>main</a:t>
+            </a:r>
+            <a:endParaRPr lang="en-US" sz="1100" dirty="0"/>
+          </a:p>
+        </p:txBody>
+      </p:sp>
+      <p:sp>
+        <p:nvSpPr>
+          <p:cNvPr id="8" name="Text 6"/>
+          <p:cNvSpPr/>
+          <p:nvPr/>
+        </p:nvSpPr>
+        <p:spPr>
+          <a:xfrm>
+            <a:off x="2621128" y="1874520"/>
+            <a:ext cx="228600" cy="457200"/>
+          </a:xfrm>
+          <a:prstGeom prst="rect">
+            <a:avLst/>
+          </a:prstGeom>
+          <a:noFill/>
+          <a:ln/>
+        </p:spPr>
+        <p:txBody>
+          <a:bodyPr wrap="square" rtlCol="0" anchor="ctr"/>
+          <a:lstStyle/>
+          <a:p>
+            <a:pPr algn="ctr" indent="0" marL="0">
+              <a:buNone/>
+            </a:pPr>
+            <a:r>
+              <a:rPr lang="en-US" sz="1400" dirty="0">
                 <a:solidFill>
                   <a:srgbClr val="C68A2E"/>
                 </a:solidFill>
-                <a:latin typeface="Calibri" pitchFamily="34" charset="0"/>
-                <a:ea typeface="Calibri" pitchFamily="34" charset="-122"/>
-                <a:cs typeface="Calibri" pitchFamily="34" charset="-120"/>
-              </a:rPr>
-              <a:t>DEMO EN VIVO</a:t>
+              </a:rPr>
+              <a:t>▶</a:t>
             </a:r>
             <a:endParaRPr lang="en-US" sz="1400" dirty="0"/>
           </a:p>
@@ -7009,14 +5920,39 @@
       </p:sp>
       <p:sp>
         <p:nvSpPr>
-          <p:cNvPr id="4" name="Text 2"/>
-          <p:cNvSpPr/>
-          <p:nvPr/>
-        </p:nvSpPr>
-        <p:spPr>
-          <a:xfrm>
-            <a:off x="457200" y="2377440"/>
-            <a:ext cx="11277295" cy="1097280"/>
+          <p:cNvPr id="9" name="Shape 7"/>
+          <p:cNvSpPr/>
+          <p:nvPr/>
+        </p:nvSpPr>
+        <p:spPr>
+          <a:xfrm>
+            <a:off x="2849728" y="1645920"/>
+            <a:ext cx="2011680" cy="1005840"/>
+          </a:xfrm>
+          <a:prstGeom prst="rect">
+            <a:avLst/>
+          </a:prstGeom>
+          <a:solidFill>
+            <a:srgbClr val="F8FAFC"/>
+          </a:solidFill>
+          <a:ln w="12700">
+            <a:solidFill>
+              <a:srgbClr val="E5E7EB"/>
+            </a:solidFill>
+            <a:prstDash val="solid"/>
+          </a:ln>
+        </p:spPr>
+      </p:sp>
+      <p:sp>
+        <p:nvSpPr>
+          <p:cNvPr id="10" name="Text 8"/>
+          <p:cNvSpPr/>
+          <p:nvPr/>
+        </p:nvSpPr>
+        <p:spPr>
+          <a:xfrm>
+            <a:off x="2849728" y="1737360"/>
+            <a:ext cx="2011680" cy="365760"/>
           </a:xfrm>
           <a:prstGeom prst="rect">
             <a:avLst/>
@@ -7032,284 +5968,1258 @@
               <a:buNone/>
             </a:pPr>
             <a:r>
-              <a:rPr lang="en-US" sz="6400" b="1" dirty="0">
+              <a:rPr lang="en-US" sz="1600" b="1" dirty="0">
+                <a:solidFill>
+                  <a:srgbClr val="1E2761"/>
+                </a:solidFill>
+                <a:latin typeface="Calibri" pitchFamily="34" charset="0"/>
+                <a:ea typeface="Calibri" pitchFamily="34" charset="-122"/>
+                <a:cs typeface="Calibri" pitchFamily="34" charset="-120"/>
+              </a:rPr>
+              <a:t>Webhook</a:t>
+            </a:r>
+            <a:endParaRPr lang="en-US" sz="1600" dirty="0"/>
+          </a:p>
+        </p:txBody>
+      </p:sp>
+      <p:sp>
+        <p:nvSpPr>
+          <p:cNvPr id="11" name="Text 9"/>
+          <p:cNvSpPr/>
+          <p:nvPr/>
+        </p:nvSpPr>
+        <p:spPr>
+          <a:xfrm>
+            <a:off x="2849728" y="2148840"/>
+            <a:ext cx="2011680" cy="365760"/>
+          </a:xfrm>
+          <a:prstGeom prst="rect">
+            <a:avLst/>
+          </a:prstGeom>
+          <a:noFill/>
+          <a:ln/>
+        </p:spPr>
+        <p:txBody>
+          <a:bodyPr wrap="square" rtlCol="0" anchor="ctr"/>
+          <a:lstStyle/>
+          <a:p>
+            <a:pPr algn="ctr" indent="0" marL="0">
+              <a:buNone/>
+            </a:pPr>
+            <a:r>
+              <a:rPr lang="en-US" sz="1100" dirty="0">
+                <a:solidFill>
+                  <a:srgbClr val="6B7280"/>
+                </a:solidFill>
+                <a:latin typeface="Consolas" pitchFamily="34" charset="0"/>
+                <a:ea typeface="Consolas" pitchFamily="34" charset="-122"/>
+                <a:cs typeface="Consolas" pitchFamily="34" charset="-120"/>
+              </a:rPr>
+              <a:t>GitHub → Railway</a:t>
+            </a:r>
+            <a:endParaRPr lang="en-US" sz="1100" dirty="0"/>
+          </a:p>
+        </p:txBody>
+      </p:sp>
+      <p:sp>
+        <p:nvSpPr>
+          <p:cNvPr id="12" name="Text 10"/>
+          <p:cNvSpPr/>
+          <p:nvPr/>
+        </p:nvSpPr>
+        <p:spPr>
+          <a:xfrm>
+            <a:off x="4861408" y="1874520"/>
+            <a:ext cx="228600" cy="457200"/>
+          </a:xfrm>
+          <a:prstGeom prst="rect">
+            <a:avLst/>
+          </a:prstGeom>
+          <a:noFill/>
+          <a:ln/>
+        </p:spPr>
+        <p:txBody>
+          <a:bodyPr wrap="square" rtlCol="0" anchor="ctr"/>
+          <a:lstStyle/>
+          <a:p>
+            <a:pPr algn="ctr" indent="0" marL="0">
+              <a:buNone/>
+            </a:pPr>
+            <a:r>
+              <a:rPr lang="en-US" sz="1400" dirty="0">
+                <a:solidFill>
+                  <a:srgbClr val="C68A2E"/>
+                </a:solidFill>
+              </a:rPr>
+              <a:t>▶</a:t>
+            </a:r>
+            <a:endParaRPr lang="en-US" sz="1400" dirty="0"/>
+          </a:p>
+        </p:txBody>
+      </p:sp>
+      <p:sp>
+        <p:nvSpPr>
+          <p:cNvPr id="13" name="Shape 11"/>
+          <p:cNvSpPr/>
+          <p:nvPr/>
+        </p:nvSpPr>
+        <p:spPr>
+          <a:xfrm>
+            <a:off x="5090008" y="1645920"/>
+            <a:ext cx="2011680" cy="1005840"/>
+          </a:xfrm>
+          <a:prstGeom prst="rect">
+            <a:avLst/>
+          </a:prstGeom>
+          <a:solidFill>
+            <a:srgbClr val="F8FAFC"/>
+          </a:solidFill>
+          <a:ln w="12700">
+            <a:solidFill>
+              <a:srgbClr val="E5E7EB"/>
+            </a:solidFill>
+            <a:prstDash val="solid"/>
+          </a:ln>
+        </p:spPr>
+      </p:sp>
+      <p:sp>
+        <p:nvSpPr>
+          <p:cNvPr id="14" name="Text 12"/>
+          <p:cNvSpPr/>
+          <p:nvPr/>
+        </p:nvSpPr>
+        <p:spPr>
+          <a:xfrm>
+            <a:off x="5090008" y="1737360"/>
+            <a:ext cx="2011680" cy="365760"/>
+          </a:xfrm>
+          <a:prstGeom prst="rect">
+            <a:avLst/>
+          </a:prstGeom>
+          <a:noFill/>
+          <a:ln/>
+        </p:spPr>
+        <p:txBody>
+          <a:bodyPr wrap="square" rtlCol="0" anchor="ctr"/>
+          <a:lstStyle/>
+          <a:p>
+            <a:pPr algn="ctr" indent="0" marL="0">
+              <a:buNone/>
+            </a:pPr>
+            <a:r>
+              <a:rPr lang="en-US" sz="1600" b="1" dirty="0">
+                <a:solidFill>
+                  <a:srgbClr val="1E2761"/>
+                </a:solidFill>
+                <a:latin typeface="Calibri" pitchFamily="34" charset="0"/>
+                <a:ea typeface="Calibri" pitchFamily="34" charset="-122"/>
+                <a:cs typeface="Calibri" pitchFamily="34" charset="-120"/>
+              </a:rPr>
+              <a:t>Nixpacks</a:t>
+            </a:r>
+            <a:endParaRPr lang="en-US" sz="1600" dirty="0"/>
+          </a:p>
+        </p:txBody>
+      </p:sp>
+      <p:sp>
+        <p:nvSpPr>
+          <p:cNvPr id="15" name="Text 13"/>
+          <p:cNvSpPr/>
+          <p:nvPr/>
+        </p:nvSpPr>
+        <p:spPr>
+          <a:xfrm>
+            <a:off x="5090008" y="2148840"/>
+            <a:ext cx="2011680" cy="365760"/>
+          </a:xfrm>
+          <a:prstGeom prst="rect">
+            <a:avLst/>
+          </a:prstGeom>
+          <a:noFill/>
+          <a:ln/>
+        </p:spPr>
+        <p:txBody>
+          <a:bodyPr wrap="square" rtlCol="0" anchor="ctr"/>
+          <a:lstStyle/>
+          <a:p>
+            <a:pPr algn="ctr" indent="0" marL="0">
+              <a:buNone/>
+            </a:pPr>
+            <a:r>
+              <a:rPr lang="en-US" sz="1100" dirty="0">
+                <a:solidFill>
+                  <a:srgbClr val="6B7280"/>
+                </a:solidFill>
+                <a:latin typeface="Consolas" pitchFamily="34" charset="0"/>
+                <a:ea typeface="Consolas" pitchFamily="34" charset="-122"/>
+                <a:cs typeface="Consolas" pitchFamily="34" charset="-120"/>
+              </a:rPr>
+              <a:t>npm ci --omit=dev</a:t>
+            </a:r>
+            <a:endParaRPr lang="en-US" sz="1100" dirty="0"/>
+          </a:p>
+        </p:txBody>
+      </p:sp>
+      <p:sp>
+        <p:nvSpPr>
+          <p:cNvPr id="16" name="Text 14"/>
+          <p:cNvSpPr/>
+          <p:nvPr/>
+        </p:nvSpPr>
+        <p:spPr>
+          <a:xfrm>
+            <a:off x="7101688" y="1874520"/>
+            <a:ext cx="228600" cy="457200"/>
+          </a:xfrm>
+          <a:prstGeom prst="rect">
+            <a:avLst/>
+          </a:prstGeom>
+          <a:noFill/>
+          <a:ln/>
+        </p:spPr>
+        <p:txBody>
+          <a:bodyPr wrap="square" rtlCol="0" anchor="ctr"/>
+          <a:lstStyle/>
+          <a:p>
+            <a:pPr algn="ctr" indent="0" marL="0">
+              <a:buNone/>
+            </a:pPr>
+            <a:r>
+              <a:rPr lang="en-US" sz="1400" dirty="0">
+                <a:solidFill>
+                  <a:srgbClr val="C68A2E"/>
+                </a:solidFill>
+              </a:rPr>
+              <a:t>▶</a:t>
+            </a:r>
+            <a:endParaRPr lang="en-US" sz="1400" dirty="0"/>
+          </a:p>
+        </p:txBody>
+      </p:sp>
+      <p:sp>
+        <p:nvSpPr>
+          <p:cNvPr id="17" name="Shape 15"/>
+          <p:cNvSpPr/>
+          <p:nvPr/>
+        </p:nvSpPr>
+        <p:spPr>
+          <a:xfrm>
+            <a:off x="7330288" y="1645920"/>
+            <a:ext cx="2011680" cy="1005840"/>
+          </a:xfrm>
+          <a:prstGeom prst="rect">
+            <a:avLst/>
+          </a:prstGeom>
+          <a:solidFill>
+            <a:srgbClr val="F8FAFC"/>
+          </a:solidFill>
+          <a:ln w="12700">
+            <a:solidFill>
+              <a:srgbClr val="E5E7EB"/>
+            </a:solidFill>
+            <a:prstDash val="solid"/>
+          </a:ln>
+        </p:spPr>
+      </p:sp>
+      <p:sp>
+        <p:nvSpPr>
+          <p:cNvPr id="18" name="Text 16"/>
+          <p:cNvSpPr/>
+          <p:nvPr/>
+        </p:nvSpPr>
+        <p:spPr>
+          <a:xfrm>
+            <a:off x="7330288" y="1737360"/>
+            <a:ext cx="2011680" cy="365760"/>
+          </a:xfrm>
+          <a:prstGeom prst="rect">
+            <a:avLst/>
+          </a:prstGeom>
+          <a:noFill/>
+          <a:ln/>
+        </p:spPr>
+        <p:txBody>
+          <a:bodyPr wrap="square" rtlCol="0" anchor="ctr"/>
+          <a:lstStyle/>
+          <a:p>
+            <a:pPr algn="ctr" indent="0" marL="0">
+              <a:buNone/>
+            </a:pPr>
+            <a:r>
+              <a:rPr lang="en-US" sz="1600" b="1" dirty="0">
+                <a:solidFill>
+                  <a:srgbClr val="1E2761"/>
+                </a:solidFill>
+                <a:latin typeface="Calibri" pitchFamily="34" charset="0"/>
+                <a:ea typeface="Calibri" pitchFamily="34" charset="-122"/>
+                <a:cs typeface="Calibri" pitchFamily="34" charset="-120"/>
+              </a:rPr>
+              <a:t>Run</a:t>
+            </a:r>
+            <a:endParaRPr lang="en-US" sz="1600" dirty="0"/>
+          </a:p>
+        </p:txBody>
+      </p:sp>
+      <p:sp>
+        <p:nvSpPr>
+          <p:cNvPr id="19" name="Text 17"/>
+          <p:cNvSpPr/>
+          <p:nvPr/>
+        </p:nvSpPr>
+        <p:spPr>
+          <a:xfrm>
+            <a:off x="7330288" y="2148840"/>
+            <a:ext cx="2011680" cy="365760"/>
+          </a:xfrm>
+          <a:prstGeom prst="rect">
+            <a:avLst/>
+          </a:prstGeom>
+          <a:noFill/>
+          <a:ln/>
+        </p:spPr>
+        <p:txBody>
+          <a:bodyPr wrap="square" rtlCol="0" anchor="ctr"/>
+          <a:lstStyle/>
+          <a:p>
+            <a:pPr algn="ctr" indent="0" marL="0">
+              <a:buNone/>
+            </a:pPr>
+            <a:r>
+              <a:rPr lang="en-US" sz="1100" dirty="0">
+                <a:solidFill>
+                  <a:srgbClr val="6B7280"/>
+                </a:solidFill>
+                <a:latin typeface="Consolas" pitchFamily="34" charset="0"/>
+                <a:ea typeface="Consolas" pitchFamily="34" charset="-122"/>
+                <a:cs typeface="Consolas" pitchFamily="34" charset="-120"/>
+              </a:rPr>
+              <a:t>node server.js</a:t>
+            </a:r>
+            <a:endParaRPr lang="en-US" sz="1100" dirty="0"/>
+          </a:p>
+        </p:txBody>
+      </p:sp>
+      <p:sp>
+        <p:nvSpPr>
+          <p:cNvPr id="20" name="Text 18"/>
+          <p:cNvSpPr/>
+          <p:nvPr/>
+        </p:nvSpPr>
+        <p:spPr>
+          <a:xfrm>
+            <a:off x="9341968" y="1874520"/>
+            <a:ext cx="228600" cy="457200"/>
+          </a:xfrm>
+          <a:prstGeom prst="rect">
+            <a:avLst/>
+          </a:prstGeom>
+          <a:noFill/>
+          <a:ln/>
+        </p:spPr>
+        <p:txBody>
+          <a:bodyPr wrap="square" rtlCol="0" anchor="ctr"/>
+          <a:lstStyle/>
+          <a:p>
+            <a:pPr algn="ctr" indent="0" marL="0">
+              <a:buNone/>
+            </a:pPr>
+            <a:r>
+              <a:rPr lang="en-US" sz="1400" dirty="0">
+                <a:solidFill>
+                  <a:srgbClr val="C68A2E"/>
+                </a:solidFill>
+              </a:rPr>
+              <a:t>▶</a:t>
+            </a:r>
+            <a:endParaRPr lang="en-US" sz="1400" dirty="0"/>
+          </a:p>
+        </p:txBody>
+      </p:sp>
+      <p:sp>
+        <p:nvSpPr>
+          <p:cNvPr id="21" name="Shape 19"/>
+          <p:cNvSpPr/>
+          <p:nvPr/>
+        </p:nvSpPr>
+        <p:spPr>
+          <a:xfrm>
+            <a:off x="9570568" y="1645920"/>
+            <a:ext cx="2011680" cy="1005840"/>
+          </a:xfrm>
+          <a:prstGeom prst="rect">
+            <a:avLst/>
+          </a:prstGeom>
+          <a:solidFill>
+            <a:srgbClr val="F8FAFC"/>
+          </a:solidFill>
+          <a:ln w="12700">
+            <a:solidFill>
+              <a:srgbClr val="E5E7EB"/>
+            </a:solidFill>
+            <a:prstDash val="solid"/>
+          </a:ln>
+        </p:spPr>
+      </p:sp>
+      <p:sp>
+        <p:nvSpPr>
+          <p:cNvPr id="22" name="Text 20"/>
+          <p:cNvSpPr/>
+          <p:nvPr/>
+        </p:nvSpPr>
+        <p:spPr>
+          <a:xfrm>
+            <a:off x="9570568" y="1737360"/>
+            <a:ext cx="2011680" cy="365760"/>
+          </a:xfrm>
+          <a:prstGeom prst="rect">
+            <a:avLst/>
+          </a:prstGeom>
+          <a:noFill/>
+          <a:ln/>
+        </p:spPr>
+        <p:txBody>
+          <a:bodyPr wrap="square" rtlCol="0" anchor="ctr"/>
+          <a:lstStyle/>
+          <a:p>
+            <a:pPr algn="ctr" indent="0" marL="0">
+              <a:buNone/>
+            </a:pPr>
+            <a:r>
+              <a:rPr lang="en-US" sz="1600" b="1" dirty="0">
+                <a:solidFill>
+                  <a:srgbClr val="1E2761"/>
+                </a:solidFill>
+                <a:latin typeface="Calibri" pitchFamily="34" charset="0"/>
+                <a:ea typeface="Calibri" pitchFamily="34" charset="-122"/>
+                <a:cs typeface="Calibri" pitchFamily="34" charset="-120"/>
+              </a:rPr>
+              <a:t>HTTPS</a:t>
+            </a:r>
+            <a:endParaRPr lang="en-US" sz="1600" dirty="0"/>
+          </a:p>
+        </p:txBody>
+      </p:sp>
+      <p:sp>
+        <p:nvSpPr>
+          <p:cNvPr id="23" name="Text 21"/>
+          <p:cNvSpPr/>
+          <p:nvPr/>
+        </p:nvSpPr>
+        <p:spPr>
+          <a:xfrm>
+            <a:off x="9570568" y="2148840"/>
+            <a:ext cx="2011680" cy="365760"/>
+          </a:xfrm>
+          <a:prstGeom prst="rect">
+            <a:avLst/>
+          </a:prstGeom>
+          <a:noFill/>
+          <a:ln/>
+        </p:spPr>
+        <p:txBody>
+          <a:bodyPr wrap="square" rtlCol="0" anchor="ctr"/>
+          <a:lstStyle/>
+          <a:p>
+            <a:pPr algn="ctr" indent="0" marL="0">
+              <a:buNone/>
+            </a:pPr>
+            <a:r>
+              <a:rPr lang="en-US" sz="1100" dirty="0">
+                <a:solidFill>
+                  <a:srgbClr val="6B7280"/>
+                </a:solidFill>
+                <a:latin typeface="Consolas" pitchFamily="34" charset="0"/>
+                <a:ea typeface="Consolas" pitchFamily="34" charset="-122"/>
+                <a:cs typeface="Consolas" pitchFamily="34" charset="-120"/>
+              </a:rPr>
+              <a:t>subdominio público</a:t>
+            </a:r>
+            <a:endParaRPr lang="en-US" sz="1100" dirty="0"/>
+          </a:p>
+        </p:txBody>
+      </p:sp>
+      <p:sp>
+        <p:nvSpPr>
+          <p:cNvPr id="24" name="Shape 22"/>
+          <p:cNvSpPr/>
+          <p:nvPr/>
+        </p:nvSpPr>
+        <p:spPr>
+          <a:xfrm>
+            <a:off x="548640" y="3108960"/>
+            <a:ext cx="5486400" cy="3017520"/>
+          </a:xfrm>
+          <a:prstGeom prst="rect">
+            <a:avLst/>
+          </a:prstGeom>
+          <a:solidFill>
+            <a:srgbClr val="F8FAFC"/>
+          </a:solidFill>
+          <a:ln w="12700">
+            <a:solidFill>
+              <a:srgbClr val="E5E7EB"/>
+            </a:solidFill>
+            <a:prstDash val="solid"/>
+          </a:ln>
+        </p:spPr>
+      </p:sp>
+      <p:sp>
+        <p:nvSpPr>
+          <p:cNvPr id="25" name="Shape 23"/>
+          <p:cNvSpPr/>
+          <p:nvPr/>
+        </p:nvSpPr>
+        <p:spPr>
+          <a:xfrm>
+            <a:off x="548640" y="3108960"/>
+            <a:ext cx="5486400" cy="411480"/>
+          </a:xfrm>
+          <a:prstGeom prst="rect">
+            <a:avLst/>
+          </a:prstGeom>
+          <a:solidFill>
+            <a:srgbClr val="1E2761"/>
+          </a:solidFill>
+          <a:ln w="12700">
+            <a:solidFill>
+              <a:srgbClr val="1E2761"/>
+            </a:solidFill>
+            <a:prstDash val="solid"/>
+          </a:ln>
+        </p:spPr>
+      </p:sp>
+      <p:sp>
+        <p:nvSpPr>
+          <p:cNvPr id="26" name="Text 24"/>
+          <p:cNvSpPr/>
+          <p:nvPr/>
+        </p:nvSpPr>
+        <p:spPr>
+          <a:xfrm>
+            <a:off x="731520" y="3154680"/>
+            <a:ext cx="4572000" cy="320040"/>
+          </a:xfrm>
+          <a:prstGeom prst="rect">
+            <a:avLst/>
+          </a:prstGeom>
+          <a:noFill/>
+          <a:ln/>
+        </p:spPr>
+        <p:txBody>
+          <a:bodyPr wrap="square" rtlCol="0" anchor="ctr"/>
+          <a:lstStyle/>
+          <a:p>
+            <a:pPr indent="0" marL="0">
+              <a:buNone/>
+            </a:pPr>
+            <a:r>
+              <a:rPr lang="en-US" sz="1300" b="1" dirty="0">
                 <a:solidFill>
                   <a:srgbClr val="FFFFFF"/>
                 </a:solidFill>
-                <a:latin typeface="Calibri" pitchFamily="34" charset="0"/>
-                <a:ea typeface="Calibri" pitchFamily="34" charset="-122"/>
-                <a:cs typeface="Calibri" pitchFamily="34" charset="-120"/>
-              </a:rPr>
-              <a:t>2 — 3 minutos</a:t>
-            </a:r>
-            <a:endParaRPr lang="en-US" sz="6400" dirty="0"/>
-          </a:p>
-        </p:txBody>
-      </p:sp>
-      <p:sp>
-        <p:nvSpPr>
-          <p:cNvPr id="5" name="Text 3"/>
-          <p:cNvSpPr/>
-          <p:nvPr/>
-        </p:nvSpPr>
-        <p:spPr>
-          <a:xfrm>
-            <a:off x="1097280" y="3931920"/>
-            <a:ext cx="9997135" cy="1463040"/>
-          </a:xfrm>
-          <a:prstGeom prst="rect">
-            <a:avLst/>
-          </a:prstGeom>
-          <a:noFill/>
-          <a:ln/>
-        </p:spPr>
-        <p:txBody>
-          <a:bodyPr wrap="square" rtlCol="0" anchor="ctr"/>
-          <a:lstStyle/>
-          <a:p>
-            <a:pPr algn="ctr" indent="0" marL="0">
-              <a:spcAft>
-                <a:spcPts val="800"/>
-              </a:spcAft>
-              <a:buNone/>
-            </a:pPr>
-            <a:r>
-              <a:rPr lang="en-US" sz="1600" b="1" dirty="0">
+              </a:rPr>
+              <a:t>Variables de entorno</a:t>
+            </a:r>
+            <a:endParaRPr lang="en-US" sz="1300" dirty="0"/>
+          </a:p>
+        </p:txBody>
+      </p:sp>
+      <p:sp>
+        <p:nvSpPr>
+          <p:cNvPr id="27" name="Text 25"/>
+          <p:cNvSpPr/>
+          <p:nvPr/>
+        </p:nvSpPr>
+        <p:spPr>
+          <a:xfrm>
+            <a:off x="731520" y="3657600"/>
+            <a:ext cx="2103120" cy="365760"/>
+          </a:xfrm>
+          <a:prstGeom prst="rect">
+            <a:avLst/>
+          </a:prstGeom>
+          <a:noFill/>
+          <a:ln/>
+        </p:spPr>
+        <p:txBody>
+          <a:bodyPr wrap="square" rtlCol="0" anchor="ctr"/>
+          <a:lstStyle/>
+          <a:p>
+            <a:pPr indent="0" marL="0">
+              <a:buNone/>
+            </a:pPr>
+            <a:r>
+              <a:rPr lang="en-US" sz="1200" b="1" dirty="0">
                 <a:solidFill>
                   <a:srgbClr val="C68A2E"/>
                 </a:solidFill>
-                <a:latin typeface="Calibri" pitchFamily="34" charset="0"/>
-                <a:ea typeface="Calibri" pitchFamily="34" charset="-122"/>
-                <a:cs typeface="Calibri" pitchFamily="34" charset="-120"/>
-              </a:rPr>
-              <a:t>①  </a:t>
-            </a:r>
-            <a:pPr algn="ctr" indent="0" marL="0">
-              <a:spcAft>
-                <a:spcPts val="800"/>
-              </a:spcAft>
-              <a:buNone/>
-            </a:pPr>
-            <a:r>
-              <a:rPr lang="en-US" sz="1600" b="1" dirty="0">
+                <a:latin typeface="Consolas" pitchFamily="34" charset="0"/>
+                <a:ea typeface="Consolas" pitchFamily="34" charset="-122"/>
+                <a:cs typeface="Consolas" pitchFamily="34" charset="-120"/>
+              </a:rPr>
+              <a:t>MYSQL_URL</a:t>
+            </a:r>
+            <a:endParaRPr lang="en-US" sz="1200" dirty="0"/>
+          </a:p>
+        </p:txBody>
+      </p:sp>
+      <p:sp>
+        <p:nvSpPr>
+          <p:cNvPr id="28" name="Text 26"/>
+          <p:cNvSpPr/>
+          <p:nvPr/>
+        </p:nvSpPr>
+        <p:spPr>
+          <a:xfrm>
+            <a:off x="2834640" y="3657600"/>
+            <a:ext cx="3108960" cy="365760"/>
+          </a:xfrm>
+          <a:prstGeom prst="rect">
+            <a:avLst/>
+          </a:prstGeom>
+          <a:noFill/>
+          <a:ln/>
+        </p:spPr>
+        <p:txBody>
+          <a:bodyPr wrap="square" rtlCol="0" anchor="ctr"/>
+          <a:lstStyle/>
+          <a:p>
+            <a:pPr indent="0" marL="0">
+              <a:buNone/>
+            </a:pPr>
+            <a:r>
+              <a:rPr lang="en-US" sz="1200" dirty="0">
+                <a:solidFill>
+                  <a:srgbClr val="1F2937"/>
+                </a:solidFill>
+                <a:latin typeface="Calibri" pitchFamily="34" charset="0"/>
+                <a:ea typeface="Calibri" pitchFamily="34" charset="-122"/>
+                <a:cs typeface="Calibri" pitchFamily="34" charset="-120"/>
+              </a:rPr>
+              <a:t>plugin MySQL de Railway</a:t>
+            </a:r>
+            <a:endParaRPr lang="en-US" sz="1200" dirty="0"/>
+          </a:p>
+        </p:txBody>
+      </p:sp>
+      <p:sp>
+        <p:nvSpPr>
+          <p:cNvPr id="29" name="Text 27"/>
+          <p:cNvSpPr/>
+          <p:nvPr/>
+        </p:nvSpPr>
+        <p:spPr>
+          <a:xfrm>
+            <a:off x="731520" y="4114800"/>
+            <a:ext cx="2103120" cy="365760"/>
+          </a:xfrm>
+          <a:prstGeom prst="rect">
+            <a:avLst/>
+          </a:prstGeom>
+          <a:noFill/>
+          <a:ln/>
+        </p:spPr>
+        <p:txBody>
+          <a:bodyPr wrap="square" rtlCol="0" anchor="ctr"/>
+          <a:lstStyle/>
+          <a:p>
+            <a:pPr indent="0" marL="0">
+              <a:buNone/>
+            </a:pPr>
+            <a:r>
+              <a:rPr lang="en-US" sz="1200" b="1" dirty="0">
+                <a:solidFill>
+                  <a:srgbClr val="C68A2E"/>
+                </a:solidFill>
+                <a:latin typeface="Consolas" pitchFamily="34" charset="0"/>
+                <a:ea typeface="Consolas" pitchFamily="34" charset="-122"/>
+                <a:cs typeface="Consolas" pitchFamily="34" charset="-120"/>
+              </a:rPr>
+              <a:t>JWT_SECRET</a:t>
+            </a:r>
+            <a:endParaRPr lang="en-US" sz="1200" dirty="0"/>
+          </a:p>
+        </p:txBody>
+      </p:sp>
+      <p:sp>
+        <p:nvSpPr>
+          <p:cNvPr id="30" name="Text 28"/>
+          <p:cNvSpPr/>
+          <p:nvPr/>
+        </p:nvSpPr>
+        <p:spPr>
+          <a:xfrm>
+            <a:off x="2834640" y="4114800"/>
+            <a:ext cx="3108960" cy="365760"/>
+          </a:xfrm>
+          <a:prstGeom prst="rect">
+            <a:avLst/>
+          </a:prstGeom>
+          <a:noFill/>
+          <a:ln/>
+        </p:spPr>
+        <p:txBody>
+          <a:bodyPr wrap="square" rtlCol="0" anchor="ctr"/>
+          <a:lstStyle/>
+          <a:p>
+            <a:pPr indent="0" marL="0">
+              <a:buNone/>
+            </a:pPr>
+            <a:r>
+              <a:rPr lang="en-US" sz="1200" dirty="0">
+                <a:solidFill>
+                  <a:srgbClr val="1F2937"/>
+                </a:solidFill>
+                <a:latin typeface="Calibri" pitchFamily="34" charset="0"/>
+                <a:ea typeface="Calibri" pitchFamily="34" charset="-122"/>
+                <a:cs typeface="Calibri" pitchFamily="34" charset="-120"/>
+              </a:rPr>
+              <a:t>≥ 256 bits (crypto.randomBytes)</a:t>
+            </a:r>
+            <a:endParaRPr lang="en-US" sz="1200" dirty="0"/>
+          </a:p>
+        </p:txBody>
+      </p:sp>
+      <p:sp>
+        <p:nvSpPr>
+          <p:cNvPr id="31" name="Text 29"/>
+          <p:cNvSpPr/>
+          <p:nvPr/>
+        </p:nvSpPr>
+        <p:spPr>
+          <a:xfrm>
+            <a:off x="731520" y="4572000"/>
+            <a:ext cx="2103120" cy="365760"/>
+          </a:xfrm>
+          <a:prstGeom prst="rect">
+            <a:avLst/>
+          </a:prstGeom>
+          <a:noFill/>
+          <a:ln/>
+        </p:spPr>
+        <p:txBody>
+          <a:bodyPr wrap="square" rtlCol="0" anchor="ctr"/>
+          <a:lstStyle/>
+          <a:p>
+            <a:pPr indent="0" marL="0">
+              <a:buNone/>
+            </a:pPr>
+            <a:r>
+              <a:rPr lang="en-US" sz="1200" b="1" dirty="0">
+                <a:solidFill>
+                  <a:srgbClr val="C68A2E"/>
+                </a:solidFill>
+                <a:latin typeface="Consolas" pitchFamily="34" charset="0"/>
+                <a:ea typeface="Consolas" pitchFamily="34" charset="-122"/>
+                <a:cs typeface="Consolas" pitchFamily="34" charset="-120"/>
+              </a:rPr>
+              <a:t>JWT_EXPIRES_IN</a:t>
+            </a:r>
+            <a:endParaRPr lang="en-US" sz="1200" dirty="0"/>
+          </a:p>
+        </p:txBody>
+      </p:sp>
+      <p:sp>
+        <p:nvSpPr>
+          <p:cNvPr id="32" name="Text 30"/>
+          <p:cNvSpPr/>
+          <p:nvPr/>
+        </p:nvSpPr>
+        <p:spPr>
+          <a:xfrm>
+            <a:off x="2834640" y="4572000"/>
+            <a:ext cx="3108960" cy="365760"/>
+          </a:xfrm>
+          <a:prstGeom prst="rect">
+            <a:avLst/>
+          </a:prstGeom>
+          <a:noFill/>
+          <a:ln/>
+        </p:spPr>
+        <p:txBody>
+          <a:bodyPr wrap="square" rtlCol="0" anchor="ctr"/>
+          <a:lstStyle/>
+          <a:p>
+            <a:pPr indent="0" marL="0">
+              <a:buNone/>
+            </a:pPr>
+            <a:r>
+              <a:rPr lang="en-US" sz="1200" dirty="0">
+                <a:solidFill>
+                  <a:srgbClr val="1F2937"/>
+                </a:solidFill>
+                <a:latin typeface="Calibri" pitchFamily="34" charset="0"/>
+                <a:ea typeface="Calibri" pitchFamily="34" charset="-122"/>
+                <a:cs typeface="Calibri" pitchFamily="34" charset="-120"/>
+              </a:rPr>
+              <a:t>8h</a:t>
+            </a:r>
+            <a:endParaRPr lang="en-US" sz="1200" dirty="0"/>
+          </a:p>
+        </p:txBody>
+      </p:sp>
+      <p:sp>
+        <p:nvSpPr>
+          <p:cNvPr id="33" name="Text 31"/>
+          <p:cNvSpPr/>
+          <p:nvPr/>
+        </p:nvSpPr>
+        <p:spPr>
+          <a:xfrm>
+            <a:off x="731520" y="5029200"/>
+            <a:ext cx="2103120" cy="365760"/>
+          </a:xfrm>
+          <a:prstGeom prst="rect">
+            <a:avLst/>
+          </a:prstGeom>
+          <a:noFill/>
+          <a:ln/>
+        </p:spPr>
+        <p:txBody>
+          <a:bodyPr wrap="square" rtlCol="0" anchor="ctr"/>
+          <a:lstStyle/>
+          <a:p>
+            <a:pPr indent="0" marL="0">
+              <a:buNone/>
+            </a:pPr>
+            <a:r>
+              <a:rPr lang="en-US" sz="1200" b="1" dirty="0">
+                <a:solidFill>
+                  <a:srgbClr val="C68A2E"/>
+                </a:solidFill>
+                <a:latin typeface="Consolas" pitchFamily="34" charset="0"/>
+                <a:ea typeface="Consolas" pitchFamily="34" charset="-122"/>
+                <a:cs typeface="Consolas" pitchFamily="34" charset="-120"/>
+              </a:rPr>
+              <a:t>CORS_ORIGIN</a:t>
+            </a:r>
+            <a:endParaRPr lang="en-US" sz="1200" dirty="0"/>
+          </a:p>
+        </p:txBody>
+      </p:sp>
+      <p:sp>
+        <p:nvSpPr>
+          <p:cNvPr id="34" name="Text 32"/>
+          <p:cNvSpPr/>
+          <p:nvPr/>
+        </p:nvSpPr>
+        <p:spPr>
+          <a:xfrm>
+            <a:off x="2834640" y="5029200"/>
+            <a:ext cx="3108960" cy="365760"/>
+          </a:xfrm>
+          <a:prstGeom prst="rect">
+            <a:avLst/>
+          </a:prstGeom>
+          <a:noFill/>
+          <a:ln/>
+        </p:spPr>
+        <p:txBody>
+          <a:bodyPr wrap="square" rtlCol="0" anchor="ctr"/>
+          <a:lstStyle/>
+          <a:p>
+            <a:pPr indent="0" marL="0">
+              <a:buNone/>
+            </a:pPr>
+            <a:r>
+              <a:rPr lang="en-US" sz="1200" dirty="0">
+                <a:solidFill>
+                  <a:srgbClr val="1F2937"/>
+                </a:solidFill>
+                <a:latin typeface="Calibri" pitchFamily="34" charset="0"/>
+                <a:ea typeface="Calibri" pitchFamily="34" charset="-122"/>
+                <a:cs typeface="Calibri" pitchFamily="34" charset="-120"/>
+              </a:rPr>
+              <a:t>mismo origen</a:t>
+            </a:r>
+            <a:endParaRPr lang="en-US" sz="1200" dirty="0"/>
+          </a:p>
+        </p:txBody>
+      </p:sp>
+      <p:sp>
+        <p:nvSpPr>
+          <p:cNvPr id="35" name="Text 33"/>
+          <p:cNvSpPr/>
+          <p:nvPr/>
+        </p:nvSpPr>
+        <p:spPr>
+          <a:xfrm>
+            <a:off x="731520" y="5486400"/>
+            <a:ext cx="2103120" cy="365760"/>
+          </a:xfrm>
+          <a:prstGeom prst="rect">
+            <a:avLst/>
+          </a:prstGeom>
+          <a:noFill/>
+          <a:ln/>
+        </p:spPr>
+        <p:txBody>
+          <a:bodyPr wrap="square" rtlCol="0" anchor="ctr"/>
+          <a:lstStyle/>
+          <a:p>
+            <a:pPr indent="0" marL="0">
+              <a:buNone/>
+            </a:pPr>
+            <a:r>
+              <a:rPr lang="en-US" sz="1200" b="1" dirty="0">
+                <a:solidFill>
+                  <a:srgbClr val="C68A2E"/>
+                </a:solidFill>
+                <a:latin typeface="Consolas" pitchFamily="34" charset="0"/>
+                <a:ea typeface="Consolas" pitchFamily="34" charset="-122"/>
+                <a:cs typeface="Consolas" pitchFamily="34" charset="-120"/>
+              </a:rPr>
+              <a:t>NODE_ENV</a:t>
+            </a:r>
+            <a:endParaRPr lang="en-US" sz="1200" dirty="0"/>
+          </a:p>
+        </p:txBody>
+      </p:sp>
+      <p:sp>
+        <p:nvSpPr>
+          <p:cNvPr id="36" name="Text 34"/>
+          <p:cNvSpPr/>
+          <p:nvPr/>
+        </p:nvSpPr>
+        <p:spPr>
+          <a:xfrm>
+            <a:off x="2834640" y="5486400"/>
+            <a:ext cx="3108960" cy="365760"/>
+          </a:xfrm>
+          <a:prstGeom prst="rect">
+            <a:avLst/>
+          </a:prstGeom>
+          <a:noFill/>
+          <a:ln/>
+        </p:spPr>
+        <p:txBody>
+          <a:bodyPr wrap="square" rtlCol="0" anchor="ctr"/>
+          <a:lstStyle/>
+          <a:p>
+            <a:pPr indent="0" marL="0">
+              <a:buNone/>
+            </a:pPr>
+            <a:r>
+              <a:rPr lang="en-US" sz="1200" dirty="0">
+                <a:solidFill>
+                  <a:srgbClr val="1F2937"/>
+                </a:solidFill>
+                <a:latin typeface="Calibri" pitchFamily="34" charset="0"/>
+                <a:ea typeface="Calibri" pitchFamily="34" charset="-122"/>
+                <a:cs typeface="Calibri" pitchFamily="34" charset="-120"/>
+              </a:rPr>
+              <a:t>production</a:t>
+            </a:r>
+            <a:endParaRPr lang="en-US" sz="1200" dirty="0"/>
+          </a:p>
+        </p:txBody>
+      </p:sp>
+      <p:sp>
+        <p:nvSpPr>
+          <p:cNvPr id="37" name="Shape 35"/>
+          <p:cNvSpPr/>
+          <p:nvPr/>
+        </p:nvSpPr>
+        <p:spPr>
+          <a:xfrm>
+            <a:off x="6309360" y="3108960"/>
+            <a:ext cx="5333695" cy="3017520"/>
+          </a:xfrm>
+          <a:prstGeom prst="rect">
+            <a:avLst/>
+          </a:prstGeom>
+          <a:solidFill>
+            <a:srgbClr val="F8FAFC"/>
+          </a:solidFill>
+          <a:ln w="12700">
+            <a:solidFill>
+              <a:srgbClr val="E5E7EB"/>
+            </a:solidFill>
+            <a:prstDash val="solid"/>
+          </a:ln>
+        </p:spPr>
+      </p:sp>
+      <p:sp>
+        <p:nvSpPr>
+          <p:cNvPr id="38" name="Shape 36"/>
+          <p:cNvSpPr/>
+          <p:nvPr/>
+        </p:nvSpPr>
+        <p:spPr>
+          <a:xfrm>
+            <a:off x="6309360" y="3108960"/>
+            <a:ext cx="5333695" cy="411480"/>
+          </a:xfrm>
+          <a:prstGeom prst="rect">
+            <a:avLst/>
+          </a:prstGeom>
+          <a:solidFill>
+            <a:srgbClr val="1E2761"/>
+          </a:solidFill>
+          <a:ln w="12700">
+            <a:solidFill>
+              <a:srgbClr val="1E2761"/>
+            </a:solidFill>
+            <a:prstDash val="solid"/>
+          </a:ln>
+        </p:spPr>
+      </p:sp>
+      <p:sp>
+        <p:nvSpPr>
+          <p:cNvPr id="39" name="Text 37"/>
+          <p:cNvSpPr/>
+          <p:nvPr/>
+        </p:nvSpPr>
+        <p:spPr>
+          <a:xfrm>
+            <a:off x="6492240" y="3154680"/>
+            <a:ext cx="4572000" cy="320040"/>
+          </a:xfrm>
+          <a:prstGeom prst="rect">
+            <a:avLst/>
+          </a:prstGeom>
+          <a:noFill/>
+          <a:ln/>
+        </p:spPr>
+        <p:txBody>
+          <a:bodyPr wrap="square" rtlCol="0" anchor="ctr"/>
+          <a:lstStyle/>
+          <a:p>
+            <a:pPr indent="0" marL="0">
+              <a:buNone/>
+            </a:pPr>
+            <a:r>
+              <a:rPr lang="en-US" sz="1300" b="1" dirty="0">
                 <a:solidFill>
                   <a:srgbClr val="FFFFFF"/>
                 </a:solidFill>
-                <a:latin typeface="Calibri" pitchFamily="34" charset="0"/>
-                <a:ea typeface="Calibri" pitchFamily="34" charset="-122"/>
-                <a:cs typeface="Calibri" pitchFamily="34" charset="-120"/>
-              </a:rPr>
-              <a:t>Cliente  </a:t>
-            </a:r>
-            <a:pPr algn="ctr" indent="0" marL="0">
-              <a:spcAft>
-                <a:spcPts val="800"/>
-              </a:spcAft>
-              <a:buNone/>
-            </a:pPr>
-            <a:r>
-              <a:rPr lang="en-US" sz="1600" dirty="0">
-                <a:solidFill>
-                  <a:srgbClr val="CADCFC"/>
-                </a:solidFill>
-                <a:latin typeface="Calibri" pitchFamily="34" charset="0"/>
-                <a:ea typeface="Calibri" pitchFamily="34" charset="-122"/>
-                <a:cs typeface="Calibri" pitchFamily="34" charset="-120"/>
-              </a:rPr>
-              <a:t>— login, catálogo, reservar.                </a:t>
-            </a:r>
-            <a:pPr algn="ctr" indent="0" marL="0">
-              <a:spcAft>
-                <a:spcPts val="800"/>
-              </a:spcAft>
-              <a:buNone/>
-            </a:pPr>
-            <a:r>
-              <a:rPr lang="en-US" sz="1600" b="1" dirty="0">
+              </a:rPr>
+              <a:t>Acceso público</a:t>
+            </a:r>
+            <a:endParaRPr lang="en-US" sz="1300" dirty="0"/>
+          </a:p>
+        </p:txBody>
+      </p:sp>
+      <p:sp>
+        <p:nvSpPr>
+          <p:cNvPr id="40" name="Text 38"/>
+          <p:cNvSpPr/>
+          <p:nvPr/>
+        </p:nvSpPr>
+        <p:spPr>
+          <a:xfrm>
+            <a:off x="6492240" y="3657600"/>
+            <a:ext cx="2103120" cy="320040"/>
+          </a:xfrm>
+          <a:prstGeom prst="rect">
+            <a:avLst/>
+          </a:prstGeom>
+          <a:noFill/>
+          <a:ln/>
+        </p:spPr>
+        <p:txBody>
+          <a:bodyPr wrap="square" rtlCol="0" anchor="ctr"/>
+          <a:lstStyle/>
+          <a:p>
+            <a:pPr indent="0" marL="0">
+              <a:buNone/>
+            </a:pPr>
+            <a:r>
+              <a:rPr lang="en-US" sz="1200" b="1" dirty="0">
+                <a:solidFill>
+                  <a:srgbClr val="1E2761"/>
+                </a:solidFill>
+              </a:rPr>
+              <a:t>Web (PWA)</a:t>
+            </a:r>
+            <a:endParaRPr lang="en-US" sz="1200" dirty="0"/>
+          </a:p>
+        </p:txBody>
+      </p:sp>
+      <p:sp>
+        <p:nvSpPr>
+          <p:cNvPr id="41" name="Text 39"/>
+          <p:cNvSpPr/>
+          <p:nvPr/>
+        </p:nvSpPr>
+        <p:spPr>
+          <a:xfrm>
+            <a:off x="6492240" y="3950208"/>
+            <a:ext cx="5150815" cy="411480"/>
+          </a:xfrm>
+          <a:prstGeom prst="rect">
+            <a:avLst/>
+          </a:prstGeom>
+          <a:noFill/>
+          <a:ln/>
+        </p:spPr>
+        <p:txBody>
+          <a:bodyPr wrap="square" rtlCol="0" anchor="ctr"/>
+          <a:lstStyle/>
+          <a:p>
+            <a:pPr indent="0" marL="0">
+              <a:buNone/>
+            </a:pPr>
+            <a:r>
+              <a:rPr lang="en-US" sz="1200" dirty="0">
                 <a:solidFill>
                   <a:srgbClr val="C68A2E"/>
                 </a:solidFill>
-                <a:latin typeface="Calibri" pitchFamily="34" charset="0"/>
-                <a:ea typeface="Calibri" pitchFamily="34" charset="-122"/>
-                <a:cs typeface="Calibri" pitchFamily="34" charset="-120"/>
-              </a:rPr>
-              <a:t>②  </a:t>
-            </a:r>
-            <a:pPr algn="ctr" indent="0" marL="0">
-              <a:spcAft>
-                <a:spcPts val="800"/>
-              </a:spcAft>
-              <a:buNone/>
-            </a:pPr>
-            <a:r>
-              <a:rPr lang="en-US" sz="1600" b="1" dirty="0">
-                <a:solidFill>
-                  <a:srgbClr val="FFFFFF"/>
-                </a:solidFill>
-                <a:latin typeface="Calibri" pitchFamily="34" charset="0"/>
-                <a:ea typeface="Calibri" pitchFamily="34" charset="-122"/>
-                <a:cs typeface="Calibri" pitchFamily="34" charset="-120"/>
-              </a:rPr>
-              <a:t>Operario  </a:t>
-            </a:r>
-            <a:pPr algn="ctr" indent="0" marL="0">
-              <a:spcAft>
-                <a:spcPts val="800"/>
-              </a:spcAft>
-              <a:buNone/>
-            </a:pPr>
-            <a:r>
-              <a:rPr lang="en-US" sz="1600" dirty="0">
-                <a:solidFill>
-                  <a:srgbClr val="CADCFC"/>
-                </a:solidFill>
-                <a:latin typeface="Calibri" pitchFamily="34" charset="0"/>
-                <a:ea typeface="Calibri" pitchFamily="34" charset="-122"/>
-                <a:cs typeface="Calibri" pitchFamily="34" charset="-120"/>
-              </a:rPr>
-              <a:t>— cola, confirmar, entregar.
-</a:t>
-            </a:r>
-            <a:pPr algn="ctr" indent="0" marL="0">
-              <a:spcAft>
-                <a:spcPts val="800"/>
-              </a:spcAft>
-              <a:buNone/>
-            </a:pPr>
-            <a:r>
-              <a:rPr lang="en-US" sz="1600" b="1" dirty="0">
+                <a:latin typeface="Consolas" pitchFamily="34" charset="0"/>
+                <a:ea typeface="Consolas" pitchFamily="34" charset="-122"/>
+                <a:cs typeface="Consolas" pitchFamily="34" charset="-120"/>
+              </a:rPr>
+              <a:t>tfgdam-production.up.railway.app/</a:t>
+            </a:r>
+            <a:endParaRPr lang="en-US" sz="1200" dirty="0"/>
+          </a:p>
+        </p:txBody>
+      </p:sp>
+      <p:sp>
+        <p:nvSpPr>
+          <p:cNvPr id="42" name="Text 40"/>
+          <p:cNvSpPr/>
+          <p:nvPr/>
+        </p:nvSpPr>
+        <p:spPr>
+          <a:xfrm>
+            <a:off x="6492240" y="4434840"/>
+            <a:ext cx="2103120" cy="320040"/>
+          </a:xfrm>
+          <a:prstGeom prst="rect">
+            <a:avLst/>
+          </a:prstGeom>
+          <a:noFill/>
+          <a:ln/>
+        </p:spPr>
+        <p:txBody>
+          <a:bodyPr wrap="square" rtlCol="0" anchor="ctr"/>
+          <a:lstStyle/>
+          <a:p>
+            <a:pPr indent="0" marL="0">
+              <a:buNone/>
+            </a:pPr>
+            <a:r>
+              <a:rPr lang="en-US" sz="1200" b="1" dirty="0">
+                <a:solidFill>
+                  <a:srgbClr val="1E2761"/>
+                </a:solidFill>
+              </a:rPr>
+              <a:t>API REST</a:t>
+            </a:r>
+            <a:endParaRPr lang="en-US" sz="1200" dirty="0"/>
+          </a:p>
+        </p:txBody>
+      </p:sp>
+      <p:sp>
+        <p:nvSpPr>
+          <p:cNvPr id="43" name="Text 41"/>
+          <p:cNvSpPr/>
+          <p:nvPr/>
+        </p:nvSpPr>
+        <p:spPr>
+          <a:xfrm>
+            <a:off x="6492240" y="4727448"/>
+            <a:ext cx="5150815" cy="411480"/>
+          </a:xfrm>
+          <a:prstGeom prst="rect">
+            <a:avLst/>
+          </a:prstGeom>
+          <a:noFill/>
+          <a:ln/>
+        </p:spPr>
+        <p:txBody>
+          <a:bodyPr wrap="square" rtlCol="0" anchor="ctr"/>
+          <a:lstStyle/>
+          <a:p>
+            <a:pPr indent="0" marL="0">
+              <a:buNone/>
+            </a:pPr>
+            <a:r>
+              <a:rPr lang="en-US" sz="1200" dirty="0">
                 <a:solidFill>
                   <a:srgbClr val="C68A2E"/>
                 </a:solidFill>
-                <a:latin typeface="Calibri" pitchFamily="34" charset="0"/>
-                <a:ea typeface="Calibri" pitchFamily="34" charset="-122"/>
-                <a:cs typeface="Calibri" pitchFamily="34" charset="-120"/>
-              </a:rPr>
-              <a:t>③  </a:t>
-            </a:r>
-            <a:pPr algn="ctr" indent="0" marL="0">
-              <a:spcAft>
-                <a:spcPts val="800"/>
-              </a:spcAft>
-              <a:buNone/>
-            </a:pPr>
-            <a:r>
-              <a:rPr lang="en-US" sz="1600" b="1" dirty="0">
-                <a:solidFill>
-                  <a:srgbClr val="FFFFFF"/>
-                </a:solidFill>
-                <a:latin typeface="Calibri" pitchFamily="34" charset="0"/>
-                <a:ea typeface="Calibri" pitchFamily="34" charset="-122"/>
-                <a:cs typeface="Calibri" pitchFamily="34" charset="-120"/>
-              </a:rPr>
-              <a:t>Admin  </a:t>
-            </a:r>
-            <a:pPr algn="ctr" indent="0" marL="0">
-              <a:spcAft>
-                <a:spcPts val="800"/>
-              </a:spcAft>
-              <a:buNone/>
-            </a:pPr>
-            <a:r>
-              <a:rPr lang="en-US" sz="1600" dirty="0">
-                <a:solidFill>
-                  <a:srgbClr val="CADCFC"/>
-                </a:solidFill>
-                <a:latin typeface="Calibri" pitchFamily="34" charset="0"/>
-                <a:ea typeface="Calibri" pitchFamily="34" charset="-122"/>
-                <a:cs typeface="Calibri" pitchFamily="34" charset="-120"/>
-              </a:rPr>
-              <a:t>— dashboard KPIs.                </a:t>
-            </a:r>
-            <a:pPr algn="ctr" indent="0" marL="0">
-              <a:spcAft>
-                <a:spcPts val="800"/>
-              </a:spcAft>
-              <a:buNone/>
-            </a:pPr>
-            <a:r>
-              <a:rPr lang="en-US" sz="1600" b="1" dirty="0">
+                <a:latin typeface="Consolas" pitchFamily="34" charset="0"/>
+                <a:ea typeface="Consolas" pitchFamily="34" charset="-122"/>
+                <a:cs typeface="Consolas" pitchFamily="34" charset="-120"/>
+              </a:rPr>
+              <a:t>tfgdam-production.up.railway.app/api/</a:t>
+            </a:r>
+            <a:endParaRPr lang="en-US" sz="1200" dirty="0"/>
+          </a:p>
+        </p:txBody>
+      </p:sp>
+      <p:sp>
+        <p:nvSpPr>
+          <p:cNvPr id="44" name="Text 42"/>
+          <p:cNvSpPr/>
+          <p:nvPr/>
+        </p:nvSpPr>
+        <p:spPr>
+          <a:xfrm>
+            <a:off x="6492240" y="5212080"/>
+            <a:ext cx="2103120" cy="320040"/>
+          </a:xfrm>
+          <a:prstGeom prst="rect">
+            <a:avLst/>
+          </a:prstGeom>
+          <a:noFill/>
+          <a:ln/>
+        </p:spPr>
+        <p:txBody>
+          <a:bodyPr wrap="square" rtlCol="0" anchor="ctr"/>
+          <a:lstStyle/>
+          <a:p>
+            <a:pPr indent="0" marL="0">
+              <a:buNone/>
+            </a:pPr>
+            <a:r>
+              <a:rPr lang="en-US" sz="1200" b="1" dirty="0">
+                <a:solidFill>
+                  <a:srgbClr val="1E2761"/>
+                </a:solidFill>
+              </a:rPr>
+              <a:t>Health</a:t>
+            </a:r>
+            <a:endParaRPr lang="en-US" sz="1200" dirty="0"/>
+          </a:p>
+        </p:txBody>
+      </p:sp>
+      <p:sp>
+        <p:nvSpPr>
+          <p:cNvPr id="45" name="Text 43"/>
+          <p:cNvSpPr/>
+          <p:nvPr/>
+        </p:nvSpPr>
+        <p:spPr>
+          <a:xfrm>
+            <a:off x="6492240" y="5504688"/>
+            <a:ext cx="5150815" cy="411480"/>
+          </a:xfrm>
+          <a:prstGeom prst="rect">
+            <a:avLst/>
+          </a:prstGeom>
+          <a:noFill/>
+          <a:ln/>
+        </p:spPr>
+        <p:txBody>
+          <a:bodyPr wrap="square" rtlCol="0" anchor="ctr"/>
+          <a:lstStyle/>
+          <a:p>
+            <a:pPr indent="0" marL="0">
+              <a:buNone/>
+            </a:pPr>
+            <a:r>
+              <a:rPr lang="en-US" sz="1200" dirty="0">
                 <a:solidFill>
                   <a:srgbClr val="C68A2E"/>
                 </a:solidFill>
-                <a:latin typeface="Calibri" pitchFamily="34" charset="0"/>
-                <a:ea typeface="Calibri" pitchFamily="34" charset="-122"/>
-                <a:cs typeface="Calibri" pitchFamily="34" charset="-120"/>
-              </a:rPr>
-              <a:t>④  </a:t>
-            </a:r>
-            <a:pPr algn="ctr" indent="0" marL="0">
-              <a:spcAft>
-                <a:spcPts val="800"/>
-              </a:spcAft>
-              <a:buNone/>
-            </a:pPr>
-            <a:r>
-              <a:rPr lang="en-US" sz="1600" b="1" dirty="0">
-                <a:solidFill>
-                  <a:srgbClr val="FFFFFF"/>
-                </a:solidFill>
-                <a:latin typeface="Calibri" pitchFamily="34" charset="0"/>
-                <a:ea typeface="Calibri" pitchFamily="34" charset="-122"/>
-                <a:cs typeface="Calibri" pitchFamily="34" charset="-120"/>
-              </a:rPr>
-              <a:t>Android  </a:t>
-            </a:r>
-            <a:pPr algn="ctr" indent="0" marL="0">
-              <a:spcAft>
-                <a:spcPts val="800"/>
-              </a:spcAft>
-              <a:buNone/>
-            </a:pPr>
-            <a:r>
-              <a:rPr lang="en-US" sz="1600" dirty="0">
-                <a:solidFill>
-                  <a:srgbClr val="CADCFC"/>
-                </a:solidFill>
-                <a:latin typeface="Calibri" pitchFamily="34" charset="0"/>
-                <a:ea typeface="Calibri" pitchFamily="34" charset="-122"/>
-                <a:cs typeface="Calibri" pitchFamily="34" charset="-120"/>
-              </a:rPr>
-              <a:t>— lista, detalle, incidencia.</a:t>
-            </a:r>
-            <a:endParaRPr lang="en-US" sz="1600" dirty="0"/>
-          </a:p>
-        </p:txBody>
-      </p:sp>
-      <p:sp>
-        <p:nvSpPr>
-          <p:cNvPr id="6" name="Text 4"/>
-          <p:cNvSpPr/>
-          <p:nvPr/>
-        </p:nvSpPr>
-        <p:spPr>
-          <a:xfrm>
-            <a:off x="457200" y="5852160"/>
-            <a:ext cx="11277295" cy="365760"/>
-          </a:xfrm>
-          <a:prstGeom prst="rect">
-            <a:avLst/>
-          </a:prstGeom>
-          <a:noFill/>
-          <a:ln/>
-        </p:spPr>
-        <p:txBody>
-          <a:bodyPr wrap="square" rtlCol="0" anchor="ctr"/>
-          <a:lstStyle/>
-          <a:p>
-            <a:pPr algn="ctr" indent="0" marL="0">
-              <a:buNone/>
-            </a:pPr>
-            <a:r>
-              <a:rPr lang="en-US" sz="1200" i="1" dirty="0">
-                <a:solidFill>
-                  <a:srgbClr val="CADCFC"/>
-                </a:solidFill>
-                <a:latin typeface="Calibri" pitchFamily="34" charset="0"/>
-                <a:ea typeface="Calibri" pitchFamily="34" charset="-122"/>
-                <a:cs typeface="Calibri" pitchFamily="34" charset="-120"/>
-              </a:rPr>
-              <a:t>Plan B: capturas en las slides anteriores.</a:t>
+                <a:latin typeface="Consolas" pitchFamily="34" charset="0"/>
+                <a:ea typeface="Consolas" pitchFamily="34" charset="-122"/>
+                <a:cs typeface="Consolas" pitchFamily="34" charset="-120"/>
+              </a:rPr>
+              <a:t>tfgdam-production.up.railway.app/api/health</a:t>
             </a:r>
             <a:endParaRPr lang="en-US" sz="1200" dirty="0"/>
           </a:p>
@@ -7373,7 +7283,7 @@
                 <a:ea typeface="Calibri" pitchFamily="34" charset="-122"/>
                 <a:cs typeface="Calibri" pitchFamily="34" charset="-120"/>
               </a:rPr>
-              <a:t>CIERRE</a:t>
+              <a:t>CALIDAD &amp; RESULTADOS</a:t>
             </a:r>
             <a:endParaRPr lang="en-US" sz="1000" dirty="0"/>
           </a:p>
@@ -7412,7 +7322,7 @@
                 <a:ea typeface="Calibri" pitchFamily="34" charset="-122"/>
                 <a:cs typeface="Calibri" pitchFamily="34" charset="-120"/>
               </a:rPr>
-              <a:t>Conclusiones y mejoras futuras</a:t>
+              <a:t>Pruebas, métricas y entregables</a:t>
             </a:r>
             <a:endParaRPr lang="en-US" sz="3200" dirty="0"/>
           </a:p>
@@ -7451,8 +7361,8 @@
         </p:nvSpPr>
         <p:spPr>
           <a:xfrm>
-            <a:off x="548640" y="1417320"/>
-            <a:ext cx="5577840" cy="4709160"/>
+            <a:off x="357988" y="1463040"/>
+            <a:ext cx="2697480" cy="1554480"/>
           </a:xfrm>
           <a:prstGeom prst="rect">
             <a:avLst/>
@@ -7476,7 +7386,519 @@
         </p:nvSpPr>
         <p:spPr>
           <a:xfrm>
-            <a:off x="548640" y="1417320"/>
+            <a:off x="357988" y="2944368"/>
+            <a:ext cx="2697480" cy="73152"/>
+          </a:xfrm>
+          <a:prstGeom prst="rect">
+            <a:avLst/>
+          </a:prstGeom>
+          <a:solidFill>
+            <a:srgbClr val="C68A2E"/>
+          </a:solidFill>
+          <a:ln w="12700">
+            <a:solidFill>
+              <a:srgbClr val="C68A2E"/>
+            </a:solidFill>
+            <a:prstDash val="solid"/>
+          </a:ln>
+        </p:spPr>
+      </p:sp>
+      <p:sp>
+        <p:nvSpPr>
+          <p:cNvPr id="7" name="Text 5"/>
+          <p:cNvSpPr/>
+          <p:nvPr/>
+        </p:nvSpPr>
+        <p:spPr>
+          <a:xfrm>
+            <a:off x="357988" y="1600200"/>
+            <a:ext cx="2697480" cy="868680"/>
+          </a:xfrm>
+          <a:prstGeom prst="rect">
+            <a:avLst/>
+          </a:prstGeom>
+          <a:noFill/>
+          <a:ln/>
+        </p:spPr>
+        <p:txBody>
+          <a:bodyPr wrap="square" rtlCol="0" anchor="ctr"/>
+          <a:lstStyle/>
+          <a:p>
+            <a:pPr algn="ctr" indent="0" marL="0">
+              <a:buNone/>
+            </a:pPr>
+            <a:r>
+              <a:rPr lang="en-US" sz="4400" b="1" dirty="0">
+                <a:solidFill>
+                  <a:srgbClr val="1E2761"/>
+                </a:solidFill>
+                <a:latin typeface="Calibri" pitchFamily="34" charset="0"/>
+                <a:ea typeface="Calibri" pitchFamily="34" charset="-122"/>
+                <a:cs typeface="Calibri" pitchFamily="34" charset="-120"/>
+              </a:rPr>
+              <a:t>500</a:t>
+            </a:r>
+            <a:endParaRPr lang="en-US" sz="4400" dirty="0"/>
+          </a:p>
+        </p:txBody>
+      </p:sp>
+      <p:sp>
+        <p:nvSpPr>
+          <p:cNvPr id="8" name="Text 6"/>
+          <p:cNvSpPr/>
+          <p:nvPr/>
+        </p:nvSpPr>
+        <p:spPr>
+          <a:xfrm>
+            <a:off x="495148" y="2468880"/>
+            <a:ext cx="2423160" cy="457200"/>
+          </a:xfrm>
+          <a:prstGeom prst="rect">
+            <a:avLst/>
+          </a:prstGeom>
+          <a:noFill/>
+          <a:ln/>
+        </p:spPr>
+        <p:txBody>
+          <a:bodyPr wrap="square" rtlCol="0" anchor="ctr"/>
+          <a:lstStyle/>
+          <a:p>
+            <a:pPr algn="ctr" indent="0" marL="0">
+              <a:buNone/>
+            </a:pPr>
+            <a:r>
+              <a:rPr lang="en-US" sz="1200" dirty="0">
+                <a:solidFill>
+                  <a:srgbClr val="6B7280"/>
+                </a:solidFill>
+                <a:latin typeface="Calibri" pitchFamily="34" charset="0"/>
+                <a:ea typeface="Calibri" pitchFamily="34" charset="-122"/>
+                <a:cs typeface="Calibri" pitchFamily="34" charset="-120"/>
+              </a:rPr>
+              <a:t>productos · catálogo seed</a:t>
+            </a:r>
+            <a:endParaRPr lang="en-US" sz="1200" dirty="0"/>
+          </a:p>
+        </p:txBody>
+      </p:sp>
+      <p:sp>
+        <p:nvSpPr>
+          <p:cNvPr id="9" name="Shape 7"/>
+          <p:cNvSpPr/>
+          <p:nvPr/>
+        </p:nvSpPr>
+        <p:spPr>
+          <a:xfrm>
+            <a:off x="3284068" y="1463040"/>
+            <a:ext cx="2697480" cy="1554480"/>
+          </a:xfrm>
+          <a:prstGeom prst="rect">
+            <a:avLst/>
+          </a:prstGeom>
+          <a:solidFill>
+            <a:srgbClr val="F8FAFC"/>
+          </a:solidFill>
+          <a:ln w="12700">
+            <a:solidFill>
+              <a:srgbClr val="E5E7EB"/>
+            </a:solidFill>
+            <a:prstDash val="solid"/>
+          </a:ln>
+        </p:spPr>
+      </p:sp>
+      <p:sp>
+        <p:nvSpPr>
+          <p:cNvPr id="10" name="Shape 8"/>
+          <p:cNvSpPr/>
+          <p:nvPr/>
+        </p:nvSpPr>
+        <p:spPr>
+          <a:xfrm>
+            <a:off x="3284068" y="2944368"/>
+            <a:ext cx="2697480" cy="73152"/>
+          </a:xfrm>
+          <a:prstGeom prst="rect">
+            <a:avLst/>
+          </a:prstGeom>
+          <a:solidFill>
+            <a:srgbClr val="C68A2E"/>
+          </a:solidFill>
+          <a:ln w="12700">
+            <a:solidFill>
+              <a:srgbClr val="C68A2E"/>
+            </a:solidFill>
+            <a:prstDash val="solid"/>
+          </a:ln>
+        </p:spPr>
+      </p:sp>
+      <p:sp>
+        <p:nvSpPr>
+          <p:cNvPr id="11" name="Text 9"/>
+          <p:cNvSpPr/>
+          <p:nvPr/>
+        </p:nvSpPr>
+        <p:spPr>
+          <a:xfrm>
+            <a:off x="3284068" y="1600200"/>
+            <a:ext cx="2697480" cy="868680"/>
+          </a:xfrm>
+          <a:prstGeom prst="rect">
+            <a:avLst/>
+          </a:prstGeom>
+          <a:noFill/>
+          <a:ln/>
+        </p:spPr>
+        <p:txBody>
+          <a:bodyPr wrap="square" rtlCol="0" anchor="ctr"/>
+          <a:lstStyle/>
+          <a:p>
+            <a:pPr algn="ctr" indent="0" marL="0">
+              <a:buNone/>
+            </a:pPr>
+            <a:r>
+              <a:rPr lang="en-US" sz="4400" b="1" dirty="0">
+                <a:solidFill>
+                  <a:srgbClr val="1E2761"/>
+                </a:solidFill>
+                <a:latin typeface="Calibri" pitchFamily="34" charset="0"/>
+                <a:ea typeface="Calibri" pitchFamily="34" charset="-122"/>
+                <a:cs typeface="Calibri" pitchFamily="34" charset="-120"/>
+              </a:rPr>
+              <a:t>&lt; 200 ms</a:t>
+            </a:r>
+            <a:endParaRPr lang="en-US" sz="4400" dirty="0"/>
+          </a:p>
+        </p:txBody>
+      </p:sp>
+      <p:sp>
+        <p:nvSpPr>
+          <p:cNvPr id="12" name="Text 10"/>
+          <p:cNvSpPr/>
+          <p:nvPr/>
+        </p:nvSpPr>
+        <p:spPr>
+          <a:xfrm>
+            <a:off x="3421228" y="2468880"/>
+            <a:ext cx="2423160" cy="457200"/>
+          </a:xfrm>
+          <a:prstGeom prst="rect">
+            <a:avLst/>
+          </a:prstGeom>
+          <a:noFill/>
+          <a:ln/>
+        </p:spPr>
+        <p:txBody>
+          <a:bodyPr wrap="square" rtlCol="0" anchor="ctr"/>
+          <a:lstStyle/>
+          <a:p>
+            <a:pPr algn="ctr" indent="0" marL="0">
+              <a:buNone/>
+            </a:pPr>
+            <a:r>
+              <a:rPr lang="en-US" sz="1200" dirty="0">
+                <a:solidFill>
+                  <a:srgbClr val="6B7280"/>
+                </a:solidFill>
+                <a:latin typeface="Calibri" pitchFamily="34" charset="0"/>
+                <a:ea typeface="Calibri" pitchFamily="34" charset="-122"/>
+                <a:cs typeface="Calibri" pitchFamily="34" charset="-120"/>
+              </a:rPr>
+              <a:t>listado catálogo</a:t>
+            </a:r>
+            <a:endParaRPr lang="en-US" sz="1200" dirty="0"/>
+          </a:p>
+        </p:txBody>
+      </p:sp>
+      <p:sp>
+        <p:nvSpPr>
+          <p:cNvPr id="13" name="Shape 11"/>
+          <p:cNvSpPr/>
+          <p:nvPr/>
+        </p:nvSpPr>
+        <p:spPr>
+          <a:xfrm>
+            <a:off x="6210148" y="1463040"/>
+            <a:ext cx="2697480" cy="1554480"/>
+          </a:xfrm>
+          <a:prstGeom prst="rect">
+            <a:avLst/>
+          </a:prstGeom>
+          <a:solidFill>
+            <a:srgbClr val="F8FAFC"/>
+          </a:solidFill>
+          <a:ln w="12700">
+            <a:solidFill>
+              <a:srgbClr val="E5E7EB"/>
+            </a:solidFill>
+            <a:prstDash val="solid"/>
+          </a:ln>
+        </p:spPr>
+      </p:sp>
+      <p:sp>
+        <p:nvSpPr>
+          <p:cNvPr id="14" name="Shape 12"/>
+          <p:cNvSpPr/>
+          <p:nvPr/>
+        </p:nvSpPr>
+        <p:spPr>
+          <a:xfrm>
+            <a:off x="6210148" y="2944368"/>
+            <a:ext cx="2697480" cy="73152"/>
+          </a:xfrm>
+          <a:prstGeom prst="rect">
+            <a:avLst/>
+          </a:prstGeom>
+          <a:solidFill>
+            <a:srgbClr val="C68A2E"/>
+          </a:solidFill>
+          <a:ln w="12700">
+            <a:solidFill>
+              <a:srgbClr val="C68A2E"/>
+            </a:solidFill>
+            <a:prstDash val="solid"/>
+          </a:ln>
+        </p:spPr>
+      </p:sp>
+      <p:sp>
+        <p:nvSpPr>
+          <p:cNvPr id="15" name="Text 13"/>
+          <p:cNvSpPr/>
+          <p:nvPr/>
+        </p:nvSpPr>
+        <p:spPr>
+          <a:xfrm>
+            <a:off x="6210148" y="1600200"/>
+            <a:ext cx="2697480" cy="868680"/>
+          </a:xfrm>
+          <a:prstGeom prst="rect">
+            <a:avLst/>
+          </a:prstGeom>
+          <a:noFill/>
+          <a:ln/>
+        </p:spPr>
+        <p:txBody>
+          <a:bodyPr wrap="square" rtlCol="0" anchor="ctr"/>
+          <a:lstStyle/>
+          <a:p>
+            <a:pPr algn="ctr" indent="0" marL="0">
+              <a:buNone/>
+            </a:pPr>
+            <a:r>
+              <a:rPr lang="en-US" sz="4400" b="1" dirty="0">
+                <a:solidFill>
+                  <a:srgbClr val="1E2761"/>
+                </a:solidFill>
+                <a:latin typeface="Calibri" pitchFamily="34" charset="0"/>
+                <a:ea typeface="Calibri" pitchFamily="34" charset="-122"/>
+                <a:cs typeface="Calibri" pitchFamily="34" charset="-120"/>
+              </a:rPr>
+              <a:t>3</a:t>
+            </a:r>
+            <a:endParaRPr lang="en-US" sz="4400" dirty="0"/>
+          </a:p>
+        </p:txBody>
+      </p:sp>
+      <p:sp>
+        <p:nvSpPr>
+          <p:cNvPr id="16" name="Text 14"/>
+          <p:cNvSpPr/>
+          <p:nvPr/>
+        </p:nvSpPr>
+        <p:spPr>
+          <a:xfrm>
+            <a:off x="6347308" y="2468880"/>
+            <a:ext cx="2423160" cy="457200"/>
+          </a:xfrm>
+          <a:prstGeom prst="rect">
+            <a:avLst/>
+          </a:prstGeom>
+          <a:noFill/>
+          <a:ln/>
+        </p:spPr>
+        <p:txBody>
+          <a:bodyPr wrap="square" rtlCol="0" anchor="ctr"/>
+          <a:lstStyle/>
+          <a:p>
+            <a:pPr algn="ctr" indent="0" marL="0">
+              <a:buNone/>
+            </a:pPr>
+            <a:r>
+              <a:rPr lang="en-US" sz="1200" dirty="0">
+                <a:solidFill>
+                  <a:srgbClr val="6B7280"/>
+                </a:solidFill>
+                <a:latin typeface="Calibri" pitchFamily="34" charset="0"/>
+                <a:ea typeface="Calibri" pitchFamily="34" charset="-122"/>
+                <a:cs typeface="Calibri" pitchFamily="34" charset="-120"/>
+              </a:rPr>
+              <a:t>roles · auth por capas</a:t>
+            </a:r>
+            <a:endParaRPr lang="en-US" sz="1200" dirty="0"/>
+          </a:p>
+        </p:txBody>
+      </p:sp>
+      <p:sp>
+        <p:nvSpPr>
+          <p:cNvPr id="17" name="Shape 15"/>
+          <p:cNvSpPr/>
+          <p:nvPr/>
+        </p:nvSpPr>
+        <p:spPr>
+          <a:xfrm>
+            <a:off x="9136228" y="1463040"/>
+            <a:ext cx="2697480" cy="1554480"/>
+          </a:xfrm>
+          <a:prstGeom prst="rect">
+            <a:avLst/>
+          </a:prstGeom>
+          <a:solidFill>
+            <a:srgbClr val="F8FAFC"/>
+          </a:solidFill>
+          <a:ln w="12700">
+            <a:solidFill>
+              <a:srgbClr val="E5E7EB"/>
+            </a:solidFill>
+            <a:prstDash val="solid"/>
+          </a:ln>
+        </p:spPr>
+      </p:sp>
+      <p:sp>
+        <p:nvSpPr>
+          <p:cNvPr id="18" name="Shape 16"/>
+          <p:cNvSpPr/>
+          <p:nvPr/>
+        </p:nvSpPr>
+        <p:spPr>
+          <a:xfrm>
+            <a:off x="9136228" y="2944368"/>
+            <a:ext cx="2697480" cy="73152"/>
+          </a:xfrm>
+          <a:prstGeom prst="rect">
+            <a:avLst/>
+          </a:prstGeom>
+          <a:solidFill>
+            <a:srgbClr val="C68A2E"/>
+          </a:solidFill>
+          <a:ln w="12700">
+            <a:solidFill>
+              <a:srgbClr val="C68A2E"/>
+            </a:solidFill>
+            <a:prstDash val="solid"/>
+          </a:ln>
+        </p:spPr>
+      </p:sp>
+      <p:sp>
+        <p:nvSpPr>
+          <p:cNvPr id="19" name="Text 17"/>
+          <p:cNvSpPr/>
+          <p:nvPr/>
+        </p:nvSpPr>
+        <p:spPr>
+          <a:xfrm>
+            <a:off x="9136228" y="1600200"/>
+            <a:ext cx="2697480" cy="868680"/>
+          </a:xfrm>
+          <a:prstGeom prst="rect">
+            <a:avLst/>
+          </a:prstGeom>
+          <a:noFill/>
+          <a:ln/>
+        </p:spPr>
+        <p:txBody>
+          <a:bodyPr wrap="square" rtlCol="0" anchor="ctr"/>
+          <a:lstStyle/>
+          <a:p>
+            <a:pPr algn="ctr" indent="0" marL="0">
+              <a:buNone/>
+            </a:pPr>
+            <a:r>
+              <a:rPr lang="en-US" sz="4400" b="1" dirty="0">
+                <a:solidFill>
+                  <a:srgbClr val="1E2761"/>
+                </a:solidFill>
+                <a:latin typeface="Calibri" pitchFamily="34" charset="0"/>
+                <a:ea typeface="Calibri" pitchFamily="34" charset="-122"/>
+                <a:cs typeface="Calibri" pitchFamily="34" charset="-120"/>
+              </a:rPr>
+              <a:t>3</a:t>
+            </a:r>
+            <a:endParaRPr lang="en-US" sz="4400" dirty="0"/>
+          </a:p>
+        </p:txBody>
+      </p:sp>
+      <p:sp>
+        <p:nvSpPr>
+          <p:cNvPr id="20" name="Text 18"/>
+          <p:cNvSpPr/>
+          <p:nvPr/>
+        </p:nvSpPr>
+        <p:spPr>
+          <a:xfrm>
+            <a:off x="9273388" y="2468880"/>
+            <a:ext cx="2423160" cy="457200"/>
+          </a:xfrm>
+          <a:prstGeom prst="rect">
+            <a:avLst/>
+          </a:prstGeom>
+          <a:noFill/>
+          <a:ln/>
+        </p:spPr>
+        <p:txBody>
+          <a:bodyPr wrap="square" rtlCol="0" anchor="ctr"/>
+          <a:lstStyle/>
+          <a:p>
+            <a:pPr algn="ctr" indent="0" marL="0">
+              <a:buNone/>
+            </a:pPr>
+            <a:r>
+              <a:rPr lang="en-US" sz="1200" dirty="0">
+                <a:solidFill>
+                  <a:srgbClr val="6B7280"/>
+                </a:solidFill>
+                <a:latin typeface="Calibri" pitchFamily="34" charset="0"/>
+                <a:ea typeface="Calibri" pitchFamily="34" charset="-122"/>
+                <a:cs typeface="Calibri" pitchFamily="34" charset="-120"/>
+              </a:rPr>
+              <a:t>suites Vitest sobre flujos críticos</a:t>
+            </a:r>
+            <a:endParaRPr lang="en-US" sz="1200" dirty="0"/>
+          </a:p>
+        </p:txBody>
+      </p:sp>
+      <p:sp>
+        <p:nvSpPr>
+          <p:cNvPr id="21" name="Shape 19"/>
+          <p:cNvSpPr/>
+          <p:nvPr/>
+        </p:nvSpPr>
+        <p:spPr>
+          <a:xfrm>
+            <a:off x="548640" y="3291840"/>
+            <a:ext cx="5577840" cy="2834640"/>
+          </a:xfrm>
+          <a:prstGeom prst="rect">
+            <a:avLst/>
+          </a:prstGeom>
+          <a:solidFill>
+            <a:srgbClr val="F8FAFC"/>
+          </a:solidFill>
+          <a:ln w="12700">
+            <a:solidFill>
+              <a:srgbClr val="E5E7EB"/>
+            </a:solidFill>
+            <a:prstDash val="solid"/>
+          </a:ln>
+        </p:spPr>
+      </p:sp>
+      <p:sp>
+        <p:nvSpPr>
+          <p:cNvPr id="22" name="Shape 20"/>
+          <p:cNvSpPr/>
+          <p:nvPr/>
+        </p:nvSpPr>
+        <p:spPr>
+          <a:xfrm>
+            <a:off x="548640" y="3291840"/>
             <a:ext cx="5577840" cy="411480"/>
           </a:xfrm>
           <a:prstGeom prst="rect">
@@ -7495,13 +7917,13 @@
       </p:sp>
       <p:sp>
         <p:nvSpPr>
-          <p:cNvPr id="7" name="Text 5"/>
-          <p:cNvSpPr/>
-          <p:nvPr/>
-        </p:nvSpPr>
-        <p:spPr>
-          <a:xfrm>
-            <a:off x="731520" y="1463040"/>
+          <p:cNvPr id="23" name="Text 21"/>
+          <p:cNvSpPr/>
+          <p:nvPr/>
+        </p:nvSpPr>
+        <p:spPr>
+          <a:xfrm>
+            <a:off x="731520" y="3337560"/>
             <a:ext cx="4572000" cy="320040"/>
           </a:xfrm>
           <a:prstGeom prst="rect">
@@ -7523,7 +7945,7 @@
                   <a:srgbClr val="FFFFFF"/>
                 </a:solidFill>
               </a:rPr>
-              <a:t>Objetivos cumplidos</a:t>
+              <a:t>Tests automatizados</a:t>
             </a:r>
             <a:endParaRPr lang="en-US" sz="1400" dirty="0"/>
           </a:p>
@@ -7531,14 +7953,14 @@
       </p:sp>
       <p:sp>
         <p:nvSpPr>
-          <p:cNvPr id="8" name="Text 6"/>
-          <p:cNvSpPr/>
-          <p:nvPr/>
-        </p:nvSpPr>
-        <p:spPr>
-          <a:xfrm>
-            <a:off x="777240" y="1965960"/>
-            <a:ext cx="5166360" cy="4023360"/>
+          <p:cNvPr id="24" name="Text 22"/>
+          <p:cNvSpPr/>
+          <p:nvPr/>
+        </p:nvSpPr>
+        <p:spPr>
+          <a:xfrm>
+            <a:off x="731520" y="3794760"/>
+            <a:ext cx="5212080" cy="2194560"/>
           </a:xfrm>
           <a:prstGeom prst="rect">
             <a:avLst/>
@@ -7552,123 +7974,87 @@
           <a:p>
             <a:pPr marL="342900" indent="-342900">
               <a:spcAft>
-                <a:spcPts val="800"/>
+                <a:spcPts val="600"/>
               </a:spcAft>
               <a:buSzPct val="100000"/>
-              <a:buChar char="✓"/>
-            </a:pPr>
-            <a:r>
-              <a:rPr lang="en-US" sz="1400" dirty="0">
+              <a:buChar char="■"/>
+            </a:pPr>
+            <a:r>
+              <a:rPr lang="en-US" sz="1300" dirty="0">
                 <a:solidFill>
                   <a:srgbClr val="1F2937"/>
                 </a:solidFill>
               </a:rPr>
-              <a:t>API REST con JWT y control por roles.</a:t>
-            </a:r>
-            <a:endParaRPr lang="en-US" sz="1400" dirty="0"/>
+              <a:t>auth.test.js — registro, login, JWT, rate limit.</a:t>
+            </a:r>
+            <a:endParaRPr lang="en-US" sz="1300" dirty="0"/>
           </a:p>
           <a:p>
             <a:pPr marL="342900" indent="-342900">
               <a:spcAft>
-                <a:spcPts val="800"/>
+                <a:spcPts val="600"/>
               </a:spcAft>
               <a:buSzPct val="100000"/>
-              <a:buChar char="✓"/>
-            </a:pPr>
-            <a:r>
-              <a:rPr lang="en-US" sz="1400" dirty="0">
+              <a:buChar char="■"/>
+            </a:pPr>
+            <a:r>
+              <a:rPr lang="en-US" sz="1300" dirty="0">
                 <a:solidFill>
                   <a:srgbClr val="1F2937"/>
                 </a:solidFill>
               </a:rPr>
-              <a:t>Reservas concurrentes consistentes (FOR UPDATE).</a:t>
-            </a:r>
-            <a:endParaRPr lang="en-US" sz="1400" dirty="0"/>
+              <a:t>productos.test.js — CRUD, filtros, paginación, roles.</a:t>
+            </a:r>
+            <a:endParaRPr lang="en-US" sz="1300" dirty="0"/>
           </a:p>
           <a:p>
             <a:pPr marL="342900" indent="-342900">
               <a:spcAft>
-                <a:spcPts val="800"/>
+                <a:spcPts val="600"/>
               </a:spcAft>
               <a:buSzPct val="100000"/>
-              <a:buChar char="✓"/>
-            </a:pPr>
-            <a:r>
-              <a:rPr lang="en-US" sz="1400" dirty="0">
+              <a:buChar char="■"/>
+            </a:pPr>
+            <a:r>
+              <a:rPr lang="en-US" sz="1300" dirty="0">
                 <a:solidFill>
                   <a:srgbClr val="1F2937"/>
                 </a:solidFill>
               </a:rPr>
-              <a:t>Frontend SPA instalable como PWA, modo oscuro.</a:t>
-            </a:r>
-            <a:endParaRPr lang="en-US" sz="1400" dirty="0"/>
+              <a:t>reservas.test.js — stock + CONCURRENCIA SIMULADA.</a:t>
+            </a:r>
+            <a:endParaRPr lang="en-US" sz="1300" dirty="0"/>
           </a:p>
           <a:p>
             <a:pPr marL="342900" indent="-342900">
               <a:spcAft>
-                <a:spcPts val="800"/>
+                <a:spcPts val="600"/>
               </a:spcAft>
               <a:buSzPct val="100000"/>
-              <a:buChar char="✓"/>
-            </a:pPr>
-            <a:r>
-              <a:rPr lang="en-US" sz="1400" dirty="0">
+              <a:buChar char="■"/>
+            </a:pPr>
+            <a:r>
+              <a:rPr lang="en-US" sz="1300" dirty="0">
                 <a:solidFill>
                   <a:srgbClr val="1F2937"/>
                 </a:solidFill>
               </a:rPr>
-              <a:t>App Android nativa funcional para el operario.</a:t>
-            </a:r>
-            <a:endParaRPr lang="en-US" sz="1400" dirty="0"/>
-          </a:p>
-          <a:p>
-            <a:pPr marL="342900" indent="-342900">
-              <a:spcAft>
-                <a:spcPts val="800"/>
-              </a:spcAft>
-              <a:buSzPct val="100000"/>
-              <a:buChar char="✓"/>
-            </a:pPr>
-            <a:r>
-              <a:rPr lang="en-US" sz="1400" dirty="0">
-                <a:solidFill>
-                  <a:srgbClr val="1F2937"/>
-                </a:solidFill>
-              </a:rPr>
-              <a:t>Despliegue cloud público con HTTPS.</a:t>
-            </a:r>
-            <a:endParaRPr lang="en-US" sz="1400" dirty="0"/>
-          </a:p>
-          <a:p>
-            <a:pPr marL="342900" indent="-342900">
-              <a:spcAft>
-                <a:spcPts val="800"/>
-              </a:spcAft>
-              <a:buSzPct val="100000"/>
-              <a:buChar char="✓"/>
-            </a:pPr>
-            <a:r>
-              <a:rPr lang="en-US" sz="1400" dirty="0">
-                <a:solidFill>
-                  <a:srgbClr val="1F2937"/>
-                </a:solidFill>
-              </a:rPr>
-              <a:t>Tests automatizados sobre flujos críticos.</a:t>
-            </a:r>
-            <a:endParaRPr lang="en-US" sz="1400" dirty="0"/>
-          </a:p>
-        </p:txBody>
-      </p:sp>
-      <p:sp>
-        <p:nvSpPr>
-          <p:cNvPr id="9" name="Shape 7"/>
-          <p:cNvSpPr/>
-          <p:nvPr/>
-        </p:nvSpPr>
-        <p:spPr>
-          <a:xfrm>
-            <a:off x="6263640" y="1417320"/>
-            <a:ext cx="5379415" cy="4709160"/>
+              <a:t>Stack: Vitest + Supertest contra BD real.</a:t>
+            </a:r>
+            <a:endParaRPr lang="en-US" sz="1300" dirty="0"/>
+          </a:p>
+        </p:txBody>
+      </p:sp>
+      <p:sp>
+        <p:nvSpPr>
+          <p:cNvPr id="25" name="Shape 23"/>
+          <p:cNvSpPr/>
+          <p:nvPr/>
+        </p:nvSpPr>
+        <p:spPr>
+          <a:xfrm>
+            <a:off x="6263640" y="3291840"/>
+            <a:ext cx="5379415" cy="2834640"/>
           </a:xfrm>
           <a:prstGeom prst="rect">
             <a:avLst/>
@@ -7686,24 +8072,24 @@
       </p:sp>
       <p:sp>
         <p:nvSpPr>
-          <p:cNvPr id="10" name="Shape 8"/>
-          <p:cNvSpPr/>
-          <p:nvPr/>
-        </p:nvSpPr>
-        <p:spPr>
-          <a:xfrm>
-            <a:off x="6263640" y="1417320"/>
+          <p:cNvPr id="26" name="Shape 24"/>
+          <p:cNvSpPr/>
+          <p:nvPr/>
+        </p:nvSpPr>
+        <p:spPr>
+          <a:xfrm>
+            <a:off x="6263640" y="3291840"/>
             <a:ext cx="5379415" cy="411480"/>
           </a:xfrm>
           <a:prstGeom prst="rect">
             <a:avLst/>
           </a:prstGeom>
           <a:solidFill>
-            <a:srgbClr val="C68A2E"/>
+            <a:srgbClr val="1E2761"/>
           </a:solidFill>
           <a:ln w="12700">
             <a:solidFill>
-              <a:srgbClr val="C68A2E"/>
+              <a:srgbClr val="1E2761"/>
             </a:solidFill>
             <a:prstDash val="solid"/>
           </a:ln>
@@ -7711,13 +8097,13 @@
       </p:sp>
       <p:sp>
         <p:nvSpPr>
-          <p:cNvPr id="11" name="Text 9"/>
-          <p:cNvSpPr/>
-          <p:nvPr/>
-        </p:nvSpPr>
-        <p:spPr>
-          <a:xfrm>
-            <a:off x="6446520" y="1463040"/>
+          <p:cNvPr id="27" name="Text 25"/>
+          <p:cNvSpPr/>
+          <p:nvPr/>
+        </p:nvSpPr>
+        <p:spPr>
+          <a:xfrm>
+            <a:off x="6446520" y="3337560"/>
             <a:ext cx="4572000" cy="320040"/>
           </a:xfrm>
           <a:prstGeom prst="rect">
@@ -7739,7 +8125,7 @@
                   <a:srgbClr val="FFFFFF"/>
                 </a:solidFill>
               </a:rPr>
-              <a:t>Mejoras futuras</a:t>
+              <a:t>Funcionalidades entregadas</a:t>
             </a:r>
             <a:endParaRPr lang="en-US" sz="1400" dirty="0"/>
           </a:p>
@@ -7747,14 +8133,14 @@
       </p:sp>
       <p:sp>
         <p:nvSpPr>
-          <p:cNvPr id="12" name="Text 10"/>
-          <p:cNvSpPr/>
-          <p:nvPr/>
-        </p:nvSpPr>
-        <p:spPr>
-          <a:xfrm>
-            <a:off x="6492240" y="1965960"/>
-            <a:ext cx="5150815" cy="4023360"/>
+          <p:cNvPr id="28" name="Text 26"/>
+          <p:cNvSpPr/>
+          <p:nvPr/>
+        </p:nvSpPr>
+        <p:spPr>
+          <a:xfrm>
+            <a:off x="6446520" y="3794760"/>
+            <a:ext cx="5013655" cy="2194560"/>
           </a:xfrm>
           <a:prstGeom prst="rect">
             <a:avLst/>
@@ -7768,128 +8154,74 @@
           <a:p>
             <a:pPr marL="342900" indent="-342900">
               <a:spcAft>
-                <a:spcPts val="800"/>
+                <a:spcPts val="600"/>
               </a:spcAft>
               <a:buSzPct val="100000"/>
-              <a:buChar char="▸"/>
-            </a:pPr>
-            <a:r>
-              <a:rPr lang="en-US" sz="1400" dirty="0">
+              <a:buChar char="■"/>
+            </a:pPr>
+            <a:r>
+              <a:rPr lang="en-US" sz="1300" dirty="0">
                 <a:solidFill>
                   <a:srgbClr val="1F2937"/>
                 </a:solidFill>
               </a:rPr>
-              <a:t>Documentación OpenAPI / Swagger.</a:t>
-            </a:r>
-            <a:endParaRPr lang="en-US" sz="1400" dirty="0"/>
+              <a:t>Dashboard de KPIs agregados.</a:t>
+            </a:r>
+            <a:endParaRPr lang="en-US" sz="1300" dirty="0"/>
           </a:p>
           <a:p>
             <a:pPr marL="342900" indent="-342900">
               <a:spcAft>
-                <a:spcPts val="800"/>
+                <a:spcPts val="600"/>
               </a:spcAft>
               <a:buSzPct val="100000"/>
-              <a:buChar char="▸"/>
-            </a:pPr>
-            <a:r>
-              <a:rPr lang="en-US" sz="1400" dirty="0">
+              <a:buChar char="■"/>
+            </a:pPr>
+            <a:r>
+              <a:rPr lang="en-US" sz="1300" dirty="0">
                 <a:solidFill>
                   <a:srgbClr val="1F2937"/>
                 </a:solidFill>
               </a:rPr>
-              <a:t>Validación centralizada con Zod.</a:t>
-            </a:r>
-            <a:endParaRPr lang="en-US" sz="1400" dirty="0"/>
+              <a:t>Importación y exportación CSV.</a:t>
+            </a:r>
+            <a:endParaRPr lang="en-US" sz="1300" dirty="0"/>
           </a:p>
           <a:p>
             <a:pPr marL="342900" indent="-342900">
               <a:spcAft>
-                <a:spcPts val="800"/>
+                <a:spcPts val="600"/>
               </a:spcAft>
               <a:buSzPct val="100000"/>
-              <a:buChar char="▸"/>
-            </a:pPr>
-            <a:r>
-              <a:rPr lang="en-US" sz="1400" dirty="0">
+              <a:buChar char="■"/>
+            </a:pPr>
+            <a:r>
+              <a:rPr lang="en-US" sz="1300" dirty="0">
                 <a:solidFill>
                   <a:srgbClr val="1F2937"/>
                 </a:solidFill>
               </a:rPr>
-              <a:t>Workflow formal en GitHub Actions.</a:t>
-            </a:r>
-            <a:endParaRPr lang="en-US" sz="1400" dirty="0"/>
+              <a:t>Albarán A4 imprimible al entregar.</a:t>
+            </a:r>
+            <a:endParaRPr lang="en-US" sz="1300" dirty="0"/>
           </a:p>
           <a:p>
             <a:pPr marL="342900" indent="-342900">
               <a:spcAft>
-                <a:spcPts val="800"/>
+                <a:spcPts val="600"/>
               </a:spcAft>
               <a:buSzPct val="100000"/>
-              <a:buChar char="▸"/>
-            </a:pPr>
-            <a:r>
-              <a:rPr lang="en-US" sz="1400" dirty="0">
+              <a:buChar char="■"/>
+            </a:pPr>
+            <a:r>
+              <a:rPr lang="en-US" sz="1300" dirty="0">
                 <a:solidFill>
                   <a:srgbClr val="1F2937"/>
                 </a:solidFill>
               </a:rPr>
-              <a:t>Escáner de código de barras (CameraX + ML Kit).</a:t>
-            </a:r>
-            <a:endParaRPr lang="en-US" sz="1400" dirty="0"/>
-          </a:p>
-          <a:p>
-            <a:pPr marL="342900" indent="-342900">
-              <a:spcAft>
-                <a:spcPts val="800"/>
-              </a:spcAft>
-              <a:buSzPct val="100000"/>
-              <a:buChar char="▸"/>
-            </a:pPr>
-            <a:r>
-              <a:rPr lang="en-US" sz="1400" dirty="0">
-                <a:solidFill>
-                  <a:srgbClr val="1F2937"/>
-                </a:solidFill>
-              </a:rPr>
-              <a:t>Cola offline con Room en la app Android.</a:t>
-            </a:r>
-            <a:endParaRPr lang="en-US" sz="1400" dirty="0"/>
-          </a:p>
-          <a:p>
-            <a:pPr marL="342900" indent="-342900">
-              <a:spcAft>
-                <a:spcPts val="800"/>
-              </a:spcAft>
-              <a:buSzPct val="100000"/>
-              <a:buChar char="▸"/>
-            </a:pPr>
-            <a:r>
-              <a:rPr lang="en-US" sz="1400" dirty="0">
-                <a:solidFill>
-                  <a:srgbClr val="1F2937"/>
-                </a:solidFill>
-              </a:rPr>
-              <a:t>BiometricPrompt antes de exponer la sesión.</a:t>
-            </a:r>
-            <a:endParaRPr lang="en-US" sz="1400" dirty="0"/>
-          </a:p>
-          <a:p>
-            <a:pPr marL="342900" indent="-342900">
-              <a:spcAft>
-                <a:spcPts val="800"/>
-              </a:spcAft>
-              <a:buSzPct val="100000"/>
-              <a:buChar char="▸"/>
-            </a:pPr>
-            <a:r>
-              <a:rPr lang="en-US" sz="1400" dirty="0">
-                <a:solidFill>
-                  <a:srgbClr val="1F2937"/>
-                </a:solidFill>
-              </a:rPr>
-              <a:t>Accesibilidad WCAG AA completa.</a:t>
-            </a:r>
-            <a:endParaRPr lang="en-US" sz="1400" dirty="0"/>
+              <a:t>Modo oscuro · instalador Windows · APK Android.</a:t>
+            </a:r>
+            <a:endParaRPr lang="en-US" sz="1300" dirty="0"/>
           </a:p>
         </p:txBody>
       </p:sp>
@@ -7904,6 +8236,988 @@
 <file path=ppt/slides/slide16.xml><?xml version="1.0" encoding="utf-8"?>
 <p:sld xmlns:a="http://schemas.openxmlformats.org/drawingml/2006/main" xmlns:r="http://schemas.openxmlformats.org/officeDocument/2006/relationships" xmlns:p="http://schemas.openxmlformats.org/presentationml/2006/main">
   <p:cSld name="Slide 16">
+    <p:bg>
+      <p:bgPr>
+        <a:solidFill>
+          <a:srgbClr val="141A47"/>
+        </a:solidFill>
+      </p:bgPr>
+    </p:bg>
+    <p:spTree>
+      <p:nvGrpSpPr>
+        <p:cNvPr id="1" name=""/>
+        <p:cNvGrpSpPr/>
+        <p:nvPr/>
+      </p:nvGrpSpPr>
+      <p:grpSpPr>
+        <a:xfrm>
+          <a:off x="0" y="0"/>
+          <a:ext cx="0" cy="0"/>
+          <a:chOff x="0" y="0"/>
+          <a:chExt cx="0" cy="0"/>
+        </a:xfrm>
+      </p:grpSpPr>
+      <p:sp>
+        <p:nvSpPr>
+          <p:cNvPr id="2" name="Shape 0"/>
+          <p:cNvSpPr/>
+          <p:nvPr/>
+        </p:nvSpPr>
+        <p:spPr>
+          <a:xfrm>
+            <a:off x="0" y="0"/>
+            <a:ext cx="12191695" cy="73152"/>
+          </a:xfrm>
+          <a:prstGeom prst="rect">
+            <a:avLst/>
+          </a:prstGeom>
+          <a:solidFill>
+            <a:srgbClr val="C68A2E"/>
+          </a:solidFill>
+          <a:ln w="12700">
+            <a:solidFill>
+              <a:srgbClr val="C68A2E"/>
+            </a:solidFill>
+            <a:prstDash val="solid"/>
+          </a:ln>
+        </p:spPr>
+      </p:sp>
+      <p:sp>
+        <p:nvSpPr>
+          <p:cNvPr id="3" name="Text 1"/>
+          <p:cNvSpPr/>
+          <p:nvPr/>
+        </p:nvSpPr>
+        <p:spPr>
+          <a:xfrm>
+            <a:off x="457200" y="1828800"/>
+            <a:ext cx="11277295" cy="457200"/>
+          </a:xfrm>
+          <a:prstGeom prst="rect">
+            <a:avLst/>
+          </a:prstGeom>
+          <a:noFill/>
+          <a:ln/>
+        </p:spPr>
+        <p:txBody>
+          <a:bodyPr wrap="square" rtlCol="0" anchor="ctr"/>
+          <a:lstStyle/>
+          <a:p>
+            <a:pPr algn="ctr" indent="0" marL="0">
+              <a:buNone/>
+            </a:pPr>
+            <a:r>
+              <a:rPr lang="en-US" sz="1400" b="1" spc="600" kern="0" dirty="0">
+                <a:solidFill>
+                  <a:srgbClr val="C68A2E"/>
+                </a:solidFill>
+                <a:latin typeface="Calibri" pitchFamily="34" charset="0"/>
+                <a:ea typeface="Calibri" pitchFamily="34" charset="-122"/>
+                <a:cs typeface="Calibri" pitchFamily="34" charset="-120"/>
+              </a:rPr>
+              <a:t>DEMO EN VIVO</a:t>
+            </a:r>
+            <a:endParaRPr lang="en-US" sz="1400" dirty="0"/>
+          </a:p>
+        </p:txBody>
+      </p:sp>
+      <p:sp>
+        <p:nvSpPr>
+          <p:cNvPr id="4" name="Text 2"/>
+          <p:cNvSpPr/>
+          <p:nvPr/>
+        </p:nvSpPr>
+        <p:spPr>
+          <a:xfrm>
+            <a:off x="457200" y="2377440"/>
+            <a:ext cx="11277295" cy="1097280"/>
+          </a:xfrm>
+          <a:prstGeom prst="rect">
+            <a:avLst/>
+          </a:prstGeom>
+          <a:noFill/>
+          <a:ln/>
+        </p:spPr>
+        <p:txBody>
+          <a:bodyPr wrap="square" rtlCol="0" anchor="ctr"/>
+          <a:lstStyle/>
+          <a:p>
+            <a:pPr algn="ctr" indent="0" marL="0">
+              <a:buNone/>
+            </a:pPr>
+            <a:r>
+              <a:rPr lang="en-US" sz="6400" b="1" dirty="0">
+                <a:solidFill>
+                  <a:srgbClr val="FFFFFF"/>
+                </a:solidFill>
+                <a:latin typeface="Calibri" pitchFamily="34" charset="0"/>
+                <a:ea typeface="Calibri" pitchFamily="34" charset="-122"/>
+                <a:cs typeface="Calibri" pitchFamily="34" charset="-120"/>
+              </a:rPr>
+              <a:t>2 — 3 minutos</a:t>
+            </a:r>
+            <a:endParaRPr lang="en-US" sz="6400" dirty="0"/>
+          </a:p>
+        </p:txBody>
+      </p:sp>
+      <p:sp>
+        <p:nvSpPr>
+          <p:cNvPr id="5" name="Text 3"/>
+          <p:cNvSpPr/>
+          <p:nvPr/>
+        </p:nvSpPr>
+        <p:spPr>
+          <a:xfrm>
+            <a:off x="1097280" y="3931920"/>
+            <a:ext cx="9997135" cy="1463040"/>
+          </a:xfrm>
+          <a:prstGeom prst="rect">
+            <a:avLst/>
+          </a:prstGeom>
+          <a:noFill/>
+          <a:ln/>
+        </p:spPr>
+        <p:txBody>
+          <a:bodyPr wrap="square" rtlCol="0" anchor="ctr"/>
+          <a:lstStyle/>
+          <a:p>
+            <a:pPr algn="ctr" indent="0" marL="0">
+              <a:spcAft>
+                <a:spcPts val="800"/>
+              </a:spcAft>
+              <a:buNone/>
+            </a:pPr>
+            <a:r>
+              <a:rPr lang="en-US" sz="1600" b="1" dirty="0">
+                <a:solidFill>
+                  <a:srgbClr val="C68A2E"/>
+                </a:solidFill>
+                <a:latin typeface="Calibri" pitchFamily="34" charset="0"/>
+                <a:ea typeface="Calibri" pitchFamily="34" charset="-122"/>
+                <a:cs typeface="Calibri" pitchFamily="34" charset="-120"/>
+              </a:rPr>
+              <a:t>①  </a:t>
+            </a:r>
+            <a:pPr algn="ctr" indent="0" marL="0">
+              <a:spcAft>
+                <a:spcPts val="800"/>
+              </a:spcAft>
+              <a:buNone/>
+            </a:pPr>
+            <a:r>
+              <a:rPr lang="en-US" sz="1600" b="1" dirty="0">
+                <a:solidFill>
+                  <a:srgbClr val="FFFFFF"/>
+                </a:solidFill>
+                <a:latin typeface="Calibri" pitchFamily="34" charset="0"/>
+                <a:ea typeface="Calibri" pitchFamily="34" charset="-122"/>
+                <a:cs typeface="Calibri" pitchFamily="34" charset="-120"/>
+              </a:rPr>
+              <a:t>Cliente  </a:t>
+            </a:r>
+            <a:pPr algn="ctr" indent="0" marL="0">
+              <a:spcAft>
+                <a:spcPts val="800"/>
+              </a:spcAft>
+              <a:buNone/>
+            </a:pPr>
+            <a:r>
+              <a:rPr lang="en-US" sz="1600" dirty="0">
+                <a:solidFill>
+                  <a:srgbClr val="CADCFC"/>
+                </a:solidFill>
+                <a:latin typeface="Calibri" pitchFamily="34" charset="0"/>
+                <a:ea typeface="Calibri" pitchFamily="34" charset="-122"/>
+                <a:cs typeface="Calibri" pitchFamily="34" charset="-120"/>
+              </a:rPr>
+              <a:t>— login, catálogo, reservar.                </a:t>
+            </a:r>
+            <a:pPr algn="ctr" indent="0" marL="0">
+              <a:spcAft>
+                <a:spcPts val="800"/>
+              </a:spcAft>
+              <a:buNone/>
+            </a:pPr>
+            <a:r>
+              <a:rPr lang="en-US" sz="1600" b="1" dirty="0">
+                <a:solidFill>
+                  <a:srgbClr val="C68A2E"/>
+                </a:solidFill>
+                <a:latin typeface="Calibri" pitchFamily="34" charset="0"/>
+                <a:ea typeface="Calibri" pitchFamily="34" charset="-122"/>
+                <a:cs typeface="Calibri" pitchFamily="34" charset="-120"/>
+              </a:rPr>
+              <a:t>②  </a:t>
+            </a:r>
+            <a:pPr algn="ctr" indent="0" marL="0">
+              <a:spcAft>
+                <a:spcPts val="800"/>
+              </a:spcAft>
+              <a:buNone/>
+            </a:pPr>
+            <a:r>
+              <a:rPr lang="en-US" sz="1600" b="1" dirty="0">
+                <a:solidFill>
+                  <a:srgbClr val="FFFFFF"/>
+                </a:solidFill>
+                <a:latin typeface="Calibri" pitchFamily="34" charset="0"/>
+                <a:ea typeface="Calibri" pitchFamily="34" charset="-122"/>
+                <a:cs typeface="Calibri" pitchFamily="34" charset="-120"/>
+              </a:rPr>
+              <a:t>Operario  </a:t>
+            </a:r>
+            <a:pPr algn="ctr" indent="0" marL="0">
+              <a:spcAft>
+                <a:spcPts val="800"/>
+              </a:spcAft>
+              <a:buNone/>
+            </a:pPr>
+            <a:r>
+              <a:rPr lang="en-US" sz="1600" dirty="0">
+                <a:solidFill>
+                  <a:srgbClr val="CADCFC"/>
+                </a:solidFill>
+                <a:latin typeface="Calibri" pitchFamily="34" charset="0"/>
+                <a:ea typeface="Calibri" pitchFamily="34" charset="-122"/>
+                <a:cs typeface="Calibri" pitchFamily="34" charset="-120"/>
+              </a:rPr>
+              <a:t>— cola, confirmar, entregar.
+</a:t>
+            </a:r>
+            <a:pPr algn="ctr" indent="0" marL="0">
+              <a:spcAft>
+                <a:spcPts val="800"/>
+              </a:spcAft>
+              <a:buNone/>
+            </a:pPr>
+            <a:r>
+              <a:rPr lang="en-US" sz="1600" b="1" dirty="0">
+                <a:solidFill>
+                  <a:srgbClr val="C68A2E"/>
+                </a:solidFill>
+                <a:latin typeface="Calibri" pitchFamily="34" charset="0"/>
+                <a:ea typeface="Calibri" pitchFamily="34" charset="-122"/>
+                <a:cs typeface="Calibri" pitchFamily="34" charset="-120"/>
+              </a:rPr>
+              <a:t>③  </a:t>
+            </a:r>
+            <a:pPr algn="ctr" indent="0" marL="0">
+              <a:spcAft>
+                <a:spcPts val="800"/>
+              </a:spcAft>
+              <a:buNone/>
+            </a:pPr>
+            <a:r>
+              <a:rPr lang="en-US" sz="1600" b="1" dirty="0">
+                <a:solidFill>
+                  <a:srgbClr val="FFFFFF"/>
+                </a:solidFill>
+                <a:latin typeface="Calibri" pitchFamily="34" charset="0"/>
+                <a:ea typeface="Calibri" pitchFamily="34" charset="-122"/>
+                <a:cs typeface="Calibri" pitchFamily="34" charset="-120"/>
+              </a:rPr>
+              <a:t>Admin  </a:t>
+            </a:r>
+            <a:pPr algn="ctr" indent="0" marL="0">
+              <a:spcAft>
+                <a:spcPts val="800"/>
+              </a:spcAft>
+              <a:buNone/>
+            </a:pPr>
+            <a:r>
+              <a:rPr lang="en-US" sz="1600" dirty="0">
+                <a:solidFill>
+                  <a:srgbClr val="CADCFC"/>
+                </a:solidFill>
+                <a:latin typeface="Calibri" pitchFamily="34" charset="0"/>
+                <a:ea typeface="Calibri" pitchFamily="34" charset="-122"/>
+                <a:cs typeface="Calibri" pitchFamily="34" charset="-120"/>
+              </a:rPr>
+              <a:t>— dashboard KPIs.                </a:t>
+            </a:r>
+            <a:pPr algn="ctr" indent="0" marL="0">
+              <a:spcAft>
+                <a:spcPts val="800"/>
+              </a:spcAft>
+              <a:buNone/>
+            </a:pPr>
+            <a:r>
+              <a:rPr lang="en-US" sz="1600" b="1" dirty="0">
+                <a:solidFill>
+                  <a:srgbClr val="C68A2E"/>
+                </a:solidFill>
+                <a:latin typeface="Calibri" pitchFamily="34" charset="0"/>
+                <a:ea typeface="Calibri" pitchFamily="34" charset="-122"/>
+                <a:cs typeface="Calibri" pitchFamily="34" charset="-120"/>
+              </a:rPr>
+              <a:t>④  </a:t>
+            </a:r>
+            <a:pPr algn="ctr" indent="0" marL="0">
+              <a:spcAft>
+                <a:spcPts val="800"/>
+              </a:spcAft>
+              <a:buNone/>
+            </a:pPr>
+            <a:r>
+              <a:rPr lang="en-US" sz="1600" b="1" dirty="0">
+                <a:solidFill>
+                  <a:srgbClr val="FFFFFF"/>
+                </a:solidFill>
+                <a:latin typeface="Calibri" pitchFamily="34" charset="0"/>
+                <a:ea typeface="Calibri" pitchFamily="34" charset="-122"/>
+                <a:cs typeface="Calibri" pitchFamily="34" charset="-120"/>
+              </a:rPr>
+              <a:t>Android  </a:t>
+            </a:r>
+            <a:pPr algn="ctr" indent="0" marL="0">
+              <a:spcAft>
+                <a:spcPts val="800"/>
+              </a:spcAft>
+              <a:buNone/>
+            </a:pPr>
+            <a:r>
+              <a:rPr lang="en-US" sz="1600" dirty="0">
+                <a:solidFill>
+                  <a:srgbClr val="CADCFC"/>
+                </a:solidFill>
+                <a:latin typeface="Calibri" pitchFamily="34" charset="0"/>
+                <a:ea typeface="Calibri" pitchFamily="34" charset="-122"/>
+                <a:cs typeface="Calibri" pitchFamily="34" charset="-120"/>
+              </a:rPr>
+              <a:t>— lista, detalle, incidencia.</a:t>
+            </a:r>
+            <a:endParaRPr lang="en-US" sz="1600" dirty="0"/>
+          </a:p>
+        </p:txBody>
+      </p:sp>
+      <p:sp>
+        <p:nvSpPr>
+          <p:cNvPr id="6" name="Text 4"/>
+          <p:cNvSpPr/>
+          <p:nvPr/>
+        </p:nvSpPr>
+        <p:spPr>
+          <a:xfrm>
+            <a:off x="457200" y="5852160"/>
+            <a:ext cx="11277295" cy="365760"/>
+          </a:xfrm>
+          <a:prstGeom prst="rect">
+            <a:avLst/>
+          </a:prstGeom>
+          <a:noFill/>
+          <a:ln/>
+        </p:spPr>
+        <p:txBody>
+          <a:bodyPr wrap="square" rtlCol="0" anchor="ctr"/>
+          <a:lstStyle/>
+          <a:p>
+            <a:pPr algn="ctr" indent="0" marL="0">
+              <a:buNone/>
+            </a:pPr>
+            <a:r>
+              <a:rPr lang="en-US" sz="1200" i="1" dirty="0">
+                <a:solidFill>
+                  <a:srgbClr val="CADCFC"/>
+                </a:solidFill>
+                <a:latin typeface="Calibri" pitchFamily="34" charset="0"/>
+                <a:ea typeface="Calibri" pitchFamily="34" charset="-122"/>
+                <a:cs typeface="Calibri" pitchFamily="34" charset="-120"/>
+              </a:rPr>
+              <a:t>Plan B: capturas en las slides anteriores.</a:t>
+            </a:r>
+            <a:endParaRPr lang="en-US" sz="1200" dirty="0"/>
+          </a:p>
+        </p:txBody>
+      </p:sp>
+    </p:spTree>
+  </p:cSld>
+  <p:clrMapOvr>
+    <a:masterClrMapping/>
+  </p:clrMapOvr>
+</p:sld>
+</file>
+
+<file path=ppt/slides/slide17.xml><?xml version="1.0" encoding="utf-8"?>
+<p:sld xmlns:a="http://schemas.openxmlformats.org/drawingml/2006/main" xmlns:r="http://schemas.openxmlformats.org/officeDocument/2006/relationships" xmlns:p="http://schemas.openxmlformats.org/presentationml/2006/main">
+  <p:cSld name="Slide 17">
+    <p:spTree>
+      <p:nvGrpSpPr>
+        <p:cNvPr id="1" name=""/>
+        <p:cNvGrpSpPr/>
+        <p:nvPr/>
+      </p:nvGrpSpPr>
+      <p:grpSpPr>
+        <a:xfrm>
+          <a:off x="0" y="0"/>
+          <a:ext cx="0" cy="0"/>
+          <a:chOff x="0" y="0"/>
+          <a:chExt cx="0" cy="0"/>
+        </a:xfrm>
+      </p:grpSpPr>
+      <p:sp>
+        <p:nvSpPr>
+          <p:cNvPr id="2" name="Text 0"/>
+          <p:cNvSpPr/>
+          <p:nvPr/>
+        </p:nvSpPr>
+        <p:spPr>
+          <a:xfrm>
+            <a:off x="457200" y="164592"/>
+            <a:ext cx="11277295" cy="228600"/>
+          </a:xfrm>
+          <a:prstGeom prst="rect">
+            <a:avLst/>
+          </a:prstGeom>
+          <a:noFill/>
+          <a:ln/>
+        </p:spPr>
+        <p:txBody>
+          <a:bodyPr wrap="square" rtlCol="0" anchor="ctr"/>
+          <a:lstStyle/>
+          <a:p>
+            <a:pPr indent="0" marL="0">
+              <a:buNone/>
+            </a:pPr>
+            <a:r>
+              <a:rPr lang="en-US" sz="1000" b="1" spc="400" kern="0" dirty="0">
+                <a:solidFill>
+                  <a:srgbClr val="C68A2E"/>
+                </a:solidFill>
+                <a:latin typeface="Calibri" pitchFamily="34" charset="0"/>
+                <a:ea typeface="Calibri" pitchFamily="34" charset="-122"/>
+                <a:cs typeface="Calibri" pitchFamily="34" charset="-120"/>
+              </a:rPr>
+              <a:t>CIERRE</a:t>
+            </a:r>
+            <a:endParaRPr lang="en-US" sz="1000" dirty="0"/>
+          </a:p>
+        </p:txBody>
+      </p:sp>
+      <p:sp>
+        <p:nvSpPr>
+          <p:cNvPr id="3" name="Text 1"/>
+          <p:cNvSpPr/>
+          <p:nvPr/>
+        </p:nvSpPr>
+        <p:spPr>
+          <a:xfrm>
+            <a:off x="457200" y="365760"/>
+            <a:ext cx="11277295" cy="640080"/>
+          </a:xfrm>
+          <a:prstGeom prst="rect">
+            <a:avLst/>
+          </a:prstGeom>
+          <a:noFill/>
+          <a:ln/>
+        </p:spPr>
+        <p:txBody>
+          <a:bodyPr wrap="square" rtlCol="0" anchor="ctr"/>
+          <a:lstStyle/>
+          <a:p>
+            <a:pPr indent="0" marL="0">
+              <a:buNone/>
+            </a:pPr>
+            <a:r>
+              <a:rPr lang="en-US" sz="3200" b="1" dirty="0">
+                <a:solidFill>
+                  <a:srgbClr val="1E2761"/>
+                </a:solidFill>
+                <a:latin typeface="Calibri" pitchFamily="34" charset="0"/>
+                <a:ea typeface="Calibri" pitchFamily="34" charset="-122"/>
+                <a:cs typeface="Calibri" pitchFamily="34" charset="-120"/>
+              </a:rPr>
+              <a:t>Conclusiones y mejoras futuras</a:t>
+            </a:r>
+            <a:endParaRPr lang="en-US" sz="3200" dirty="0"/>
+          </a:p>
+        </p:txBody>
+      </p:sp>
+      <p:sp>
+        <p:nvSpPr>
+          <p:cNvPr id="4" name="Shape 2"/>
+          <p:cNvSpPr/>
+          <p:nvPr/>
+        </p:nvSpPr>
+        <p:spPr>
+          <a:xfrm>
+            <a:off x="457200" y="1024128"/>
+            <a:ext cx="411480" cy="64008"/>
+          </a:xfrm>
+          <a:prstGeom prst="rect">
+            <a:avLst/>
+          </a:prstGeom>
+          <a:solidFill>
+            <a:srgbClr val="C68A2E"/>
+          </a:solidFill>
+          <a:ln w="12700">
+            <a:solidFill>
+              <a:srgbClr val="C68A2E"/>
+            </a:solidFill>
+            <a:prstDash val="solid"/>
+          </a:ln>
+        </p:spPr>
+      </p:sp>
+      <p:sp>
+        <p:nvSpPr>
+          <p:cNvPr id="5" name="Shape 3"/>
+          <p:cNvSpPr/>
+          <p:nvPr/>
+        </p:nvSpPr>
+        <p:spPr>
+          <a:xfrm>
+            <a:off x="548640" y="1417320"/>
+            <a:ext cx="5577840" cy="4709160"/>
+          </a:xfrm>
+          <a:prstGeom prst="rect">
+            <a:avLst/>
+          </a:prstGeom>
+          <a:solidFill>
+            <a:srgbClr val="F8FAFC"/>
+          </a:solidFill>
+          <a:ln w="12700">
+            <a:solidFill>
+              <a:srgbClr val="E5E7EB"/>
+            </a:solidFill>
+            <a:prstDash val="solid"/>
+          </a:ln>
+        </p:spPr>
+      </p:sp>
+      <p:sp>
+        <p:nvSpPr>
+          <p:cNvPr id="6" name="Shape 4"/>
+          <p:cNvSpPr/>
+          <p:nvPr/>
+        </p:nvSpPr>
+        <p:spPr>
+          <a:xfrm>
+            <a:off x="548640" y="1417320"/>
+            <a:ext cx="5577840" cy="411480"/>
+          </a:xfrm>
+          <a:prstGeom prst="rect">
+            <a:avLst/>
+          </a:prstGeom>
+          <a:solidFill>
+            <a:srgbClr val="1E2761"/>
+          </a:solidFill>
+          <a:ln w="12700">
+            <a:solidFill>
+              <a:srgbClr val="1E2761"/>
+            </a:solidFill>
+            <a:prstDash val="solid"/>
+          </a:ln>
+        </p:spPr>
+      </p:sp>
+      <p:sp>
+        <p:nvSpPr>
+          <p:cNvPr id="7" name="Text 5"/>
+          <p:cNvSpPr/>
+          <p:nvPr/>
+        </p:nvSpPr>
+        <p:spPr>
+          <a:xfrm>
+            <a:off x="731520" y="1463040"/>
+            <a:ext cx="4572000" cy="320040"/>
+          </a:xfrm>
+          <a:prstGeom prst="rect">
+            <a:avLst/>
+          </a:prstGeom>
+          <a:noFill/>
+          <a:ln/>
+        </p:spPr>
+        <p:txBody>
+          <a:bodyPr wrap="square" rtlCol="0" anchor="ctr"/>
+          <a:lstStyle/>
+          <a:p>
+            <a:pPr indent="0" marL="0">
+              <a:buNone/>
+            </a:pPr>
+            <a:r>
+              <a:rPr lang="en-US" sz="1400" b="1" dirty="0">
+                <a:solidFill>
+                  <a:srgbClr val="FFFFFF"/>
+                </a:solidFill>
+              </a:rPr>
+              <a:t>Objetivos cumplidos</a:t>
+            </a:r>
+            <a:endParaRPr lang="en-US" sz="1400" dirty="0"/>
+          </a:p>
+        </p:txBody>
+      </p:sp>
+      <p:sp>
+        <p:nvSpPr>
+          <p:cNvPr id="8" name="Text 6"/>
+          <p:cNvSpPr/>
+          <p:nvPr/>
+        </p:nvSpPr>
+        <p:spPr>
+          <a:xfrm>
+            <a:off x="777240" y="1965960"/>
+            <a:ext cx="5166360" cy="4023360"/>
+          </a:xfrm>
+          <a:prstGeom prst="rect">
+            <a:avLst/>
+          </a:prstGeom>
+          <a:noFill/>
+          <a:ln/>
+        </p:spPr>
+        <p:txBody>
+          <a:bodyPr wrap="square" rtlCol="0" anchor="ctr"/>
+          <a:lstStyle/>
+          <a:p>
+            <a:pPr marL="342900" indent="-342900">
+              <a:spcAft>
+                <a:spcPts val="800"/>
+              </a:spcAft>
+              <a:buSzPct val="100000"/>
+              <a:buChar char="✓"/>
+            </a:pPr>
+            <a:r>
+              <a:rPr lang="en-US" sz="1400" dirty="0">
+                <a:solidFill>
+                  <a:srgbClr val="1F2937"/>
+                </a:solidFill>
+              </a:rPr>
+              <a:t>API REST con JWT y control por roles.</a:t>
+            </a:r>
+            <a:endParaRPr lang="en-US" sz="1400" dirty="0"/>
+          </a:p>
+          <a:p>
+            <a:pPr marL="342900" indent="-342900">
+              <a:spcAft>
+                <a:spcPts val="800"/>
+              </a:spcAft>
+              <a:buSzPct val="100000"/>
+              <a:buChar char="✓"/>
+            </a:pPr>
+            <a:r>
+              <a:rPr lang="en-US" sz="1400" dirty="0">
+                <a:solidFill>
+                  <a:srgbClr val="1F2937"/>
+                </a:solidFill>
+              </a:rPr>
+              <a:t>Reservas concurrentes consistentes (FOR UPDATE).</a:t>
+            </a:r>
+            <a:endParaRPr lang="en-US" sz="1400" dirty="0"/>
+          </a:p>
+          <a:p>
+            <a:pPr marL="342900" indent="-342900">
+              <a:spcAft>
+                <a:spcPts val="800"/>
+              </a:spcAft>
+              <a:buSzPct val="100000"/>
+              <a:buChar char="✓"/>
+            </a:pPr>
+            <a:r>
+              <a:rPr lang="en-US" sz="1400" dirty="0">
+                <a:solidFill>
+                  <a:srgbClr val="1F2937"/>
+                </a:solidFill>
+              </a:rPr>
+              <a:t>Frontend SPA instalable como PWA, modo oscuro.</a:t>
+            </a:r>
+            <a:endParaRPr lang="en-US" sz="1400" dirty="0"/>
+          </a:p>
+          <a:p>
+            <a:pPr marL="342900" indent="-342900">
+              <a:spcAft>
+                <a:spcPts val="800"/>
+              </a:spcAft>
+              <a:buSzPct val="100000"/>
+              <a:buChar char="✓"/>
+            </a:pPr>
+            <a:r>
+              <a:rPr lang="en-US" sz="1400" dirty="0">
+                <a:solidFill>
+                  <a:srgbClr val="1F2937"/>
+                </a:solidFill>
+              </a:rPr>
+              <a:t>App Android nativa funcional para el operario.</a:t>
+            </a:r>
+            <a:endParaRPr lang="en-US" sz="1400" dirty="0"/>
+          </a:p>
+          <a:p>
+            <a:pPr marL="342900" indent="-342900">
+              <a:spcAft>
+                <a:spcPts val="800"/>
+              </a:spcAft>
+              <a:buSzPct val="100000"/>
+              <a:buChar char="✓"/>
+            </a:pPr>
+            <a:r>
+              <a:rPr lang="en-US" sz="1400" dirty="0">
+                <a:solidFill>
+                  <a:srgbClr val="1F2937"/>
+                </a:solidFill>
+              </a:rPr>
+              <a:t>Despliegue cloud público con HTTPS.</a:t>
+            </a:r>
+            <a:endParaRPr lang="en-US" sz="1400" dirty="0"/>
+          </a:p>
+          <a:p>
+            <a:pPr marL="342900" indent="-342900">
+              <a:spcAft>
+                <a:spcPts val="800"/>
+              </a:spcAft>
+              <a:buSzPct val="100000"/>
+              <a:buChar char="✓"/>
+            </a:pPr>
+            <a:r>
+              <a:rPr lang="en-US" sz="1400" dirty="0">
+                <a:solidFill>
+                  <a:srgbClr val="1F2937"/>
+                </a:solidFill>
+              </a:rPr>
+              <a:t>Tests automatizados sobre flujos críticos.</a:t>
+            </a:r>
+            <a:endParaRPr lang="en-US" sz="1400" dirty="0"/>
+          </a:p>
+        </p:txBody>
+      </p:sp>
+      <p:sp>
+        <p:nvSpPr>
+          <p:cNvPr id="9" name="Shape 7"/>
+          <p:cNvSpPr/>
+          <p:nvPr/>
+        </p:nvSpPr>
+        <p:spPr>
+          <a:xfrm>
+            <a:off x="6263640" y="1417320"/>
+            <a:ext cx="5379415" cy="4709160"/>
+          </a:xfrm>
+          <a:prstGeom prst="rect">
+            <a:avLst/>
+          </a:prstGeom>
+          <a:solidFill>
+            <a:srgbClr val="F8FAFC"/>
+          </a:solidFill>
+          <a:ln w="12700">
+            <a:solidFill>
+              <a:srgbClr val="E5E7EB"/>
+            </a:solidFill>
+            <a:prstDash val="solid"/>
+          </a:ln>
+        </p:spPr>
+      </p:sp>
+      <p:sp>
+        <p:nvSpPr>
+          <p:cNvPr id="10" name="Shape 8"/>
+          <p:cNvSpPr/>
+          <p:nvPr/>
+        </p:nvSpPr>
+        <p:spPr>
+          <a:xfrm>
+            <a:off x="6263640" y="1417320"/>
+            <a:ext cx="5379415" cy="411480"/>
+          </a:xfrm>
+          <a:prstGeom prst="rect">
+            <a:avLst/>
+          </a:prstGeom>
+          <a:solidFill>
+            <a:srgbClr val="C68A2E"/>
+          </a:solidFill>
+          <a:ln w="12700">
+            <a:solidFill>
+              <a:srgbClr val="C68A2E"/>
+            </a:solidFill>
+            <a:prstDash val="solid"/>
+          </a:ln>
+        </p:spPr>
+      </p:sp>
+      <p:sp>
+        <p:nvSpPr>
+          <p:cNvPr id="11" name="Text 9"/>
+          <p:cNvSpPr/>
+          <p:nvPr/>
+        </p:nvSpPr>
+        <p:spPr>
+          <a:xfrm>
+            <a:off x="6446520" y="1463040"/>
+            <a:ext cx="4572000" cy="320040"/>
+          </a:xfrm>
+          <a:prstGeom prst="rect">
+            <a:avLst/>
+          </a:prstGeom>
+          <a:noFill/>
+          <a:ln/>
+        </p:spPr>
+        <p:txBody>
+          <a:bodyPr wrap="square" rtlCol="0" anchor="ctr"/>
+          <a:lstStyle/>
+          <a:p>
+            <a:pPr indent="0" marL="0">
+              <a:buNone/>
+            </a:pPr>
+            <a:r>
+              <a:rPr lang="en-US" sz="1400" b="1" dirty="0">
+                <a:solidFill>
+                  <a:srgbClr val="FFFFFF"/>
+                </a:solidFill>
+              </a:rPr>
+              <a:t>Mejoras futuras</a:t>
+            </a:r>
+            <a:endParaRPr lang="en-US" sz="1400" dirty="0"/>
+          </a:p>
+        </p:txBody>
+      </p:sp>
+      <p:sp>
+        <p:nvSpPr>
+          <p:cNvPr id="12" name="Text 10"/>
+          <p:cNvSpPr/>
+          <p:nvPr/>
+        </p:nvSpPr>
+        <p:spPr>
+          <a:xfrm>
+            <a:off x="6492240" y="1965960"/>
+            <a:ext cx="5150815" cy="4023360"/>
+          </a:xfrm>
+          <a:prstGeom prst="rect">
+            <a:avLst/>
+          </a:prstGeom>
+          <a:noFill/>
+          <a:ln/>
+        </p:spPr>
+        <p:txBody>
+          <a:bodyPr wrap="square" rtlCol="0" anchor="ctr"/>
+          <a:lstStyle/>
+          <a:p>
+            <a:pPr marL="342900" indent="-342900">
+              <a:spcAft>
+                <a:spcPts val="800"/>
+              </a:spcAft>
+              <a:buSzPct val="100000"/>
+              <a:buChar char="▸"/>
+            </a:pPr>
+            <a:r>
+              <a:rPr lang="en-US" sz="1400" dirty="0">
+                <a:solidFill>
+                  <a:srgbClr val="1F2937"/>
+                </a:solidFill>
+              </a:rPr>
+              <a:t>Documentación OpenAPI / Swagger.</a:t>
+            </a:r>
+            <a:endParaRPr lang="en-US" sz="1400" dirty="0"/>
+          </a:p>
+          <a:p>
+            <a:pPr marL="342900" indent="-342900">
+              <a:spcAft>
+                <a:spcPts val="800"/>
+              </a:spcAft>
+              <a:buSzPct val="100000"/>
+              <a:buChar char="▸"/>
+            </a:pPr>
+            <a:r>
+              <a:rPr lang="en-US" sz="1400" dirty="0">
+                <a:solidFill>
+                  <a:srgbClr val="1F2937"/>
+                </a:solidFill>
+              </a:rPr>
+              <a:t>Validación centralizada con Zod.</a:t>
+            </a:r>
+            <a:endParaRPr lang="en-US" sz="1400" dirty="0"/>
+          </a:p>
+          <a:p>
+            <a:pPr marL="342900" indent="-342900">
+              <a:spcAft>
+                <a:spcPts val="800"/>
+              </a:spcAft>
+              <a:buSzPct val="100000"/>
+              <a:buChar char="▸"/>
+            </a:pPr>
+            <a:r>
+              <a:rPr lang="en-US" sz="1400" dirty="0">
+                <a:solidFill>
+                  <a:srgbClr val="1F2937"/>
+                </a:solidFill>
+              </a:rPr>
+              <a:t>Workflow formal en GitHub Actions.</a:t>
+            </a:r>
+            <a:endParaRPr lang="en-US" sz="1400" dirty="0"/>
+          </a:p>
+          <a:p>
+            <a:pPr marL="342900" indent="-342900">
+              <a:spcAft>
+                <a:spcPts val="800"/>
+              </a:spcAft>
+              <a:buSzPct val="100000"/>
+              <a:buChar char="▸"/>
+            </a:pPr>
+            <a:r>
+              <a:rPr lang="en-US" sz="1400" dirty="0">
+                <a:solidFill>
+                  <a:srgbClr val="1F2937"/>
+                </a:solidFill>
+              </a:rPr>
+              <a:t>Escáner de código de barras (CameraX + ML Kit).</a:t>
+            </a:r>
+            <a:endParaRPr lang="en-US" sz="1400" dirty="0"/>
+          </a:p>
+          <a:p>
+            <a:pPr marL="342900" indent="-342900">
+              <a:spcAft>
+                <a:spcPts val="800"/>
+              </a:spcAft>
+              <a:buSzPct val="100000"/>
+              <a:buChar char="▸"/>
+            </a:pPr>
+            <a:r>
+              <a:rPr lang="en-US" sz="1400" dirty="0">
+                <a:solidFill>
+                  <a:srgbClr val="1F2937"/>
+                </a:solidFill>
+              </a:rPr>
+              <a:t>Cola offline con Room en la app Android.</a:t>
+            </a:r>
+            <a:endParaRPr lang="en-US" sz="1400" dirty="0"/>
+          </a:p>
+          <a:p>
+            <a:pPr marL="342900" indent="-342900">
+              <a:spcAft>
+                <a:spcPts val="800"/>
+              </a:spcAft>
+              <a:buSzPct val="100000"/>
+              <a:buChar char="▸"/>
+            </a:pPr>
+            <a:r>
+              <a:rPr lang="en-US" sz="1400" dirty="0">
+                <a:solidFill>
+                  <a:srgbClr val="1F2937"/>
+                </a:solidFill>
+              </a:rPr>
+              <a:t>BiometricPrompt antes de exponer la sesión.</a:t>
+            </a:r>
+            <a:endParaRPr lang="en-US" sz="1400" dirty="0"/>
+          </a:p>
+          <a:p>
+            <a:pPr marL="342900" indent="-342900">
+              <a:spcAft>
+                <a:spcPts val="800"/>
+              </a:spcAft>
+              <a:buSzPct val="100000"/>
+              <a:buChar char="▸"/>
+            </a:pPr>
+            <a:r>
+              <a:rPr lang="en-US" sz="1400" dirty="0">
+                <a:solidFill>
+                  <a:srgbClr val="1F2937"/>
+                </a:solidFill>
+              </a:rPr>
+              <a:t>Accesibilidad WCAG AA completa.</a:t>
+            </a:r>
+            <a:endParaRPr lang="en-US" sz="1400" dirty="0"/>
+          </a:p>
+        </p:txBody>
+      </p:sp>
+    </p:spTree>
+  </p:cSld>
+  <p:clrMapOvr>
+    <a:masterClrMapping/>
+  </p:clrMapOvr>
+</p:sld>
+</file>
+
+<file path=ppt/slides/slide18.xml><?xml version="1.0" encoding="utf-8"?>
+<p:sld xmlns:a="http://schemas.openxmlformats.org/drawingml/2006/main" xmlns:r="http://schemas.openxmlformats.org/officeDocument/2006/relationships" xmlns:p="http://schemas.openxmlformats.org/presentationml/2006/main">
+  <p:cSld name="Slide 18">
     <p:bg>
       <p:bgPr>
         <a:solidFill>
